--- a/policy/proposal_010.pptx
+++ b/policy/proposal_010.pptx
@@ -2726,7 +2726,7 @@
     <p:bg>
       <p:bgPr>
         <a:solidFill>
-          <a:srgbClr val="0A0A0A"/>
+          <a:srgbClr val="F5F6F8"/>
         </a:solidFill>
       </p:bgPr>
     </p:bg>
@@ -2759,11 +2759,11 @@
             <a:avLst/>
           </a:prstGeom>
           <a:solidFill>
-            <a:srgbClr val="D62828"/>
+            <a:srgbClr val="C8161D"/>
           </a:solidFill>
           <a:ln w="12700">
             <a:solidFill>
-              <a:srgbClr val="D62828"/>
+              <a:srgbClr val="C8161D"/>
             </a:solidFill>
             <a:prstDash val="solid"/>
           </a:ln>
@@ -2796,11 +2796,11 @@
             <a:r>
               <a:rPr lang="en-US" sz="1000" b="1" spc="300" kern="0" dirty="0">
                 <a:solidFill>
-                  <a:srgbClr val="D62828"/>
-                </a:solidFill>
-                <a:latin typeface="Arial" pitchFamily="34" charset="0"/>
-                <a:ea typeface="Arial" pitchFamily="34" charset="-122"/>
-                <a:cs typeface="Arial" pitchFamily="34" charset="-120"/>
+                  <a:srgbClr val="C8161D"/>
+                </a:solidFill>
+                <a:latin typeface="Arial" pitchFamily="34" charset="0"/>
+                <a:ea typeface="BIZ UDPGothic" pitchFamily="34" charset="-122"/>
+                <a:cs typeface="BIZ UDPGothic" pitchFamily="34" charset="-120"/>
               </a:rPr>
               <a:t>政策提言プラットフォーム ── 提言010</a:t>
             </a:r>
@@ -2835,11 +2835,11 @@
             <a:r>
               <a:rPr lang="en-US" sz="3000" b="1" dirty="0">
                 <a:solidFill>
-                  <a:srgbClr val="F5F5F0"/>
-                </a:solidFill>
-                <a:latin typeface="Cambria" pitchFamily="34" charset="0"/>
-                <a:ea typeface="Cambria" pitchFamily="34" charset="-122"/>
-                <a:cs typeface="Cambria" pitchFamily="34" charset="-120"/>
+                  <a:srgbClr val="16181D"/>
+                </a:solidFill>
+                <a:latin typeface="BIZ UDPGothic" pitchFamily="34" charset="0"/>
+                <a:ea typeface="BIZ UDPGothic" pitchFamily="34" charset="-122"/>
+                <a:cs typeface="BIZ UDPGothic" pitchFamily="34" charset="-120"/>
               </a:rPr>
               <a:t>土地・不動産の</a:t>
             </a:r>
@@ -2852,11 +2852,11 @@
             <a:r>
               <a:rPr lang="en-US" sz="3000" b="1" dirty="0">
                 <a:solidFill>
-                  <a:srgbClr val="F5F5F0"/>
-                </a:solidFill>
-                <a:latin typeface="Cambria" pitchFamily="34" charset="0"/>
-                <a:ea typeface="Cambria" pitchFamily="34" charset="-122"/>
-                <a:cs typeface="Cambria" pitchFamily="34" charset="-120"/>
+                  <a:srgbClr val="16181D"/>
+                </a:solidFill>
+                <a:latin typeface="BIZ UDPGothic" pitchFamily="34" charset="0"/>
+                <a:ea typeface="BIZ UDPGothic" pitchFamily="34" charset="-122"/>
+                <a:cs typeface="BIZ UDPGothic" pitchFamily="34" charset="-120"/>
               </a:rPr>
               <a:t>外国人・外国資本</a:t>
             </a:r>
@@ -2869,11 +2869,11 @@
             <a:r>
               <a:rPr lang="en-US" sz="3000" b="1" dirty="0">
                 <a:solidFill>
-                  <a:srgbClr val="F5F5F0"/>
-                </a:solidFill>
-                <a:latin typeface="Cambria" pitchFamily="34" charset="0"/>
-                <a:ea typeface="Cambria" pitchFamily="34" charset="-122"/>
-                <a:cs typeface="Cambria" pitchFamily="34" charset="-120"/>
+                  <a:srgbClr val="16181D"/>
+                </a:solidFill>
+                <a:latin typeface="BIZ UDPGothic" pitchFamily="34" charset="0"/>
+                <a:ea typeface="BIZ UDPGothic" pitchFamily="34" charset="-122"/>
+                <a:cs typeface="BIZ UDPGothic" pitchFamily="34" charset="-120"/>
               </a:rPr>
               <a:t>取得規制プラン</a:t>
             </a:r>
@@ -2908,11 +2908,11 @@
             <a:r>
               <a:rPr lang="en-US" sz="1200" dirty="0">
                 <a:solidFill>
-                  <a:srgbClr val="888888"/>
-                </a:solidFill>
-                <a:latin typeface="Arial" pitchFamily="34" charset="0"/>
-                <a:ea typeface="Arial" pitchFamily="34" charset="-122"/>
-                <a:cs typeface="Arial" pitchFamily="34" charset="-120"/>
+                  <a:srgbClr val="626875"/>
+                </a:solidFill>
+                <a:latin typeface="Arial" pitchFamily="34" charset="0"/>
+                <a:ea typeface="BIZ UDPGothic" pitchFamily="34" charset="-122"/>
+                <a:cs typeface="BIZ UDPGothic" pitchFamily="34" charset="-120"/>
               </a:rPr>
               <a:t>～国土は誰のものか。所有権の原則を取り戻す～</a:t>
             </a:r>
@@ -2935,11 +2935,11 @@
             <a:avLst/>
           </a:prstGeom>
           <a:solidFill>
-            <a:srgbClr val="2E2E2E"/>
+            <a:srgbClr val="DDE0E6"/>
           </a:solidFill>
           <a:ln w="12700">
             <a:solidFill>
-              <a:srgbClr val="2E2E2E"/>
+              <a:srgbClr val="DDE0E6"/>
             </a:solidFill>
             <a:prstDash val="solid"/>
           </a:ln>
@@ -2972,11 +2972,11 @@
             <a:r>
               <a:rPr lang="en-US" sz="1100" dirty="0">
                 <a:solidFill>
-                  <a:srgbClr val="888888"/>
-                </a:solidFill>
-                <a:latin typeface="Arial" pitchFamily="34" charset="0"/>
-                <a:ea typeface="Arial" pitchFamily="34" charset="-122"/>
-                <a:cs typeface="Arial" pitchFamily="34" charset="-120"/>
+                  <a:srgbClr val="626875"/>
+                </a:solidFill>
+                <a:latin typeface="Arial" pitchFamily="34" charset="0"/>
+                <a:ea typeface="BIZ UDPGothic" pitchFamily="34" charset="-122"/>
+                <a:cs typeface="BIZ UDPGothic" pitchFamily="34" charset="-120"/>
               </a:rPr>
               <a:t>REBOOT JAPAN ── 市民による政策提言プラットフォーム</a:t>
             </a:r>
@@ -2998,7 +2998,7 @@
     <p:bg>
       <p:bgPr>
         <a:solidFill>
-          <a:srgbClr val="0A0A0A"/>
+          <a:srgbClr val="F5F6F8"/>
         </a:solidFill>
       </p:bgPr>
     </p:bg>
@@ -3043,11 +3043,11 @@
             <a:r>
               <a:rPr lang="en-US" sz="900" b="1" spc="400" kern="0" dirty="0">
                 <a:solidFill>
-                  <a:srgbClr val="D62828"/>
-                </a:solidFill>
-                <a:latin typeface="Arial" pitchFamily="34" charset="0"/>
-                <a:ea typeface="Arial" pitchFamily="34" charset="-122"/>
-                <a:cs typeface="Arial" pitchFamily="34" charset="-120"/>
+                  <a:srgbClr val="C8161D"/>
+                </a:solidFill>
+                <a:latin typeface="Arial" pitchFamily="34" charset="0"/>
+                <a:ea typeface="BIZ UDPGothic" pitchFamily="34" charset="-122"/>
+                <a:cs typeface="BIZ UDPGothic" pitchFamily="34" charset="-120"/>
               </a:rPr>
               <a:t>RULE 01 — RENTAL</a:t>
             </a:r>
@@ -3082,11 +3082,11 @@
             <a:r>
               <a:rPr lang="en-US" sz="2400" b="1" dirty="0">
                 <a:solidFill>
-                  <a:srgbClr val="F5F5F0"/>
-                </a:solidFill>
-                <a:latin typeface="Cambria" pitchFamily="34" charset="0"/>
-                <a:ea typeface="Cambria" pitchFamily="34" charset="-122"/>
-                <a:cs typeface="Cambria" pitchFamily="34" charset="-120"/>
+                  <a:srgbClr val="16181D"/>
+                </a:solidFill>
+                <a:latin typeface="BIZ UDPGothic" pitchFamily="34" charset="0"/>
+                <a:ea typeface="BIZ UDPGothic" pitchFamily="34" charset="-122"/>
+                <a:cs typeface="BIZ UDPGothic" pitchFamily="34" charset="-120"/>
               </a:rPr>
               <a:t>外国企業は日本で工場を建てられなくなるの？</a:t>
             </a:r>
@@ -3109,11 +3109,11 @@
             <a:avLst/>
           </a:prstGeom>
           <a:solidFill>
-            <a:srgbClr val="2E2E2E"/>
+            <a:srgbClr val="DDE0E6"/>
           </a:solidFill>
           <a:ln w="12700">
             <a:solidFill>
-              <a:srgbClr val="2E2E2E"/>
+              <a:srgbClr val="DDE0E6"/>
             </a:solidFill>
             <a:prstDash val="solid"/>
           </a:ln>
@@ -3146,11 +3146,11 @@
             <a:r>
               <a:rPr lang="en-US" sz="1100" dirty="0">
                 <a:solidFill>
-                  <a:srgbClr val="CCCCCC"/>
-                </a:solidFill>
-                <a:latin typeface="Arial" pitchFamily="34" charset="0"/>
-                <a:ea typeface="Arial" pitchFamily="34" charset="-122"/>
-                <a:cs typeface="Arial" pitchFamily="34" charset="-120"/>
+                  <a:srgbClr val="2B2F36"/>
+                </a:solidFill>
+                <a:latin typeface="Arial" pitchFamily="34" charset="0"/>
+                <a:ea typeface="BIZ UDPGothic" pitchFamily="34" charset="-122"/>
+                <a:cs typeface="BIZ UDPGothic" pitchFamily="34" charset="-120"/>
               </a:rPr>
               <a:t>土地を「買う」ことはできないが、「借りる（賃貸）」ことはできる。半導体工場などの誘致は引き続き可能。</a:t>
             </a:r>
@@ -3175,11 +3175,11 @@
             </a:avLst>
           </a:prstGeom>
           <a:solidFill>
-            <a:srgbClr val="141414"/>
+            <a:srgbClr val="FFFFFF"/>
           </a:solidFill>
           <a:ln w="12700">
             <a:solidFill>
-              <a:srgbClr val="2E2E2E"/>
+              <a:srgbClr val="DDE0E6"/>
             </a:solidFill>
             <a:prstDash val="solid"/>
           </a:ln>
@@ -3212,11 +3212,11 @@
             <a:r>
               <a:rPr lang="en-US" sz="1300" b="1" dirty="0">
                 <a:solidFill>
-                  <a:srgbClr val="F5F5F0"/>
-                </a:solidFill>
-                <a:latin typeface="Cambria" pitchFamily="34" charset="0"/>
-                <a:ea typeface="Cambria" pitchFamily="34" charset="-122"/>
-                <a:cs typeface="Cambria" pitchFamily="34" charset="-120"/>
+                  <a:srgbClr val="16181D"/>
+                </a:solidFill>
+                <a:latin typeface="BIZ UDPGothic" pitchFamily="34" charset="0"/>
+                <a:ea typeface="BIZ UDPGothic" pitchFamily="34" charset="-122"/>
+                <a:cs typeface="BIZ UDPGothic" pitchFamily="34" charset="-120"/>
               </a:rPr>
               <a:t>外国企業が工場を建てたいとき</a:t>
             </a:r>
@@ -3254,11 +3254,11 @@
             <a:r>
               <a:rPr lang="en-US" sz="1100" dirty="0">
                 <a:solidFill>
-                  <a:srgbClr val="CCCCCC"/>
-                </a:solidFill>
-                <a:latin typeface="Arial" pitchFamily="34" charset="0"/>
-                <a:ea typeface="Arial" pitchFamily="34" charset="-122"/>
-                <a:cs typeface="Arial" pitchFamily="34" charset="-120"/>
+                  <a:srgbClr val="2B2F36"/>
+                </a:solidFill>
+                <a:latin typeface="Arial" pitchFamily="34" charset="0"/>
+                <a:ea typeface="BIZ UDPGothic" pitchFamily="34" charset="-122"/>
+                <a:cs typeface="BIZ UDPGothic" pitchFamily="34" charset="-120"/>
               </a:rPr>
               <a:t>外国企業は土地を直接買えない</a:t>
             </a:r>
@@ -3274,11 +3274,11 @@
             <a:r>
               <a:rPr lang="en-US" sz="1100" dirty="0">
                 <a:solidFill>
-                  <a:srgbClr val="CCCCCC"/>
-                </a:solidFill>
-                <a:latin typeface="Arial" pitchFamily="34" charset="0"/>
-                <a:ea typeface="Arial" pitchFamily="34" charset="-122"/>
-                <a:cs typeface="Arial" pitchFamily="34" charset="-120"/>
+                  <a:srgbClr val="2B2F36"/>
+                </a:solidFill>
+                <a:latin typeface="Arial" pitchFamily="34" charset="0"/>
+                <a:ea typeface="BIZ UDPGothic" pitchFamily="34" charset="-122"/>
+                <a:cs typeface="BIZ UDPGothic" pitchFamily="34" charset="-120"/>
               </a:rPr>
               <a:t>→ 日本企業が土地を買う（日本企業が地主になる）</a:t>
             </a:r>
@@ -3294,11 +3294,11 @@
             <a:r>
               <a:rPr lang="en-US" sz="1100" dirty="0">
                 <a:solidFill>
-                  <a:srgbClr val="CCCCCC"/>
-                </a:solidFill>
-                <a:latin typeface="Arial" pitchFamily="34" charset="0"/>
-                <a:ea typeface="Arial" pitchFamily="34" charset="-122"/>
-                <a:cs typeface="Arial" pitchFamily="34" charset="-120"/>
+                  <a:srgbClr val="2B2F36"/>
+                </a:solidFill>
+                <a:latin typeface="Arial" pitchFamily="34" charset="0"/>
+                <a:ea typeface="BIZ UDPGothic" pitchFamily="34" charset="-122"/>
+                <a:cs typeface="BIZ UDPGothic" pitchFamily="34" charset="-120"/>
               </a:rPr>
               <a:t>→ 日本企業が外国企業に土地を貸す（賃貸契約）</a:t>
             </a:r>
@@ -3314,11 +3314,11 @@
             <a:r>
               <a:rPr lang="en-US" sz="1100" dirty="0">
                 <a:solidFill>
-                  <a:srgbClr val="CCCCCC"/>
-                </a:solidFill>
-                <a:latin typeface="Arial" pitchFamily="34" charset="0"/>
-                <a:ea typeface="Arial" pitchFamily="34" charset="-122"/>
-                <a:cs typeface="Arial" pitchFamily="34" charset="-120"/>
+                  <a:srgbClr val="2B2F36"/>
+                </a:solidFill>
+                <a:latin typeface="Arial" pitchFamily="34" charset="0"/>
+                <a:ea typeface="BIZ UDPGothic" pitchFamily="34" charset="-122"/>
+                <a:cs typeface="BIZ UDPGothic" pitchFamily="34" charset="-120"/>
               </a:rPr>
               <a:t>→ 外国企業はその土地に工場を建てて使う</a:t>
             </a:r>
@@ -3343,11 +3343,11 @@
             </a:avLst>
           </a:prstGeom>
           <a:solidFill>
-            <a:srgbClr val="081808"/>
+            <a:srgbClr val="E9EFF8"/>
           </a:solidFill>
           <a:ln w="12700">
             <a:solidFill>
-              <a:srgbClr val="2E2E2E"/>
+              <a:srgbClr val="DDE0E6"/>
             </a:solidFill>
             <a:prstDash val="solid"/>
           </a:ln>
@@ -3380,11 +3380,11 @@
             <a:r>
               <a:rPr lang="en-US" sz="1300" b="1" dirty="0">
                 <a:solidFill>
-                  <a:srgbClr val="4CAF50"/>
-                </a:solidFill>
-                <a:latin typeface="Cambria" pitchFamily="34" charset="0"/>
-                <a:ea typeface="Cambria" pitchFamily="34" charset="-122"/>
-                <a:cs typeface="Cambria" pitchFamily="34" charset="-120"/>
+                  <a:srgbClr val="1D4F91"/>
+                </a:solidFill>
+                <a:latin typeface="BIZ UDPGothic" pitchFamily="34" charset="0"/>
+                <a:ea typeface="BIZ UDPGothic" pitchFamily="34" charset="-122"/>
+                <a:cs typeface="BIZ UDPGothic" pitchFamily="34" charset="-120"/>
               </a:rPr>
               <a:t>これが「戦略的な武器」になる</a:t>
             </a:r>
@@ -3419,11 +3419,11 @@
             <a:r>
               <a:rPr lang="en-US" sz="1100" dirty="0">
                 <a:solidFill>
-                  <a:srgbClr val="CCCCCC"/>
-                </a:solidFill>
-                <a:latin typeface="Arial" pitchFamily="34" charset="0"/>
-                <a:ea typeface="Arial" pitchFamily="34" charset="-122"/>
-                <a:cs typeface="Arial" pitchFamily="34" charset="-120"/>
+                  <a:srgbClr val="2B2F36"/>
+                </a:solidFill>
+                <a:latin typeface="Arial" pitchFamily="34" charset="0"/>
+                <a:ea typeface="BIZ UDPGothic" pitchFamily="34" charset="-122"/>
+                <a:cs typeface="BIZ UDPGothic" pitchFamily="34" charset="-120"/>
               </a:rPr>
               <a:t>地主（日本企業）が賃料を安くすれば、外国企業の誘致がしやすくなる。逆に言えば、「この企業を日本に呼びたいか」によって条件を変えられる。土地の所有権は常に日本側にある状態で、利用権だけを戦略的に使える設計になる。</a:t>
             </a:r>
@@ -3445,7 +3445,7 @@
     <p:bg>
       <p:bgPr>
         <a:solidFill>
-          <a:srgbClr val="0A0A0A"/>
+          <a:srgbClr val="F5F6F8"/>
         </a:solidFill>
       </p:bgPr>
     </p:bg>
@@ -3490,11 +3490,11 @@
             <a:r>
               <a:rPr lang="en-US" sz="900" b="1" spc="400" kern="0" dirty="0">
                 <a:solidFill>
-                  <a:srgbClr val="D62828"/>
-                </a:solidFill>
-                <a:latin typeface="Arial" pitchFamily="34" charset="0"/>
-                <a:ea typeface="Arial" pitchFamily="34" charset="-122"/>
-                <a:cs typeface="Arial" pitchFamily="34" charset="-120"/>
+                  <a:srgbClr val="C8161D"/>
+                </a:solidFill>
+                <a:latin typeface="Arial" pitchFamily="34" charset="0"/>
+                <a:ea typeface="BIZ UDPGothic" pitchFamily="34" charset="-122"/>
+                <a:cs typeface="BIZ UDPGothic" pitchFamily="34" charset="-120"/>
               </a:rPr>
               <a:t>RULE 02</a:t>
             </a:r>
@@ -3529,11 +3529,11 @@
             <a:r>
               <a:rPr lang="en-US" sz="2800" b="1" dirty="0">
                 <a:solidFill>
-                  <a:srgbClr val="F5F5F0"/>
-                </a:solidFill>
-                <a:latin typeface="Cambria" pitchFamily="34" charset="0"/>
-                <a:ea typeface="Cambria" pitchFamily="34" charset="-122"/>
-                <a:cs typeface="Cambria" pitchFamily="34" charset="-120"/>
+                  <a:srgbClr val="16181D"/>
+                </a:solidFill>
+                <a:latin typeface="BIZ UDPGothic" pitchFamily="34" charset="0"/>
+                <a:ea typeface="BIZ UDPGothic" pitchFamily="34" charset="-122"/>
+                <a:cs typeface="BIZ UDPGothic" pitchFamily="34" charset="-120"/>
               </a:rPr>
               <a:t>重要エリアとは？：特別に守るべき土地</a:t>
             </a:r>
@@ -3556,11 +3556,11 @@
             <a:avLst/>
           </a:prstGeom>
           <a:solidFill>
-            <a:srgbClr val="2E2E2E"/>
+            <a:srgbClr val="DDE0E6"/>
           </a:solidFill>
           <a:ln w="12700">
             <a:solidFill>
-              <a:srgbClr val="2E2E2E"/>
+              <a:srgbClr val="DDE0E6"/>
             </a:solidFill>
             <a:prstDash val="solid"/>
           </a:ln>
@@ -3593,11 +3593,11 @@
             <a:r>
               <a:rPr lang="en-US" sz="1100" dirty="0">
                 <a:solidFill>
-                  <a:srgbClr val="CCCCCC"/>
-                </a:solidFill>
-                <a:latin typeface="Arial" pitchFamily="34" charset="0"/>
-                <a:ea typeface="Arial" pitchFamily="34" charset="-122"/>
-                <a:cs typeface="Arial" pitchFamily="34" charset="-120"/>
+                  <a:srgbClr val="2B2F36"/>
+                </a:solidFill>
+                <a:latin typeface="Arial" pitchFamily="34" charset="0"/>
+                <a:ea typeface="BIZ UDPGothic" pitchFamily="34" charset="-122"/>
+                <a:cs typeface="BIZ UDPGothic" pitchFamily="34" charset="-120"/>
               </a:rPr>
               <a:t>一般の土地より一段厳しいルールを適用する「重要エリア」がある。ここは購入だけでなく「賃貸も禁止」。</a:t>
             </a:r>
@@ -3622,11 +3622,11 @@
             </a:avLst>
           </a:prstGeom>
           <a:solidFill>
-            <a:srgbClr val="1A0808"/>
+            <a:srgbClr val="FCEBEB"/>
           </a:solidFill>
           <a:ln w="12700">
             <a:solidFill>
-              <a:srgbClr val="2E2E2E"/>
+              <a:srgbClr val="DDE0E6"/>
             </a:solidFill>
             <a:prstDash val="solid"/>
           </a:ln>
@@ -3659,11 +3659,11 @@
             <a:r>
               <a:rPr lang="en-US" sz="1300" b="1" dirty="0">
                 <a:solidFill>
-                  <a:srgbClr val="D62828"/>
-                </a:solidFill>
-                <a:latin typeface="Cambria" pitchFamily="34" charset="0"/>
-                <a:ea typeface="Cambria" pitchFamily="34" charset="-122"/>
-                <a:cs typeface="Cambria" pitchFamily="34" charset="-120"/>
+                  <a:srgbClr val="C8161D"/>
+                </a:solidFill>
+                <a:latin typeface="BIZ UDPGothic" pitchFamily="34" charset="0"/>
+                <a:ea typeface="BIZ UDPGothic" pitchFamily="34" charset="-122"/>
+                <a:cs typeface="BIZ UDPGothic" pitchFamily="34" charset="-120"/>
               </a:rPr>
               <a:t>💧 水源地</a:t>
             </a:r>
@@ -3698,11 +3698,11 @@
             <a:r>
               <a:rPr lang="en-US" sz="1100" dirty="0">
                 <a:solidFill>
-                  <a:srgbClr val="CCCCCC"/>
-                </a:solidFill>
-                <a:latin typeface="Arial" pitchFamily="34" charset="0"/>
-                <a:ea typeface="Arial" pitchFamily="34" charset="-122"/>
-                <a:cs typeface="Arial" pitchFamily="34" charset="-120"/>
+                  <a:srgbClr val="2B2F36"/>
+                </a:solidFill>
+                <a:latin typeface="Arial" pitchFamily="34" charset="0"/>
+                <a:ea typeface="BIZ UDPGothic" pitchFamily="34" charset="-122"/>
+                <a:cs typeface="BIZ UDPGothic" pitchFamily="34" charset="-120"/>
               </a:rPr>
               <a:t>川・湖・ダム・浄水場の周辺。ここが外国に支配されると、水の供給を止めたり汚染されるリスクがある</a:t>
             </a:r>
@@ -3727,11 +3727,11 @@
             </a:avLst>
           </a:prstGeom>
           <a:solidFill>
-            <a:srgbClr val="1A0808"/>
+            <a:srgbClr val="FCEBEB"/>
           </a:solidFill>
           <a:ln w="12700">
             <a:solidFill>
-              <a:srgbClr val="2E2E2E"/>
+              <a:srgbClr val="DDE0E6"/>
             </a:solidFill>
             <a:prstDash val="solid"/>
           </a:ln>
@@ -3764,11 +3764,11 @@
             <a:r>
               <a:rPr lang="en-US" sz="1300" b="1" dirty="0">
                 <a:solidFill>
-                  <a:srgbClr val="D62828"/>
-                </a:solidFill>
-                <a:latin typeface="Cambria" pitchFamily="34" charset="0"/>
-                <a:ea typeface="Cambria" pitchFamily="34" charset="-122"/>
-                <a:cs typeface="Cambria" pitchFamily="34" charset="-120"/>
+                  <a:srgbClr val="C8161D"/>
+                </a:solidFill>
+                <a:latin typeface="BIZ UDPGothic" pitchFamily="34" charset="0"/>
+                <a:ea typeface="BIZ UDPGothic" pitchFamily="34" charset="-122"/>
+                <a:cs typeface="BIZ UDPGothic" pitchFamily="34" charset="-120"/>
               </a:rPr>
               <a:t>🏝️ 国境離島</a:t>
             </a:r>
@@ -3803,11 +3803,11 @@
             <a:r>
               <a:rPr lang="en-US" sz="1100" dirty="0">
                 <a:solidFill>
-                  <a:srgbClr val="CCCCCC"/>
-                </a:solidFill>
-                <a:latin typeface="Arial" pitchFamily="34" charset="0"/>
-                <a:ea typeface="Arial" pitchFamily="34" charset="-122"/>
-                <a:cs typeface="Arial" pitchFamily="34" charset="-120"/>
+                  <a:srgbClr val="2B2F36"/>
+                </a:solidFill>
+                <a:latin typeface="Arial" pitchFamily="34" charset="0"/>
+                <a:ea typeface="BIZ UDPGothic" pitchFamily="34" charset="-122"/>
+                <a:cs typeface="BIZ UDPGothic" pitchFamily="34" charset="-120"/>
               </a:rPr>
               <a:t>日本の端にある島。外国が実質的に支配すると「国境線」が変わるリスクがある</a:t>
             </a:r>
@@ -3832,11 +3832,11 @@
             </a:avLst>
           </a:prstGeom>
           <a:solidFill>
-            <a:srgbClr val="1A0808"/>
+            <a:srgbClr val="FCEBEB"/>
           </a:solidFill>
           <a:ln w="12700">
             <a:solidFill>
-              <a:srgbClr val="2E2E2E"/>
+              <a:srgbClr val="DDE0E6"/>
             </a:solidFill>
             <a:prstDash val="solid"/>
           </a:ln>
@@ -3869,11 +3869,11 @@
             <a:r>
               <a:rPr lang="en-US" sz="1300" b="1" dirty="0">
                 <a:solidFill>
-                  <a:srgbClr val="D62828"/>
-                </a:solidFill>
-                <a:latin typeface="Cambria" pitchFamily="34" charset="0"/>
-                <a:ea typeface="Cambria" pitchFamily="34" charset="-122"/>
-                <a:cs typeface="Cambria" pitchFamily="34" charset="-120"/>
+                  <a:srgbClr val="C8161D"/>
+                </a:solidFill>
+                <a:latin typeface="BIZ UDPGothic" pitchFamily="34" charset="0"/>
+                <a:ea typeface="BIZ UDPGothic" pitchFamily="34" charset="-122"/>
+                <a:cs typeface="BIZ UDPGothic" pitchFamily="34" charset="-120"/>
               </a:rPr>
               <a:t>🛡️ 防衛施設・自衛隊基地の周辺</a:t>
             </a:r>
@@ -3908,11 +3908,11 @@
             <a:r>
               <a:rPr lang="en-US" sz="1100" dirty="0">
                 <a:solidFill>
-                  <a:srgbClr val="CCCCCC"/>
-                </a:solidFill>
-                <a:latin typeface="Arial" pitchFamily="34" charset="0"/>
-                <a:ea typeface="Arial" pitchFamily="34" charset="-122"/>
-                <a:cs typeface="Arial" pitchFamily="34" charset="-120"/>
+                  <a:srgbClr val="2B2F36"/>
+                </a:solidFill>
+                <a:latin typeface="Arial" pitchFamily="34" charset="0"/>
+                <a:ea typeface="BIZ UDPGothic" pitchFamily="34" charset="-122"/>
+                <a:cs typeface="BIZ UDPGothic" pitchFamily="34" charset="-120"/>
               </a:rPr>
               <a:t>基地のすぐそばの土地から監視・妨害活動をされるリスクがある</a:t>
             </a:r>
@@ -3937,11 +3937,11 @@
             </a:avLst>
           </a:prstGeom>
           <a:solidFill>
-            <a:srgbClr val="1A0808"/>
+            <a:srgbClr val="FCEBEB"/>
           </a:solidFill>
           <a:ln w="12700">
             <a:solidFill>
-              <a:srgbClr val="2E2E2E"/>
+              <a:srgbClr val="DDE0E6"/>
             </a:solidFill>
             <a:prstDash val="solid"/>
           </a:ln>
@@ -3974,11 +3974,11 @@
             <a:r>
               <a:rPr lang="en-US" sz="1300" b="1" dirty="0">
                 <a:solidFill>
-                  <a:srgbClr val="D62828"/>
-                </a:solidFill>
-                <a:latin typeface="Cambria" pitchFamily="34" charset="0"/>
-                <a:ea typeface="Cambria" pitchFamily="34" charset="-122"/>
-                <a:cs typeface="Cambria" pitchFamily="34" charset="-120"/>
+                  <a:srgbClr val="C8161D"/>
+                </a:solidFill>
+                <a:latin typeface="BIZ UDPGothic" pitchFamily="34" charset="0"/>
+                <a:ea typeface="BIZ UDPGothic" pitchFamily="34" charset="-122"/>
+                <a:cs typeface="BIZ UDPGothic" pitchFamily="34" charset="-120"/>
               </a:rPr>
               <a:t>⚡ 原発・電波塔など重要インフラの周辺</a:t>
             </a:r>
@@ -4013,11 +4013,11 @@
             <a:r>
               <a:rPr lang="en-US" sz="1100" dirty="0">
                 <a:solidFill>
-                  <a:srgbClr val="CCCCCC"/>
-                </a:solidFill>
-                <a:latin typeface="Arial" pitchFamily="34" charset="0"/>
-                <a:ea typeface="Arial" pitchFamily="34" charset="-122"/>
-                <a:cs typeface="Arial" pitchFamily="34" charset="-120"/>
+                  <a:srgbClr val="2B2F36"/>
+                </a:solidFill>
+                <a:latin typeface="Arial" pitchFamily="34" charset="0"/>
+                <a:ea typeface="BIZ UDPGothic" pitchFamily="34" charset="-122"/>
+                <a:cs typeface="BIZ UDPGothic" pitchFamily="34" charset="-120"/>
               </a:rPr>
               <a:t>電気・通信などの重要な設備の近くに外国の拠点ができることを防ぐ</a:t>
             </a:r>
@@ -4042,11 +4042,11 @@
             </a:avLst>
           </a:prstGeom>
           <a:solidFill>
-            <a:srgbClr val="2E2E2E"/>
+            <a:srgbClr val="DDE0E6"/>
           </a:solidFill>
           <a:ln w="12700">
             <a:solidFill>
-              <a:srgbClr val="2E2E2E"/>
+              <a:srgbClr val="DDE0E6"/>
             </a:solidFill>
             <a:prstDash val="solid"/>
           </a:ln>
@@ -4066,7 +4066,7 @@
     <p:bg>
       <p:bgPr>
         <a:solidFill>
-          <a:srgbClr val="0A0A0A"/>
+          <a:srgbClr val="F5F6F8"/>
         </a:solidFill>
       </p:bgPr>
     </p:bg>
@@ -4111,11 +4111,11 @@
             <a:r>
               <a:rPr lang="en-US" sz="900" b="1" spc="400" kern="0" dirty="0">
                 <a:solidFill>
-                  <a:srgbClr val="D62828"/>
-                </a:solidFill>
-                <a:latin typeface="Arial" pitchFamily="34" charset="0"/>
-                <a:ea typeface="Arial" pitchFamily="34" charset="-122"/>
-                <a:cs typeface="Arial" pitchFamily="34" charset="-120"/>
+                  <a:srgbClr val="C8161D"/>
+                </a:solidFill>
+                <a:latin typeface="Arial" pitchFamily="34" charset="0"/>
+                <a:ea typeface="BIZ UDPGothic" pitchFamily="34" charset="-122"/>
+                <a:cs typeface="BIZ UDPGothic" pitchFamily="34" charset="-120"/>
               </a:rPr>
               <a:t>RULE 02 — DETAIL</a:t>
             </a:r>
@@ -4150,11 +4150,11 @@
             <a:r>
               <a:rPr lang="en-US" sz="2800" b="1" dirty="0">
                 <a:solidFill>
-                  <a:srgbClr val="F5F5F0"/>
-                </a:solidFill>
-                <a:latin typeface="Cambria" pitchFamily="34" charset="0"/>
-                <a:ea typeface="Cambria" pitchFamily="34" charset="-122"/>
-                <a:cs typeface="Cambria" pitchFamily="34" charset="-120"/>
+                  <a:srgbClr val="16181D"/>
+                </a:solidFill>
+                <a:latin typeface="BIZ UDPGothic" pitchFamily="34" charset="0"/>
+                <a:ea typeface="BIZ UDPGothic" pitchFamily="34" charset="-122"/>
+                <a:cs typeface="BIZ UDPGothic" pitchFamily="34" charset="-120"/>
               </a:rPr>
               <a:t>重要エリアのルール：買うことも借りることも禁止</a:t>
             </a:r>
@@ -4177,11 +4177,11 @@
             <a:avLst/>
           </a:prstGeom>
           <a:solidFill>
-            <a:srgbClr val="2E2E2E"/>
+            <a:srgbClr val="DDE0E6"/>
           </a:solidFill>
           <a:ln w="12700">
             <a:solidFill>
-              <a:srgbClr val="2E2E2E"/>
+              <a:srgbClr val="DDE0E6"/>
             </a:solidFill>
             <a:prstDash val="solid"/>
           </a:ln>
@@ -4214,11 +4214,11 @@
             <a:r>
               <a:rPr lang="en-US" sz="1100" dirty="0">
                 <a:solidFill>
-                  <a:srgbClr val="CCCCCC"/>
-                </a:solidFill>
-                <a:latin typeface="Arial" pitchFamily="34" charset="0"/>
-                <a:ea typeface="Arial" pitchFamily="34" charset="-122"/>
-                <a:cs typeface="Arial" pitchFamily="34" charset="-120"/>
+                  <a:srgbClr val="2B2F36"/>
+                </a:solidFill>
+                <a:latin typeface="Arial" pitchFamily="34" charset="0"/>
+                <a:ea typeface="BIZ UDPGothic" pitchFamily="34" charset="-122"/>
+                <a:cs typeface="BIZ UDPGothic" pitchFamily="34" charset="-120"/>
               </a:rPr>
               <a:t>一般エリアでは「賃貸は可」だったが、重要エリアでは賃貸も含めて外国人・外国資本への提供を全面禁止にする。</a:t>
             </a:r>
@@ -4243,11 +4243,11 @@
             </a:avLst>
           </a:prstGeom>
           <a:solidFill>
-            <a:srgbClr val="1A0808"/>
+            <a:srgbClr val="FCEBEB"/>
           </a:solidFill>
           <a:ln w="12700">
             <a:solidFill>
-              <a:srgbClr val="2E2E2E"/>
+              <a:srgbClr val="DDE0E6"/>
             </a:solidFill>
             <a:prstDash val="solid"/>
           </a:ln>
@@ -4280,11 +4280,11 @@
             <a:r>
               <a:rPr lang="en-US" sz="1400" dirty="0">
                 <a:solidFill>
-                  <a:srgbClr val="D62828"/>
-                </a:solidFill>
-                <a:latin typeface="Arial" pitchFamily="34" charset="0"/>
-                <a:ea typeface="Arial" pitchFamily="34" charset="-122"/>
-                <a:cs typeface="Arial" pitchFamily="34" charset="-120"/>
+                  <a:srgbClr val="C8161D"/>
+                </a:solidFill>
+                <a:latin typeface="Arial" pitchFamily="34" charset="0"/>
+                <a:ea typeface="BIZ UDPGothic" pitchFamily="34" charset="-122"/>
+                <a:cs typeface="BIZ UDPGothic" pitchFamily="34" charset="-120"/>
               </a:rPr>
               <a:t>❌</a:t>
             </a:r>
@@ -4319,11 +4319,11 @@
             <a:r>
               <a:rPr lang="en-US" sz="1400" dirty="0">
                 <a:solidFill>
-                  <a:srgbClr val="CCCCCC"/>
-                </a:solidFill>
-                <a:latin typeface="Arial" pitchFamily="34" charset="0"/>
-                <a:ea typeface="Arial" pitchFamily="34" charset="-122"/>
-                <a:cs typeface="Arial" pitchFamily="34" charset="-120"/>
+                  <a:srgbClr val="2B2F36"/>
+                </a:solidFill>
+                <a:latin typeface="Arial" pitchFamily="34" charset="0"/>
+                <a:ea typeface="BIZ UDPGothic" pitchFamily="34" charset="-122"/>
+                <a:cs typeface="BIZ UDPGothic" pitchFamily="34" charset="-120"/>
               </a:rPr>
               <a:t>購入（外国人・外国資本が重要エリアの土地を買うこと）</a:t>
             </a:r>
@@ -4348,11 +4348,11 @@
             </a:avLst>
           </a:prstGeom>
           <a:solidFill>
-            <a:srgbClr val="1A0808"/>
+            <a:srgbClr val="FCEBEB"/>
           </a:solidFill>
           <a:ln w="12700">
             <a:solidFill>
-              <a:srgbClr val="2E2E2E"/>
+              <a:srgbClr val="DDE0E6"/>
             </a:solidFill>
             <a:prstDash val="solid"/>
           </a:ln>
@@ -4385,11 +4385,11 @@
             <a:r>
               <a:rPr lang="en-US" sz="1400" dirty="0">
                 <a:solidFill>
-                  <a:srgbClr val="D62828"/>
-                </a:solidFill>
-                <a:latin typeface="Arial" pitchFamily="34" charset="0"/>
-                <a:ea typeface="Arial" pitchFamily="34" charset="-122"/>
-                <a:cs typeface="Arial" pitchFamily="34" charset="-120"/>
+                  <a:srgbClr val="C8161D"/>
+                </a:solidFill>
+                <a:latin typeface="Arial" pitchFamily="34" charset="0"/>
+                <a:ea typeface="BIZ UDPGothic" pitchFamily="34" charset="-122"/>
+                <a:cs typeface="BIZ UDPGothic" pitchFamily="34" charset="-120"/>
               </a:rPr>
               <a:t>❌</a:t>
             </a:r>
@@ -4424,11 +4424,11 @@
             <a:r>
               <a:rPr lang="en-US" sz="1400" dirty="0">
                 <a:solidFill>
-                  <a:srgbClr val="CCCCCC"/>
-                </a:solidFill>
-                <a:latin typeface="Arial" pitchFamily="34" charset="0"/>
-                <a:ea typeface="Arial" pitchFamily="34" charset="-122"/>
-                <a:cs typeface="Arial" pitchFamily="34" charset="-120"/>
+                  <a:srgbClr val="2B2F36"/>
+                </a:solidFill>
+                <a:latin typeface="Arial" pitchFamily="34" charset="0"/>
+                <a:ea typeface="BIZ UDPGothic" pitchFamily="34" charset="-122"/>
+                <a:cs typeface="BIZ UDPGothic" pitchFamily="34" charset="-120"/>
               </a:rPr>
               <a:t>賃貸（重要エリアの土地を外国人・外国資本に貸すこと）</a:t>
             </a:r>
@@ -4453,11 +4453,11 @@
             </a:avLst>
           </a:prstGeom>
           <a:solidFill>
-            <a:srgbClr val="1A1408"/>
+            <a:srgbClr val="FFF4DB"/>
           </a:solidFill>
           <a:ln w="12700">
             <a:solidFill>
-              <a:srgbClr val="2E2E2E"/>
+              <a:srgbClr val="DDE0E6"/>
             </a:solidFill>
             <a:prstDash val="solid"/>
           </a:ln>
@@ -4490,11 +4490,11 @@
             <a:r>
               <a:rPr lang="en-US" sz="1200" b="1" dirty="0">
                 <a:solidFill>
-                  <a:srgbClr val="E0A000"/>
-                </a:solidFill>
-                <a:latin typeface="Cambria" pitchFamily="34" charset="0"/>
-                <a:ea typeface="Cambria" pitchFamily="34" charset="-122"/>
-                <a:cs typeface="Cambria" pitchFamily="34" charset="-120"/>
+                  <a:srgbClr val="9A6200"/>
+                </a:solidFill>
+                <a:latin typeface="BIZ UDPGothic" pitchFamily="34" charset="0"/>
+                <a:ea typeface="BIZ UDPGothic" pitchFamily="34" charset="-122"/>
+                <a:cs typeface="BIZ UDPGothic" pitchFamily="34" charset="-120"/>
               </a:rPr>
               <a:t>なぜ賃貸も禁止にするのか？</a:t>
             </a:r>
@@ -4529,11 +4529,11 @@
             <a:r>
               <a:rPr lang="en-US" sz="1000" dirty="0">
                 <a:solidFill>
-                  <a:srgbClr val="CCCCCC"/>
-                </a:solidFill>
-                <a:latin typeface="Arial" pitchFamily="34" charset="0"/>
-                <a:ea typeface="Arial" pitchFamily="34" charset="-122"/>
-                <a:cs typeface="Arial" pitchFamily="34" charset="-120"/>
+                  <a:srgbClr val="2B2F36"/>
+                </a:solidFill>
+                <a:latin typeface="Arial" pitchFamily="34" charset="0"/>
+                <a:ea typeface="BIZ UDPGothic" pitchFamily="34" charset="-122"/>
+                <a:cs typeface="BIZ UDPGothic" pitchFamily="34" charset="-120"/>
               </a:rPr>
               <a:t>「土地は買っていないが長期間借りている」という形でも、実質的に外国が土地を「支配」することができてしまう。重要エリアでは所有権だけでなく利用権も含めて完全に封じる必要がある。</a:t>
             </a:r>
@@ -4558,11 +4558,11 @@
             </a:avLst>
           </a:prstGeom>
           <a:solidFill>
-            <a:srgbClr val="1A1A1A"/>
+            <a:srgbClr val="FFFFFF"/>
           </a:solidFill>
           <a:ln w="12700">
             <a:solidFill>
-              <a:srgbClr val="2E2E2E"/>
+              <a:srgbClr val="DDE0E6"/>
             </a:solidFill>
             <a:prstDash val="solid"/>
           </a:ln>
@@ -4595,11 +4595,11 @@
             <a:r>
               <a:rPr lang="en-US" sz="1000" dirty="0">
                 <a:solidFill>
-                  <a:srgbClr val="888888"/>
-                </a:solidFill>
-                <a:latin typeface="Arial" pitchFamily="34" charset="0"/>
-                <a:ea typeface="Arial" pitchFamily="34" charset="-122"/>
-                <a:cs typeface="Arial" pitchFamily="34" charset="-120"/>
+                  <a:srgbClr val="626875"/>
+                </a:solidFill>
+                <a:latin typeface="Arial" pitchFamily="34" charset="0"/>
+                <a:ea typeface="BIZ UDPGothic" pitchFamily="34" charset="-122"/>
+                <a:cs typeface="BIZ UDPGothic" pitchFamily="34" charset="-120"/>
               </a:rPr>
               <a:t>例外となる5番目のカテゴリ：「その他、国が指定した区画」（将来の新しいリスクに対応するための余白ルール）</a:t>
             </a:r>
@@ -4621,7 +4621,7 @@
     <p:bg>
       <p:bgPr>
         <a:solidFill>
-          <a:srgbClr val="0A0A0A"/>
+          <a:srgbClr val="F5F6F8"/>
         </a:solidFill>
       </p:bgPr>
     </p:bg>
@@ -4666,11 +4666,11 @@
             <a:r>
               <a:rPr lang="en-US" sz="900" b="1" spc="400" kern="0" dirty="0">
                 <a:solidFill>
-                  <a:srgbClr val="D62828"/>
-                </a:solidFill>
-                <a:latin typeface="Arial" pitchFamily="34" charset="0"/>
-                <a:ea typeface="Arial" pitchFamily="34" charset="-122"/>
-                <a:cs typeface="Arial" pitchFamily="34" charset="-120"/>
+                  <a:srgbClr val="C8161D"/>
+                </a:solidFill>
+                <a:latin typeface="Arial" pitchFamily="34" charset="0"/>
+                <a:ea typeface="BIZ UDPGothic" pitchFamily="34" charset="-122"/>
+                <a:cs typeface="BIZ UDPGothic" pitchFamily="34" charset="-120"/>
               </a:rPr>
               <a:t>RULE 02 — MONITORING</a:t>
             </a:r>
@@ -4705,11 +4705,11 @@
             <a:r>
               <a:rPr lang="en-US" sz="2800" b="1" dirty="0">
                 <a:solidFill>
-                  <a:srgbClr val="F5F5F0"/>
-                </a:solidFill>
-                <a:latin typeface="Cambria" pitchFamily="34" charset="0"/>
-                <a:ea typeface="Cambria" pitchFamily="34" charset="-122"/>
-                <a:cs typeface="Cambria" pitchFamily="34" charset="-120"/>
+                  <a:srgbClr val="16181D"/>
+                </a:solidFill>
+                <a:latin typeface="BIZ UDPGothic" pitchFamily="34" charset="0"/>
+                <a:ea typeface="BIZ UDPGothic" pitchFamily="34" charset="-122"/>
+                <a:cs typeface="BIZ UDPGothic" pitchFamily="34" charset="-120"/>
               </a:rPr>
               <a:t>国が年4回、重要エリアを直接調べに行く</a:t>
             </a:r>
@@ -4732,11 +4732,11 @@
             <a:avLst/>
           </a:prstGeom>
           <a:solidFill>
-            <a:srgbClr val="2E2E2E"/>
+            <a:srgbClr val="DDE0E6"/>
           </a:solidFill>
           <a:ln w="12700">
             <a:solidFill>
-              <a:srgbClr val="2E2E2E"/>
+              <a:srgbClr val="DDE0E6"/>
             </a:solidFill>
             <a:prstDash val="solid"/>
           </a:ln>
@@ -4769,11 +4769,11 @@
             <a:r>
               <a:rPr lang="en-US" sz="1100" dirty="0">
                 <a:solidFill>
-                  <a:srgbClr val="CCCCCC"/>
-                </a:solidFill>
-                <a:latin typeface="Arial" pitchFamily="34" charset="0"/>
-                <a:ea typeface="Arial" pitchFamily="34" charset="-122"/>
-                <a:cs typeface="Arial" pitchFamily="34" charset="-120"/>
+                  <a:srgbClr val="2B2F36"/>
+                </a:solidFill>
+                <a:latin typeface="Arial" pitchFamily="34" charset="0"/>
+                <a:ea typeface="BIZ UDPGothic" pitchFamily="34" charset="-122"/>
+                <a:cs typeface="BIZ UDPGothic" pitchFamily="34" charset="-120"/>
               </a:rPr>
               <a:t>「自分で報告してください」ではなく、「国が自ら調べに行く」仕組みにする。名義を借りたズルも同時に発見できる。</a:t>
             </a:r>
@@ -4798,11 +4798,11 @@
             </a:avLst>
           </a:prstGeom>
           <a:solidFill>
-            <a:srgbClr val="1A1A1A"/>
+            <a:srgbClr val="FFFFFF"/>
           </a:solidFill>
           <a:ln w="12700">
             <a:solidFill>
-              <a:srgbClr val="2E2E2E"/>
+              <a:srgbClr val="DDE0E6"/>
             </a:solidFill>
             <a:prstDash val="solid"/>
           </a:ln>
@@ -4825,11 +4825,11 @@
             </a:avLst>
           </a:prstGeom>
           <a:solidFill>
-            <a:srgbClr val="D62828"/>
+            <a:srgbClr val="C8161D"/>
           </a:solidFill>
           <a:ln w="12700">
             <a:solidFill>
-              <a:srgbClr val="D62828"/>
+              <a:srgbClr val="C8161D"/>
             </a:solidFill>
             <a:prstDash val="solid"/>
           </a:ln>
@@ -4862,11 +4862,11 @@
             <a:r>
               <a:rPr lang="en-US" sz="1400" b="1" dirty="0">
                 <a:solidFill>
-                  <a:srgbClr val="F5F5F0"/>
-                </a:solidFill>
-                <a:latin typeface="Arial" pitchFamily="34" charset="0"/>
-                <a:ea typeface="Arial" pitchFamily="34" charset="-122"/>
-                <a:cs typeface="Arial" pitchFamily="34" charset="-120"/>
+                  <a:srgbClr val="FFFFFF"/>
+                </a:solidFill>
+                <a:latin typeface="Arial" pitchFamily="34" charset="0"/>
+                <a:ea typeface="BIZ UDPGothic" pitchFamily="34" charset="-122"/>
+                <a:cs typeface="BIZ UDPGothic" pitchFamily="34" charset="-120"/>
               </a:rPr>
               <a:t>01</a:t>
             </a:r>
@@ -4901,11 +4901,11 @@
             <a:r>
               <a:rPr lang="en-US" sz="1300" b="1" dirty="0">
                 <a:solidFill>
-                  <a:srgbClr val="F5F5F0"/>
-                </a:solidFill>
-                <a:latin typeface="Cambria" pitchFamily="34" charset="0"/>
-                <a:ea typeface="Cambria" pitchFamily="34" charset="-122"/>
-                <a:cs typeface="Cambria" pitchFamily="34" charset="-120"/>
+                  <a:srgbClr val="16181D"/>
+                </a:solidFill>
+                <a:latin typeface="BIZ UDPGothic" pitchFamily="34" charset="0"/>
+                <a:ea typeface="BIZ UDPGothic" pitchFamily="34" charset="-122"/>
+                <a:cs typeface="BIZ UDPGothic" pitchFamily="34" charset="-120"/>
               </a:rPr>
               <a:t>その土地が今どう使われているか確認する</a:t>
             </a:r>
@@ -4940,11 +4940,11 @@
             <a:r>
               <a:rPr lang="en-US" sz="1000" dirty="0">
                 <a:solidFill>
-                  <a:srgbClr val="CCCCCC"/>
-                </a:solidFill>
-                <a:latin typeface="Arial" pitchFamily="34" charset="0"/>
-                <a:ea typeface="Arial" pitchFamily="34" charset="-122"/>
-                <a:cs typeface="Arial" pitchFamily="34" charset="-120"/>
+                  <a:srgbClr val="2B2F36"/>
+                </a:solidFill>
+                <a:latin typeface="Arial" pitchFamily="34" charset="0"/>
+                <a:ea typeface="BIZ UDPGothic" pitchFamily="34" charset="-122"/>
+                <a:cs typeface="BIZ UDPGothic" pitchFamily="34" charset="-120"/>
               </a:rPr>
               <a:t>許可されていない外国人・外国資本が使っていないかを現地で直接確認</a:t>
             </a:r>
@@ -4969,11 +4969,11 @@
             </a:avLst>
           </a:prstGeom>
           <a:solidFill>
-            <a:srgbClr val="1A1A1A"/>
+            <a:srgbClr val="FFFFFF"/>
           </a:solidFill>
           <a:ln w="12700">
             <a:solidFill>
-              <a:srgbClr val="2E2E2E"/>
+              <a:srgbClr val="DDE0E6"/>
             </a:solidFill>
             <a:prstDash val="solid"/>
           </a:ln>
@@ -4996,11 +4996,11 @@
             </a:avLst>
           </a:prstGeom>
           <a:solidFill>
-            <a:srgbClr val="D62828"/>
+            <a:srgbClr val="C8161D"/>
           </a:solidFill>
           <a:ln w="12700">
             <a:solidFill>
-              <a:srgbClr val="D62828"/>
+              <a:srgbClr val="C8161D"/>
             </a:solidFill>
             <a:prstDash val="solid"/>
           </a:ln>
@@ -5033,11 +5033,11 @@
             <a:r>
               <a:rPr lang="en-US" sz="1400" b="1" dirty="0">
                 <a:solidFill>
-                  <a:srgbClr val="F5F5F0"/>
-                </a:solidFill>
-                <a:latin typeface="Arial" pitchFamily="34" charset="0"/>
-                <a:ea typeface="Arial" pitchFamily="34" charset="-122"/>
-                <a:cs typeface="Arial" pitchFamily="34" charset="-120"/>
+                  <a:srgbClr val="FFFFFF"/>
+                </a:solidFill>
+                <a:latin typeface="Arial" pitchFamily="34" charset="0"/>
+                <a:ea typeface="BIZ UDPGothic" pitchFamily="34" charset="-122"/>
+                <a:cs typeface="BIZ UDPGothic" pitchFamily="34" charset="-120"/>
               </a:rPr>
               <a:t>02</a:t>
             </a:r>
@@ -5072,11 +5072,11 @@
             <a:r>
               <a:rPr lang="en-US" sz="1300" b="1" dirty="0">
                 <a:solidFill>
-                  <a:srgbClr val="F5F5F0"/>
-                </a:solidFill>
-                <a:latin typeface="Cambria" pitchFamily="34" charset="0"/>
-                <a:ea typeface="Cambria" pitchFamily="34" charset="-122"/>
-                <a:cs typeface="Cambria" pitchFamily="34" charset="-120"/>
+                  <a:srgbClr val="16181D"/>
+                </a:solidFill>
+                <a:latin typeface="BIZ UDPGothic" pitchFamily="34" charset="0"/>
+                <a:ea typeface="BIZ UDPGothic" pitchFamily="34" charset="-122"/>
+                <a:cs typeface="BIZ UDPGothic" pitchFamily="34" charset="-120"/>
               </a:rPr>
               <a:t>本当の所有者・使用者が誰かを調べる</a:t>
             </a:r>
@@ -5111,11 +5111,11 @@
             <a:r>
               <a:rPr lang="en-US" sz="1000" dirty="0">
                 <a:solidFill>
-                  <a:srgbClr val="CCCCCC"/>
-                </a:solidFill>
-                <a:latin typeface="Arial" pitchFamily="34" charset="0"/>
-                <a:ea typeface="Arial" pitchFamily="34" charset="-122"/>
-                <a:cs typeface="Arial" pitchFamily="34" charset="-120"/>
+                  <a:srgbClr val="2B2F36"/>
+                </a:solidFill>
+                <a:latin typeface="Arial" pitchFamily="34" charset="0"/>
+                <a:ea typeface="BIZ UDPGothic" pitchFamily="34" charset="-122"/>
+                <a:cs typeface="BIZ UDPGothic" pitchFamily="34" charset="-120"/>
               </a:rPr>
               <a:t>名義上は日本人でも、実際に使ってお金を出しているのが外国人・外国資本でないかをチェック</a:t>
             </a:r>
@@ -5140,11 +5140,11 @@
             </a:avLst>
           </a:prstGeom>
           <a:solidFill>
-            <a:srgbClr val="1A1A1A"/>
+            <a:srgbClr val="FFFFFF"/>
           </a:solidFill>
           <a:ln w="12700">
             <a:solidFill>
-              <a:srgbClr val="2E2E2E"/>
+              <a:srgbClr val="DDE0E6"/>
             </a:solidFill>
             <a:prstDash val="solid"/>
           </a:ln>
@@ -5167,11 +5167,11 @@
             </a:avLst>
           </a:prstGeom>
           <a:solidFill>
-            <a:srgbClr val="D62828"/>
+            <a:srgbClr val="C8161D"/>
           </a:solidFill>
           <a:ln w="12700">
             <a:solidFill>
-              <a:srgbClr val="D62828"/>
+              <a:srgbClr val="C8161D"/>
             </a:solidFill>
             <a:prstDash val="solid"/>
           </a:ln>
@@ -5204,11 +5204,11 @@
             <a:r>
               <a:rPr lang="en-US" sz="1400" b="1" dirty="0">
                 <a:solidFill>
-                  <a:srgbClr val="F5F5F0"/>
-                </a:solidFill>
-                <a:latin typeface="Arial" pitchFamily="34" charset="0"/>
-                <a:ea typeface="Arial" pitchFamily="34" charset="-122"/>
-                <a:cs typeface="Arial" pitchFamily="34" charset="-120"/>
+                  <a:srgbClr val="FFFFFF"/>
+                </a:solidFill>
+                <a:latin typeface="Arial" pitchFamily="34" charset="0"/>
+                <a:ea typeface="BIZ UDPGothic" pitchFamily="34" charset="-122"/>
+                <a:cs typeface="BIZ UDPGothic" pitchFamily="34" charset="-120"/>
               </a:rPr>
               <a:t>03</a:t>
             </a:r>
@@ -5243,11 +5243,11 @@
             <a:r>
               <a:rPr lang="en-US" sz="1300" b="1" dirty="0">
                 <a:solidFill>
-                  <a:srgbClr val="F5F5F0"/>
-                </a:solidFill>
-                <a:latin typeface="Cambria" pitchFamily="34" charset="0"/>
-                <a:ea typeface="Cambria" pitchFamily="34" charset="-122"/>
-                <a:cs typeface="Cambria" pitchFamily="34" charset="-120"/>
+                  <a:srgbClr val="16181D"/>
+                </a:solidFill>
+                <a:latin typeface="BIZ UDPGothic" pitchFamily="34" charset="0"/>
+                <a:ea typeface="BIZ UDPGothic" pitchFamily="34" charset="-122"/>
+                <a:cs typeface="BIZ UDPGothic" pitchFamily="34" charset="-120"/>
               </a:rPr>
               <a:t>お金の流れを確認する</a:t>
             </a:r>
@@ -5282,11 +5282,11 @@
             <a:r>
               <a:rPr lang="en-US" sz="1000" dirty="0">
                 <a:solidFill>
-                  <a:srgbClr val="CCCCCC"/>
-                </a:solidFill>
-                <a:latin typeface="Arial" pitchFamily="34" charset="0"/>
-                <a:ea typeface="Arial" pitchFamily="34" charset="-122"/>
-                <a:cs typeface="Arial" pitchFamily="34" charset="-120"/>
+                  <a:srgbClr val="2B2F36"/>
+                </a:solidFill>
+                <a:latin typeface="Arial" pitchFamily="34" charset="0"/>
+                <a:ea typeface="BIZ UDPGothic" pitchFamily="34" charset="-122"/>
+                <a:cs typeface="BIZ UDPGothic" pitchFamily="34" charset="-120"/>
               </a:rPr>
               <a:t>その土地の購入資金がどこから来たかを追跡する。外国から資金が出ていれば「名義貸し」の疑いがある</a:t>
             </a:r>
@@ -5311,11 +5311,11 @@
             </a:avLst>
           </a:prstGeom>
           <a:solidFill>
-            <a:srgbClr val="1A1A1A"/>
+            <a:srgbClr val="FFFFFF"/>
           </a:solidFill>
           <a:ln w="12700">
             <a:solidFill>
-              <a:srgbClr val="2E2E2E"/>
+              <a:srgbClr val="DDE0E6"/>
             </a:solidFill>
             <a:prstDash val="solid"/>
           </a:ln>
@@ -5348,11 +5348,11 @@
             <a:r>
               <a:rPr lang="en-US" sz="1000" dirty="0">
                 <a:solidFill>
-                  <a:srgbClr val="888888"/>
-                </a:solidFill>
-                <a:latin typeface="Arial" pitchFamily="34" charset="0"/>
-                <a:ea typeface="Arial" pitchFamily="34" charset="-122"/>
-                <a:cs typeface="Arial" pitchFamily="34" charset="-120"/>
+                  <a:srgbClr val="626875"/>
+                </a:solidFill>
+                <a:latin typeface="Arial" pitchFamily="34" charset="0"/>
+                <a:ea typeface="BIZ UDPGothic" pitchFamily="34" charset="-122"/>
+                <a:cs typeface="BIZ UDPGothic" pitchFamily="34" charset="-120"/>
               </a:rPr>
               <a:t>年4回の調査で「名義貸し」（日本人の名前を使って外国人が実質支配する）も同時に発見・摘発できる</a:t>
             </a:r>
@@ -5374,7 +5374,7 @@
     <p:bg>
       <p:bgPr>
         <a:solidFill>
-          <a:srgbClr val="0A0A0A"/>
+          <a:srgbClr val="F5F6F8"/>
         </a:solidFill>
       </p:bgPr>
     </p:bg>
@@ -5419,11 +5419,11 @@
             <a:r>
               <a:rPr lang="en-US" sz="900" b="1" spc="400" kern="0" dirty="0">
                 <a:solidFill>
-                  <a:srgbClr val="D62828"/>
-                </a:solidFill>
-                <a:latin typeface="Arial" pitchFamily="34" charset="0"/>
-                <a:ea typeface="Arial" pitchFamily="34" charset="-122"/>
-                <a:cs typeface="Arial" pitchFamily="34" charset="-120"/>
+                  <a:srgbClr val="C8161D"/>
+                </a:solidFill>
+                <a:latin typeface="Arial" pitchFamily="34" charset="0"/>
+                <a:ea typeface="BIZ UDPGothic" pitchFamily="34" charset="-122"/>
+                <a:cs typeface="BIZ UDPGothic" pitchFamily="34" charset="-120"/>
               </a:rPr>
               <a:t>RULE 03</a:t>
             </a:r>
@@ -5458,11 +5458,11 @@
             <a:r>
               <a:rPr lang="en-US" sz="2800" b="1" dirty="0">
                 <a:solidFill>
-                  <a:srgbClr val="F5F5F0"/>
-                </a:solidFill>
-                <a:latin typeface="Cambria" pitchFamily="34" charset="0"/>
-                <a:ea typeface="Cambria" pitchFamily="34" charset="-122"/>
-                <a:cs typeface="Cambria" pitchFamily="34" charset="-120"/>
+                  <a:srgbClr val="16181D"/>
+                </a:solidFill>
+                <a:latin typeface="BIZ UDPGothic" pitchFamily="34" charset="0"/>
+                <a:ea typeface="BIZ UDPGothic" pitchFamily="34" charset="-122"/>
+                <a:cs typeface="BIZ UDPGothic" pitchFamily="34" charset="-120"/>
               </a:rPr>
               <a:t>マンションのルール：「住む目的」かどうかで決める</a:t>
             </a:r>
@@ -5485,11 +5485,11 @@
             <a:avLst/>
           </a:prstGeom>
           <a:solidFill>
-            <a:srgbClr val="2E2E2E"/>
+            <a:srgbClr val="DDE0E6"/>
           </a:solidFill>
           <a:ln w="12700">
             <a:solidFill>
-              <a:srgbClr val="2E2E2E"/>
+              <a:srgbClr val="DDE0E6"/>
             </a:solidFill>
             <a:prstDash val="solid"/>
           </a:ln>
@@ -5522,11 +5522,11 @@
             <a:r>
               <a:rPr lang="en-US" sz="1100" dirty="0">
                 <a:solidFill>
-                  <a:srgbClr val="CCCCCC"/>
-                </a:solidFill>
-                <a:latin typeface="Arial" pitchFamily="34" charset="0"/>
-                <a:ea typeface="Arial" pitchFamily="34" charset="-122"/>
-                <a:cs typeface="Arial" pitchFamily="34" charset="-120"/>
+                  <a:srgbClr val="2B2F36"/>
+                </a:solidFill>
+                <a:latin typeface="Arial" pitchFamily="34" charset="0"/>
+                <a:ea typeface="BIZ UDPGothic" pitchFamily="34" charset="-122"/>
+                <a:cs typeface="BIZ UDPGothic" pitchFamily="34" charset="-120"/>
               </a:rPr>
               <a:t>一戸建ての土地とは違う考え方。「誰が買うか」ではなく「何のために買うか」でルールを決める。</a:t>
             </a:r>
@@ -5551,11 +5551,11 @@
             </a:avLst>
           </a:prstGeom>
           <a:solidFill>
-            <a:srgbClr val="081808"/>
+            <a:srgbClr val="E9EFF8"/>
           </a:solidFill>
           <a:ln w="12700">
             <a:solidFill>
-              <a:srgbClr val="2E2E2E"/>
+              <a:srgbClr val="DDE0E6"/>
             </a:solidFill>
             <a:prstDash val="solid"/>
           </a:ln>
@@ -5588,11 +5588,11 @@
             <a:r>
               <a:rPr lang="en-US" sz="1400" dirty="0">
                 <a:solidFill>
-                  <a:srgbClr val="4CAF50"/>
-                </a:solidFill>
-                <a:latin typeface="Arial" pitchFamily="34" charset="0"/>
-                <a:ea typeface="Arial" pitchFamily="34" charset="-122"/>
-                <a:cs typeface="Arial" pitchFamily="34" charset="-120"/>
+                  <a:srgbClr val="1D4F91"/>
+                </a:solidFill>
+                <a:latin typeface="Arial" pitchFamily="34" charset="0"/>
+                <a:ea typeface="BIZ UDPGothic" pitchFamily="34" charset="-122"/>
+                <a:cs typeface="BIZ UDPGothic" pitchFamily="34" charset="-120"/>
               </a:rPr>
               <a:t>✅</a:t>
             </a:r>
@@ -5627,11 +5627,11 @@
             <a:r>
               <a:rPr lang="en-US" sz="1400" dirty="0">
                 <a:solidFill>
-                  <a:srgbClr val="CCCCCC"/>
-                </a:solidFill>
-                <a:latin typeface="Arial" pitchFamily="34" charset="0"/>
-                <a:ea typeface="Arial" pitchFamily="34" charset="-122"/>
-                <a:cs typeface="Arial" pitchFamily="34" charset="-120"/>
+                  <a:srgbClr val="2B2F36"/>
+                </a:solidFill>
+                <a:latin typeface="Arial" pitchFamily="34" charset="0"/>
+                <a:ea typeface="BIZ UDPGothic" pitchFamily="34" charset="-122"/>
+                <a:cs typeface="BIZ UDPGothic" pitchFamily="34" charset="-120"/>
               </a:rPr>
               <a:t>自分で住むために買う（居住目的）：国籍を問わず誰でも買える。外国人でもOK</a:t>
             </a:r>
@@ -5656,11 +5656,11 @@
             </a:avLst>
           </a:prstGeom>
           <a:solidFill>
-            <a:srgbClr val="1A0808"/>
+            <a:srgbClr val="FCEBEB"/>
           </a:solidFill>
           <a:ln w="12700">
             <a:solidFill>
-              <a:srgbClr val="2E2E2E"/>
+              <a:srgbClr val="DDE0E6"/>
             </a:solidFill>
             <a:prstDash val="solid"/>
           </a:ln>
@@ -5693,11 +5693,11 @@
             <a:r>
               <a:rPr lang="en-US" sz="1400" dirty="0">
                 <a:solidFill>
-                  <a:srgbClr val="D62828"/>
-                </a:solidFill>
-                <a:latin typeface="Arial" pitchFamily="34" charset="0"/>
-                <a:ea typeface="Arial" pitchFamily="34" charset="-122"/>
-                <a:cs typeface="Arial" pitchFamily="34" charset="-120"/>
+                  <a:srgbClr val="C8161D"/>
+                </a:solidFill>
+                <a:latin typeface="Arial" pitchFamily="34" charset="0"/>
+                <a:ea typeface="BIZ UDPGothic" pitchFamily="34" charset="-122"/>
+                <a:cs typeface="BIZ UDPGothic" pitchFamily="34" charset="-120"/>
               </a:rPr>
               <a:t>❌</a:t>
             </a:r>
@@ -5732,11 +5732,11 @@
             <a:r>
               <a:rPr lang="en-US" sz="1400" dirty="0">
                 <a:solidFill>
-                  <a:srgbClr val="CCCCCC"/>
-                </a:solidFill>
-                <a:latin typeface="Arial" pitchFamily="34" charset="0"/>
-                <a:ea typeface="Arial" pitchFamily="34" charset="-122"/>
-                <a:cs typeface="Arial" pitchFamily="34" charset="-120"/>
+                  <a:srgbClr val="2B2F36"/>
+                </a:solidFill>
+                <a:latin typeface="Arial" pitchFamily="34" charset="0"/>
+                <a:ea typeface="BIZ UDPGothic" pitchFamily="34" charset="-122"/>
+                <a:cs typeface="BIZ UDPGothic" pitchFamily="34" charset="-120"/>
               </a:rPr>
               <a:t>買って他の人に貸す（投資・賃貸目的）：外国人は不可。購入してそのまま運用することはできない</a:t>
             </a:r>
@@ -5761,11 +5761,11 @@
             </a:avLst>
           </a:prstGeom>
           <a:solidFill>
-            <a:srgbClr val="141420"/>
+            <a:srgbClr val="E9EFF8"/>
           </a:solidFill>
           <a:ln w="12700">
             <a:solidFill>
-              <a:srgbClr val="2E2E2E"/>
+              <a:srgbClr val="DDE0E6"/>
             </a:solidFill>
             <a:prstDash val="solid"/>
           </a:ln>
@@ -5798,11 +5798,11 @@
             <a:r>
               <a:rPr lang="en-US" sz="1200" b="1" dirty="0">
                 <a:solidFill>
-                  <a:srgbClr val="4090D0"/>
-                </a:solidFill>
-                <a:latin typeface="Cambria" pitchFamily="34" charset="0"/>
-                <a:ea typeface="Cambria" pitchFamily="34" charset="-122"/>
-                <a:cs typeface="Cambria" pitchFamily="34" charset="-120"/>
+                  <a:srgbClr val="1D4F91"/>
+                </a:solidFill>
+                <a:latin typeface="BIZ UDPGothic" pitchFamily="34" charset="0"/>
+                <a:ea typeface="BIZ UDPGothic" pitchFamily="34" charset="-122"/>
+                <a:cs typeface="BIZ UDPGothic" pitchFamily="34" charset="-120"/>
               </a:rPr>
               <a:t>なぜマンションは土地と違うルールにするのか？</a:t>
             </a:r>
@@ -5837,11 +5837,11 @@
             <a:r>
               <a:rPr lang="en-US" sz="1000" dirty="0">
                 <a:solidFill>
-                  <a:srgbClr val="CCCCCC"/>
-                </a:solidFill>
-                <a:latin typeface="Arial" pitchFamily="34" charset="0"/>
-                <a:ea typeface="Arial" pitchFamily="34" charset="-122"/>
-                <a:cs typeface="Arial" pitchFamily="34" charset="-120"/>
+                  <a:srgbClr val="2B2F36"/>
+                </a:solidFill>
+                <a:latin typeface="Arial" pitchFamily="34" charset="0"/>
+                <a:ea typeface="BIZ UDPGothic" pitchFamily="34" charset="-122"/>
+                <a:cs typeface="BIZ UDPGothic" pitchFamily="34" charset="-120"/>
               </a:rPr>
               <a:t>マンションの一室を買っても「敷地全体を外国が支配する」ことは構造上あり得ない（あくまで一室＋ごく小さな土地の持分だけ）。安全保障上のリスクは低いので、「住む人なら誰でも買える」という形で間口を広げた設計にしている。</a:t>
             </a:r>
@@ -5866,11 +5866,11 @@
             </a:avLst>
           </a:prstGeom>
           <a:solidFill>
-            <a:srgbClr val="141414"/>
+            <a:srgbClr val="FFFFFF"/>
           </a:solidFill>
           <a:ln w="12700">
             <a:solidFill>
-              <a:srgbClr val="2E2E2E"/>
+              <a:srgbClr val="DDE0E6"/>
             </a:solidFill>
             <a:prstDash val="solid"/>
           </a:ln>
@@ -5903,11 +5903,11 @@
             <a:r>
               <a:rPr lang="en-US" sz="1200" b="1" dirty="0">
                 <a:solidFill>
-                  <a:srgbClr val="F5F5F0"/>
-                </a:solidFill>
-                <a:latin typeface="Cambria" pitchFamily="34" charset="0"/>
-                <a:ea typeface="Cambria" pitchFamily="34" charset="-122"/>
-                <a:cs typeface="Cambria" pitchFamily="34" charset="-120"/>
+                  <a:srgbClr val="16181D"/>
+                </a:solidFill>
+                <a:latin typeface="BIZ UDPGothic" pitchFamily="34" charset="0"/>
+                <a:ea typeface="BIZ UDPGothic" pitchFamily="34" charset="-122"/>
+                <a:cs typeface="BIZ UDPGothic" pitchFamily="34" charset="-120"/>
               </a:rPr>
               <a:t>マンションの「土地部分（敷地権）」はどうなる？</a:t>
             </a:r>
@@ -5942,11 +5942,11 @@
             <a:r>
               <a:rPr lang="en-US" sz="1000" dirty="0">
                 <a:solidFill>
-                  <a:srgbClr val="CCCCCC"/>
-                </a:solidFill>
-                <a:latin typeface="Arial" pitchFamily="34" charset="0"/>
-                <a:ea typeface="Arial" pitchFamily="34" charset="-122"/>
-                <a:cs typeface="Arial" pitchFamily="34" charset="-120"/>
+                  <a:srgbClr val="2B2F36"/>
+                </a:solidFill>
+                <a:latin typeface="Arial" pitchFamily="34" charset="0"/>
+                <a:ea typeface="BIZ UDPGothic" pitchFamily="34" charset="-122"/>
+                <a:cs typeface="BIZ UDPGothic" pitchFamily="34" charset="-120"/>
               </a:rPr>
               <a:t>マンションには土地の持分（敷地権）も含まれるが、居住目的で買う場合はセットで取得できる。一戸建ての土地とは別のルールを適用する。</a:t>
             </a:r>
@@ -5968,7 +5968,7 @@
     <p:bg>
       <p:bgPr>
         <a:solidFill>
-          <a:srgbClr val="0A0A0A"/>
+          <a:srgbClr val="F5F6F8"/>
         </a:solidFill>
       </p:bgPr>
     </p:bg>
@@ -6013,11 +6013,11 @@
             <a:r>
               <a:rPr lang="en-US" sz="900" b="1" spc="400" kern="0" dirty="0">
                 <a:solidFill>
-                  <a:srgbClr val="D62828"/>
-                </a:solidFill>
-                <a:latin typeface="Arial" pitchFamily="34" charset="0"/>
-                <a:ea typeface="Arial" pitchFamily="34" charset="-122"/>
-                <a:cs typeface="Arial" pitchFamily="34" charset="-120"/>
+                  <a:srgbClr val="C8161D"/>
+                </a:solidFill>
+                <a:latin typeface="Arial" pitchFamily="34" charset="0"/>
+                <a:ea typeface="BIZ UDPGothic" pitchFamily="34" charset="-122"/>
+                <a:cs typeface="BIZ UDPGothic" pitchFamily="34" charset="-120"/>
               </a:rPr>
               <a:t>RULE 03 — DETAIL</a:t>
             </a:r>
@@ -6052,11 +6052,11 @@
             <a:r>
               <a:rPr lang="en-US" sz="2800" b="1" dirty="0">
                 <a:solidFill>
-                  <a:srgbClr val="F5F5F0"/>
-                </a:solidFill>
-                <a:latin typeface="Cambria" pitchFamily="34" charset="0"/>
-                <a:ea typeface="Cambria" pitchFamily="34" charset="-122"/>
-                <a:cs typeface="Cambria" pitchFamily="34" charset="-120"/>
+                  <a:srgbClr val="16181D"/>
+                </a:solidFill>
+                <a:latin typeface="BIZ UDPGothic" pitchFamily="34" charset="0"/>
+                <a:ea typeface="BIZ UDPGothic" pitchFamily="34" charset="-122"/>
+                <a:cs typeface="BIZ UDPGothic" pitchFamily="34" charset="-120"/>
               </a:rPr>
               <a:t>居住実績ルール：本当に住み続けることが条件</a:t>
             </a:r>
@@ -6079,11 +6079,11 @@
             <a:avLst/>
           </a:prstGeom>
           <a:solidFill>
-            <a:srgbClr val="2E2E2E"/>
+            <a:srgbClr val="DDE0E6"/>
           </a:solidFill>
           <a:ln w="12700">
             <a:solidFill>
-              <a:srgbClr val="2E2E2E"/>
+              <a:srgbClr val="DDE0E6"/>
             </a:solidFill>
             <a:prstDash val="solid"/>
           </a:ln>
@@ -6116,11 +6116,11 @@
             <a:r>
               <a:rPr lang="en-US" sz="1100" dirty="0">
                 <a:solidFill>
-                  <a:srgbClr val="CCCCCC"/>
-                </a:solidFill>
-                <a:latin typeface="Arial" pitchFamily="34" charset="0"/>
-                <a:ea typeface="Arial" pitchFamily="34" charset="-122"/>
-                <a:cs typeface="Arial" pitchFamily="34" charset="-120"/>
+                  <a:srgbClr val="2B2F36"/>
+                </a:solidFill>
+                <a:latin typeface="Arial" pitchFamily="34" charset="0"/>
+                <a:ea typeface="BIZ UDPGothic" pitchFamily="34" charset="-122"/>
+                <a:cs typeface="BIZ UDPGothic" pitchFamily="34" charset="-120"/>
               </a:rPr>
               <a:t>「住む目的で買う」と言えば誰でも買えるが、実際に住み続けなければペナルティがある。</a:t>
             </a:r>
@@ -6145,11 +6145,11 @@
             </a:avLst>
           </a:prstGeom>
           <a:solidFill>
-            <a:srgbClr val="141420"/>
+            <a:srgbClr val="E9EFF8"/>
           </a:solidFill>
           <a:ln w="12700">
             <a:solidFill>
-              <a:srgbClr val="2E2E2E"/>
+              <a:srgbClr val="DDE0E6"/>
             </a:solidFill>
             <a:prstDash val="solid"/>
           </a:ln>
@@ -6182,11 +6182,11 @@
             <a:r>
               <a:rPr lang="en-US" sz="1600" b="1" dirty="0">
                 <a:solidFill>
-                  <a:srgbClr val="4090D0"/>
-                </a:solidFill>
-                <a:latin typeface="Cambria" pitchFamily="34" charset="0"/>
-                <a:ea typeface="Cambria" pitchFamily="34" charset="-122"/>
-                <a:cs typeface="Cambria" pitchFamily="34" charset="-120"/>
+                  <a:srgbClr val="1D4F91"/>
+                </a:solidFill>
+                <a:latin typeface="BIZ UDPGothic" pitchFamily="34" charset="0"/>
+                <a:ea typeface="BIZ UDPGothic" pitchFamily="34" charset="-122"/>
+                <a:cs typeface="BIZ UDPGothic" pitchFamily="34" charset="-120"/>
               </a:rPr>
               <a:t>3年間で400日以上、実際にそこに住んでいること</a:t>
             </a:r>
@@ -6221,11 +6221,11 @@
             <a:r>
               <a:rPr lang="en-US" sz="1000" dirty="0">
                 <a:solidFill>
-                  <a:srgbClr val="CCCCCC"/>
-                </a:solidFill>
-                <a:latin typeface="Arial" pitchFamily="34" charset="0"/>
-                <a:ea typeface="Arial" pitchFamily="34" charset="-122"/>
-                <a:cs typeface="Arial" pitchFamily="34" charset="-120"/>
+                  <a:srgbClr val="2B2F36"/>
+                </a:solidFill>
+                <a:latin typeface="Arial" pitchFamily="34" charset="0"/>
+                <a:ea typeface="BIZ UDPGothic" pitchFamily="34" charset="-122"/>
+                <a:cs typeface="BIZ UDPGothic" pitchFamily="34" charset="-120"/>
               </a:rPr>
               <a:t>（3年間＝1,095日のうち、少なくとも400日は実際に住む。住民票・電気・水道の使用記録などで確認）</a:t>
             </a:r>
@@ -6250,11 +6250,11 @@
             </a:avLst>
           </a:prstGeom>
           <a:solidFill>
-            <a:srgbClr val="1A0808"/>
+            <a:srgbClr val="FCEBEB"/>
           </a:solidFill>
           <a:ln w="12700">
             <a:solidFill>
-              <a:srgbClr val="2E2E2E"/>
+              <a:srgbClr val="DDE0E6"/>
             </a:solidFill>
             <a:prstDash val="solid"/>
           </a:ln>
@@ -6287,11 +6287,11 @@
             <a:r>
               <a:rPr lang="en-US" sz="1300" b="1" dirty="0">
                 <a:solidFill>
-                  <a:srgbClr val="D62828"/>
-                </a:solidFill>
-                <a:latin typeface="Cambria" pitchFamily="34" charset="0"/>
-                <a:ea typeface="Cambria" pitchFamily="34" charset="-122"/>
-                <a:cs typeface="Cambria" pitchFamily="34" charset="-120"/>
+                  <a:srgbClr val="C8161D"/>
+                </a:solidFill>
+                <a:latin typeface="BIZ UDPGothic" pitchFamily="34" charset="0"/>
+                <a:ea typeface="BIZ UDPGothic" pitchFamily="34" charset="-122"/>
+                <a:cs typeface="BIZ UDPGothic" pitchFamily="34" charset="-120"/>
               </a:rPr>
               <a:t>400日未満だった場合（ペナルティ）</a:t>
             </a:r>
@@ -6326,11 +6326,11 @@
             <a:r>
               <a:rPr lang="en-US" sz="1100" dirty="0">
                 <a:solidFill>
-                  <a:srgbClr val="CCCCCC"/>
-                </a:solidFill>
-                <a:latin typeface="Arial" pitchFamily="34" charset="0"/>
-                <a:ea typeface="Arial" pitchFamily="34" charset="-122"/>
-                <a:cs typeface="Arial" pitchFamily="34" charset="-120"/>
+                  <a:srgbClr val="2B2F36"/>
+                </a:solidFill>
+                <a:latin typeface="Arial" pitchFamily="34" charset="0"/>
+                <a:ea typeface="BIZ UDPGothic" pitchFamily="34" charset="-122"/>
+                <a:cs typeface="BIZ UDPGothic" pitchFamily="34" charset="-120"/>
               </a:rPr>
               <a:t>罰金・課徴金を払う。ただし部屋の所有自体は続けられる（強制的に売らせるわけではない）</a:t>
             </a:r>
@@ -6355,11 +6355,11 @@
             </a:avLst>
           </a:prstGeom>
           <a:solidFill>
-            <a:srgbClr val="141414"/>
+            <a:srgbClr val="FFFFFF"/>
           </a:solidFill>
           <a:ln w="12700">
             <a:solidFill>
-              <a:srgbClr val="2E2E2E"/>
+              <a:srgbClr val="DDE0E6"/>
             </a:solidFill>
             <a:prstDash val="solid"/>
           </a:ln>
@@ -6392,11 +6392,11 @@
             <a:r>
               <a:rPr lang="en-US" sz="1300" b="1" dirty="0">
                 <a:solidFill>
-                  <a:srgbClr val="E0A000"/>
-                </a:solidFill>
-                <a:latin typeface="Cambria" pitchFamily="34" charset="0"/>
-                <a:ea typeface="Cambria" pitchFamily="34" charset="-122"/>
-                <a:cs typeface="Cambria" pitchFamily="34" charset="-120"/>
+                  <a:srgbClr val="9A6200"/>
+                </a:solidFill>
+                <a:latin typeface="BIZ UDPGothic" pitchFamily="34" charset="0"/>
+                <a:ea typeface="BIZ UDPGothic" pitchFamily="34" charset="-122"/>
+                <a:cs typeface="BIZ UDPGothic" pitchFamily="34" charset="-120"/>
               </a:rPr>
               <a:t>海外赴任など「仕方のない理由」がある場合</a:t>
             </a:r>
@@ -6431,11 +6431,11 @@
             <a:r>
               <a:rPr lang="en-US" sz="1100" dirty="0">
                 <a:solidFill>
-                  <a:srgbClr val="CCCCCC"/>
-                </a:solidFill>
-                <a:latin typeface="Arial" pitchFamily="34" charset="0"/>
-                <a:ea typeface="Arial" pitchFamily="34" charset="-122"/>
-                <a:cs typeface="Arial" pitchFamily="34" charset="-120"/>
+                  <a:srgbClr val="2B2F36"/>
+                </a:solidFill>
+                <a:latin typeface="Arial" pitchFamily="34" charset="0"/>
+                <a:ea typeface="BIZ UDPGothic" pitchFamily="34" charset="-122"/>
+                <a:cs typeface="BIZ UDPGothic" pitchFamily="34" charset="-120"/>
               </a:rPr>
               <a:t>申請すれば日数の緩和を認める。ただし連続して何度も申請することはできない（1回限りのルール）</a:t>
             </a:r>
@@ -6457,7 +6457,7 @@
     <p:bg>
       <p:bgPr>
         <a:solidFill>
-          <a:srgbClr val="0A0A0A"/>
+          <a:srgbClr val="F5F6F8"/>
         </a:solidFill>
       </p:bgPr>
     </p:bg>
@@ -6502,11 +6502,11 @@
             <a:r>
               <a:rPr lang="en-US" sz="900" b="1" spc="400" kern="0" dirty="0">
                 <a:solidFill>
-                  <a:srgbClr val="D62828"/>
-                </a:solidFill>
-                <a:latin typeface="Arial" pitchFamily="34" charset="0"/>
-                <a:ea typeface="Arial" pitchFamily="34" charset="-122"/>
-                <a:cs typeface="Arial" pitchFamily="34" charset="-120"/>
+                  <a:srgbClr val="C8161D"/>
+                </a:solidFill>
+                <a:latin typeface="Arial" pitchFamily="34" charset="0"/>
+                <a:ea typeface="BIZ UDPGothic" pitchFamily="34" charset="-122"/>
+                <a:cs typeface="BIZ UDPGothic" pitchFamily="34" charset="-120"/>
               </a:rPr>
               <a:t>COMBINED EFFECT</a:t>
             </a:r>
@@ -6541,11 +6541,11 @@
             <a:r>
               <a:rPr lang="en-US" sz="2400" b="1" dirty="0">
                 <a:solidFill>
-                  <a:srgbClr val="F5F5F0"/>
-                </a:solidFill>
-                <a:latin typeface="Cambria" pitchFamily="34" charset="0"/>
-                <a:ea typeface="Cambria" pitchFamily="34" charset="-122"/>
-                <a:cs typeface="Cambria" pitchFamily="34" charset="-120"/>
+                  <a:srgbClr val="16181D"/>
+                </a:solidFill>
+                <a:latin typeface="BIZ UDPGothic" pitchFamily="34" charset="0"/>
+                <a:ea typeface="BIZ UDPGothic" pitchFamily="34" charset="-122"/>
+                <a:cs typeface="BIZ UDPGothic" pitchFamily="34" charset="-120"/>
               </a:rPr>
               <a:t>土地規制＋マンション規制で「二重の防波堤」になる</a:t>
             </a:r>
@@ -6568,11 +6568,11 @@
             <a:avLst/>
           </a:prstGeom>
           <a:solidFill>
-            <a:srgbClr val="2E2E2E"/>
+            <a:srgbClr val="DDE0E6"/>
           </a:solidFill>
           <a:ln w="12700">
             <a:solidFill>
-              <a:srgbClr val="2E2E2E"/>
+              <a:srgbClr val="DDE0E6"/>
             </a:solidFill>
             <a:prstDash val="solid"/>
           </a:ln>
@@ -6605,11 +6605,11 @@
             <a:r>
               <a:rPr lang="en-US" sz="1100" dirty="0">
                 <a:solidFill>
-                  <a:srgbClr val="CCCCCC"/>
-                </a:solidFill>
-                <a:latin typeface="Arial" pitchFamily="34" charset="0"/>
-                <a:ea typeface="Arial" pitchFamily="34" charset="-122"/>
-                <a:cs typeface="Arial" pitchFamily="34" charset="-120"/>
+                  <a:srgbClr val="2B2F36"/>
+                </a:solidFill>
+                <a:latin typeface="Arial" pitchFamily="34" charset="0"/>
+                <a:ea typeface="BIZ UDPGothic" pitchFamily="34" charset="-122"/>
+                <a:cs typeface="BIZ UDPGothic" pitchFamily="34" charset="-120"/>
               </a:rPr>
               <a:t>どちらか一方だけでは守れない部分を、2つのルールが補い合う仕組みになっている。</a:t>
             </a:r>
@@ -6634,11 +6634,11 @@
             </a:avLst>
           </a:prstGeom>
           <a:solidFill>
-            <a:srgbClr val="141414"/>
+            <a:srgbClr val="FFFFFF"/>
           </a:solidFill>
           <a:ln w="12700">
             <a:solidFill>
-              <a:srgbClr val="2E2E2E"/>
+              <a:srgbClr val="DDE0E6"/>
             </a:solidFill>
             <a:prstDash val="solid"/>
           </a:ln>
@@ -6674,11 +6674,11 @@
             <a:r>
               <a:rPr lang="en-US" sz="1100" dirty="0">
                 <a:solidFill>
-                  <a:srgbClr val="CCCCCC"/>
-                </a:solidFill>
-                <a:latin typeface="Arial" pitchFamily="34" charset="0"/>
-                <a:ea typeface="Arial" pitchFamily="34" charset="-122"/>
-                <a:cs typeface="Arial" pitchFamily="34" charset="-120"/>
+                  <a:srgbClr val="2B2F36"/>
+                </a:solidFill>
+                <a:latin typeface="Arial" pitchFamily="34" charset="0"/>
+                <a:ea typeface="BIZ UDPGothic" pitchFamily="34" charset="-122"/>
+                <a:cs typeface="BIZ UDPGothic" pitchFamily="34" charset="-120"/>
               </a:rPr>
               <a:t>外国資本は土地を買えない → タワマンを建てたい外国のデベロッパー（開発会社）は土地を「借りる」しかない</a:t>
             </a:r>
@@ -6694,11 +6694,11 @@
             <a:r>
               <a:rPr lang="en-US" sz="1100" dirty="0">
                 <a:solidFill>
-                  <a:srgbClr val="CCCCCC"/>
-                </a:solidFill>
-                <a:latin typeface="Arial" pitchFamily="34" charset="0"/>
-                <a:ea typeface="Arial" pitchFamily="34" charset="-122"/>
-                <a:cs typeface="Arial" pitchFamily="34" charset="-120"/>
+                  <a:srgbClr val="2B2F36"/>
+                </a:solidFill>
+                <a:latin typeface="Arial" pitchFamily="34" charset="0"/>
+                <a:ea typeface="BIZ UDPGothic" pitchFamily="34" charset="-122"/>
+                <a:cs typeface="BIZ UDPGothic" pitchFamily="34" charset="-120"/>
               </a:rPr>
               <a:t>↓</a:t>
             </a:r>
@@ -6714,11 +6714,11 @@
             <a:r>
               <a:rPr lang="en-US" sz="1100" dirty="0">
                 <a:solidFill>
-                  <a:srgbClr val="CCCCCC"/>
-                </a:solidFill>
-                <a:latin typeface="Arial" pitchFamily="34" charset="0"/>
-                <a:ea typeface="Arial" pitchFamily="34" charset="-122"/>
-                <a:cs typeface="Arial" pitchFamily="34" charset="-120"/>
+                  <a:srgbClr val="2B2F36"/>
+                </a:solidFill>
+                <a:latin typeface="Arial" pitchFamily="34" charset="0"/>
+                <a:ea typeface="BIZ UDPGothic" pitchFamily="34" charset="-122"/>
+                <a:cs typeface="BIZ UDPGothic" pitchFamily="34" charset="-120"/>
               </a:rPr>
               <a:t>土地を借りているだけなので、地主（日本企業）の方針が変われば「賃料を上げる」「貸さなくなる」リスクが常にある</a:t>
             </a:r>
@@ -6734,11 +6734,11 @@
             <a:r>
               <a:rPr lang="en-US" sz="1100" dirty="0">
                 <a:solidFill>
-                  <a:srgbClr val="CCCCCC"/>
-                </a:solidFill>
-                <a:latin typeface="Arial" pitchFamily="34" charset="0"/>
-                <a:ea typeface="Arial" pitchFamily="34" charset="-122"/>
-                <a:cs typeface="Arial" pitchFamily="34" charset="-120"/>
+                  <a:srgbClr val="2B2F36"/>
+                </a:solidFill>
+                <a:latin typeface="Arial" pitchFamily="34" charset="0"/>
+                <a:ea typeface="BIZ UDPGothic" pitchFamily="34" charset="-122"/>
+                <a:cs typeface="BIZ UDPGothic" pitchFamily="34" charset="-120"/>
               </a:rPr>
               <a:t>↓</a:t>
             </a:r>
@@ -6754,11 +6754,11 @@
             <a:r>
               <a:rPr lang="en-US" sz="1100" dirty="0">
                 <a:solidFill>
-                  <a:srgbClr val="CCCCCC"/>
-                </a:solidFill>
-                <a:latin typeface="Arial" pitchFamily="34" charset="0"/>
-                <a:ea typeface="Arial" pitchFamily="34" charset="-122"/>
-                <a:cs typeface="Arial" pitchFamily="34" charset="-120"/>
+                  <a:srgbClr val="2B2F36"/>
+                </a:solidFill>
+                <a:latin typeface="Arial" pitchFamily="34" charset="0"/>
+                <a:ea typeface="BIZ UDPGothic" pitchFamily="34" charset="-122"/>
+                <a:cs typeface="BIZ UDPGothic" pitchFamily="34" charset="-120"/>
               </a:rPr>
               <a:t>「いつ追い出されるかわからない土地」に何百億円もかけてタワマンを建てるのは怖くてできない</a:t>
             </a:r>
@@ -6774,11 +6774,11 @@
             <a:r>
               <a:rPr lang="en-US" sz="1100" dirty="0">
                 <a:solidFill>
-                  <a:srgbClr val="CCCCCC"/>
-                </a:solidFill>
-                <a:latin typeface="Arial" pitchFamily="34" charset="0"/>
-                <a:ea typeface="Arial" pitchFamily="34" charset="-122"/>
-                <a:cs typeface="Arial" pitchFamily="34" charset="-120"/>
+                  <a:srgbClr val="2B2F36"/>
+                </a:solidFill>
+                <a:latin typeface="Arial" pitchFamily="34" charset="0"/>
+                <a:ea typeface="BIZ UDPGothic" pitchFamily="34" charset="-122"/>
+                <a:cs typeface="BIZ UDPGothic" pitchFamily="34" charset="-120"/>
               </a:rPr>
               <a:t>↓</a:t>
             </a:r>
@@ -6794,11 +6794,11 @@
             <a:r>
               <a:rPr lang="en-US" sz="1100" dirty="0">
                 <a:solidFill>
-                  <a:srgbClr val="CCCCCC"/>
-                </a:solidFill>
-                <a:latin typeface="Arial" pitchFamily="34" charset="0"/>
-                <a:ea typeface="Arial" pitchFamily="34" charset="-122"/>
-                <a:cs typeface="Arial" pitchFamily="34" charset="-120"/>
+                  <a:srgbClr val="2B2F36"/>
+                </a:solidFill>
+                <a:latin typeface="Arial" pitchFamily="34" charset="0"/>
+                <a:ea typeface="BIZ UDPGothic" pitchFamily="34" charset="-122"/>
+                <a:cs typeface="BIZ UDPGothic" pitchFamily="34" charset="-120"/>
               </a:rPr>
               <a:t>外国資本による大型タワマン開発が自然に抑制される</a:t>
             </a:r>
@@ -6823,11 +6823,11 @@
             </a:avLst>
           </a:prstGeom>
           <a:solidFill>
-            <a:srgbClr val="081808"/>
+            <a:srgbClr val="E9EFF8"/>
           </a:solidFill>
           <a:ln w="12700">
             <a:solidFill>
-              <a:srgbClr val="2E2E2E"/>
+              <a:srgbClr val="DDE0E6"/>
             </a:solidFill>
             <a:prstDash val="solid"/>
           </a:ln>
@@ -6860,11 +6860,11 @@
             <a:r>
               <a:rPr lang="en-US" sz="1100" b="1" dirty="0">
                 <a:solidFill>
-                  <a:srgbClr val="4CAF50"/>
-                </a:solidFill>
-                <a:latin typeface="Cambria" pitchFamily="34" charset="0"/>
-                <a:ea typeface="Cambria" pitchFamily="34" charset="-122"/>
-                <a:cs typeface="Cambria" pitchFamily="34" charset="-120"/>
+                  <a:srgbClr val="1D4F91"/>
+                </a:solidFill>
+                <a:latin typeface="BIZ UDPGothic" pitchFamily="34" charset="0"/>
+                <a:ea typeface="BIZ UDPGothic" pitchFamily="34" charset="-122"/>
+                <a:cs typeface="BIZ UDPGothic" pitchFamily="34" charset="-120"/>
               </a:rPr>
               <a:t>土地規制で「建てる場所を奪い」、マンション規制で「投資目的の購入を奪う」。2つで住居費高騰を抑える。</a:t>
             </a:r>
@@ -6886,7 +6886,7 @@
     <p:bg>
       <p:bgPr>
         <a:solidFill>
-          <a:srgbClr val="0A0A0A"/>
+          <a:srgbClr val="F5F6F8"/>
         </a:solidFill>
       </p:bgPr>
     </p:bg>
@@ -6931,11 +6931,11 @@
             <a:r>
               <a:rPr lang="en-US" sz="900" b="1" spc="400" kern="0" dirty="0">
                 <a:solidFill>
-                  <a:srgbClr val="D62828"/>
-                </a:solidFill>
-                <a:latin typeface="Arial" pitchFamily="34" charset="0"/>
-                <a:ea typeface="Arial" pitchFamily="34" charset="-122"/>
-                <a:cs typeface="Arial" pitchFamily="34" charset="-120"/>
+                  <a:srgbClr val="C8161D"/>
+                </a:solidFill>
+                <a:latin typeface="Arial" pitchFamily="34" charset="0"/>
+                <a:ea typeface="BIZ UDPGothic" pitchFamily="34" charset="-122"/>
+                <a:cs typeface="BIZ UDPGothic" pitchFamily="34" charset="-120"/>
               </a:rPr>
               <a:t>ECONOMIC IMPACT — NEGATIVE</a:t>
             </a:r>
@@ -6970,11 +6970,11 @@
             <a:r>
               <a:rPr lang="en-US" sz="2800" b="1" dirty="0">
                 <a:solidFill>
-                  <a:srgbClr val="F5F5F0"/>
-                </a:solidFill>
-                <a:latin typeface="Cambria" pitchFamily="34" charset="0"/>
-                <a:ea typeface="Cambria" pitchFamily="34" charset="-122"/>
-                <a:cs typeface="Cambria" pitchFamily="34" charset="-120"/>
+                  <a:srgbClr val="16181D"/>
+                </a:solidFill>
+                <a:latin typeface="BIZ UDPGothic" pitchFamily="34" charset="0"/>
+                <a:ea typeface="BIZ UDPGothic" pitchFamily="34" charset="-122"/>
+                <a:cs typeface="BIZ UDPGothic" pitchFamily="34" charset="-120"/>
               </a:rPr>
               <a:t>マイナスの影響：新しいマンションが建ちにくくなる</a:t>
             </a:r>
@@ -6997,11 +6997,11 @@
             <a:avLst/>
           </a:prstGeom>
           <a:solidFill>
-            <a:srgbClr val="2E2E2E"/>
+            <a:srgbClr val="DDE0E6"/>
           </a:solidFill>
           <a:ln w="12700">
             <a:solidFill>
-              <a:srgbClr val="2E2E2E"/>
+              <a:srgbClr val="DDE0E6"/>
             </a:solidFill>
             <a:prstDash val="solid"/>
           </a:ln>
@@ -7034,11 +7034,11 @@
             <a:r>
               <a:rPr lang="en-US" sz="1100" dirty="0">
                 <a:solidFill>
-                  <a:srgbClr val="CCCCCC"/>
-                </a:solidFill>
-                <a:latin typeface="Arial" pitchFamily="34" charset="0"/>
-                <a:ea typeface="Arial" pitchFamily="34" charset="-122"/>
-                <a:cs typeface="Arial" pitchFamily="34" charset="-120"/>
+                  <a:srgbClr val="2B2F36"/>
+                </a:solidFill>
+                <a:latin typeface="Arial" pitchFamily="34" charset="0"/>
+                <a:ea typeface="BIZ UDPGothic" pitchFamily="34" charset="-122"/>
+                <a:cs typeface="BIZ UDPGothic" pitchFamily="34" charset="-120"/>
               </a:rPr>
               <a:t>このルールによって、外国のデベロッパーが日本での開発をやめるケースが増える。その結果、マンションの供給が減る可能性がある。</a:t>
             </a:r>
@@ -7063,11 +7063,11 @@
             </a:avLst>
           </a:prstGeom>
           <a:solidFill>
-            <a:srgbClr val="141414"/>
+            <a:srgbClr val="FFFFFF"/>
           </a:solidFill>
           <a:ln w="12700">
             <a:solidFill>
-              <a:srgbClr val="2E2E2E"/>
+              <a:srgbClr val="DDE0E6"/>
             </a:solidFill>
             <a:prstDash val="solid"/>
           </a:ln>
@@ -7090,11 +7090,11 @@
             </a:avLst>
           </a:prstGeom>
           <a:solidFill>
-            <a:srgbClr val="D62828"/>
+            <a:srgbClr val="C8161D"/>
           </a:solidFill>
           <a:ln w="12700">
             <a:solidFill>
-              <a:srgbClr val="D62828"/>
+              <a:srgbClr val="C8161D"/>
             </a:solidFill>
             <a:prstDash val="solid"/>
           </a:ln>
@@ -7127,11 +7127,11 @@
             <a:r>
               <a:rPr lang="en-US" sz="1100" b="1" dirty="0">
                 <a:solidFill>
-                  <a:srgbClr val="F5F5F0"/>
-                </a:solidFill>
-                <a:latin typeface="Arial" pitchFamily="34" charset="0"/>
-                <a:ea typeface="Arial" pitchFamily="34" charset="-122"/>
-                <a:cs typeface="Arial" pitchFamily="34" charset="-120"/>
+                  <a:srgbClr val="FFFFFF"/>
+                </a:solidFill>
+                <a:latin typeface="Arial" pitchFamily="34" charset="0"/>
+                <a:ea typeface="BIZ UDPGothic" pitchFamily="34" charset="-122"/>
+                <a:cs typeface="BIZ UDPGothic" pitchFamily="34" charset="-120"/>
               </a:rPr>
               <a:t>保守的な試算</a:t>
             </a:r>
@@ -7166,11 +7166,11 @@
             <a:r>
               <a:rPr lang="en-US" sz="1100" dirty="0">
                 <a:solidFill>
-                  <a:srgbClr val="CCCCCC"/>
-                </a:solidFill>
-                <a:latin typeface="Arial" pitchFamily="34" charset="0"/>
-                <a:ea typeface="Arial" pitchFamily="34" charset="-122"/>
-                <a:cs typeface="Arial" pitchFamily="34" charset="-120"/>
+                  <a:srgbClr val="2B2F36"/>
+                </a:solidFill>
+                <a:latin typeface="Arial" pitchFamily="34" charset="0"/>
+                <a:ea typeface="BIZ UDPGothic" pitchFamily="34" charset="-122"/>
+                <a:cs typeface="BIZ UDPGothic" pitchFamily="34" charset="-120"/>
               </a:rPr>
               <a:t>都心の高額帯（2億円以上のマンション）で外資系の開発が1〜2割ほど減る。ただし都心全体の新築供給への影響は約△1.5〜3%程度に留まる</a:t>
             </a:r>
@@ -7195,11 +7195,11 @@
             </a:avLst>
           </a:prstGeom>
           <a:solidFill>
-            <a:srgbClr val="081808"/>
+            <a:srgbClr val="E9EFF8"/>
           </a:solidFill>
           <a:ln w="12700">
             <a:solidFill>
-              <a:srgbClr val="2E2E2E"/>
+              <a:srgbClr val="DDE0E6"/>
             </a:solidFill>
             <a:prstDash val="solid"/>
           </a:ln>
@@ -7222,11 +7222,11 @@
             </a:avLst>
           </a:prstGeom>
           <a:solidFill>
-            <a:srgbClr val="D62828"/>
+            <a:srgbClr val="C8161D"/>
           </a:solidFill>
           <a:ln w="12700">
             <a:solidFill>
-              <a:srgbClr val="D62828"/>
+              <a:srgbClr val="C8161D"/>
             </a:solidFill>
             <a:prstDash val="solid"/>
           </a:ln>
@@ -7259,11 +7259,11 @@
             <a:r>
               <a:rPr lang="en-US" sz="1100" b="1" dirty="0">
                 <a:solidFill>
-                  <a:srgbClr val="F5F5F0"/>
-                </a:solidFill>
-                <a:latin typeface="Arial" pitchFamily="34" charset="0"/>
-                <a:ea typeface="Arial" pitchFamily="34" charset="-122"/>
-                <a:cs typeface="Arial" pitchFamily="34" charset="-120"/>
+                  <a:srgbClr val="FFFFFF"/>
+                </a:solidFill>
+                <a:latin typeface="Arial" pitchFamily="34" charset="0"/>
+                <a:ea typeface="BIZ UDPGothic" pitchFamily="34" charset="-122"/>
+                <a:cs typeface="BIZ UDPGothic" pitchFamily="34" charset="-120"/>
               </a:rPr>
               <a:t>楽観的な試算</a:t>
             </a:r>
@@ -7298,11 +7298,11 @@
             <a:r>
               <a:rPr lang="en-US" sz="1100" dirty="0">
                 <a:solidFill>
-                  <a:srgbClr val="CCCCCC"/>
-                </a:solidFill>
-                <a:latin typeface="Arial" pitchFamily="34" charset="0"/>
-                <a:ea typeface="Arial" pitchFamily="34" charset="-122"/>
-                <a:cs typeface="Arial" pitchFamily="34" charset="-120"/>
+                  <a:srgbClr val="2B2F36"/>
+                </a:solidFill>
+                <a:latin typeface="Arial" pitchFamily="34" charset="0"/>
+                <a:ea typeface="BIZ UDPGothic" pitchFamily="34" charset="-122"/>
+                <a:cs typeface="BIZ UDPGothic" pitchFamily="34" charset="-120"/>
               </a:rPr>
               <a:t>外資の撤退は少なく、日本のデベロッパーが代わりに開発を引き継ぐ。全体への影響はほぼ誤差の範囲（△1%未満）</a:t>
             </a:r>
@@ -7327,11 +7327,11 @@
             </a:avLst>
           </a:prstGeom>
           <a:solidFill>
-            <a:srgbClr val="1A1408"/>
+            <a:srgbClr val="FFF4DB"/>
           </a:solidFill>
           <a:ln w="12700">
             <a:solidFill>
-              <a:srgbClr val="2E2E2E"/>
+              <a:srgbClr val="DDE0E6"/>
             </a:solidFill>
             <a:prstDash val="solid"/>
           </a:ln>
@@ -7364,11 +7364,11 @@
             <a:r>
               <a:rPr lang="en-US" sz="1000" dirty="0">
                 <a:solidFill>
-                  <a:srgbClr val="E0A000"/>
-                </a:solidFill>
-                <a:latin typeface="Arial" pitchFamily="34" charset="0"/>
-                <a:ea typeface="Arial" pitchFamily="34" charset="-122"/>
-                <a:cs typeface="Arial" pitchFamily="34" charset="-120"/>
+                  <a:srgbClr val="9A6200"/>
+                </a:solidFill>
+                <a:latin typeface="Arial" pitchFamily="34" charset="0"/>
+                <a:ea typeface="BIZ UDPGothic" pitchFamily="34" charset="-122"/>
+                <a:cs typeface="BIZ UDPGothic" pitchFamily="34" charset="-120"/>
               </a:rPr>
               <a:t>注意：供給が減ると「希少性」が上がってかえって価格が上がる可能性もある。試算には不確実性が伴う。</a:t>
             </a:r>
@@ -7390,7 +7390,7 @@
     <p:bg>
       <p:bgPr>
         <a:solidFill>
-          <a:srgbClr val="0A0A0A"/>
+          <a:srgbClr val="F5F6F8"/>
         </a:solidFill>
       </p:bgPr>
     </p:bg>
@@ -7435,11 +7435,11 @@
             <a:r>
               <a:rPr lang="en-US" sz="900" b="1" spc="400" kern="0" dirty="0">
                 <a:solidFill>
-                  <a:srgbClr val="D62828"/>
-                </a:solidFill>
-                <a:latin typeface="Arial" pitchFamily="34" charset="0"/>
-                <a:ea typeface="Arial" pitchFamily="34" charset="-122"/>
-                <a:cs typeface="Arial" pitchFamily="34" charset="-120"/>
+                  <a:srgbClr val="C8161D"/>
+                </a:solidFill>
+                <a:latin typeface="Arial" pitchFamily="34" charset="0"/>
+                <a:ea typeface="BIZ UDPGothic" pitchFamily="34" charset="-122"/>
+                <a:cs typeface="BIZ UDPGothic" pitchFamily="34" charset="-120"/>
               </a:rPr>
               <a:t>ECONOMIC IMPACT — POSITIVE</a:t>
             </a:r>
@@ -7472,17 +7472,17 @@
               <a:buNone/>
             </a:pPr>
             <a:r>
-              <a:rPr lang="en-US" sz="2800" b="1" dirty="0">
-                <a:solidFill>
-                  <a:srgbClr val="F5F5F0"/>
-                </a:solidFill>
-                <a:latin typeface="Cambria" pitchFamily="34" charset="0"/>
-                <a:ea typeface="Cambria" pitchFamily="34" charset="-122"/>
-                <a:cs typeface="Cambria" pitchFamily="34" charset="-120"/>
+              <a:rPr lang="en-US" sz="2200" b="1" dirty="0">
+                <a:solidFill>
+                  <a:srgbClr val="16181D"/>
+                </a:solidFill>
+                <a:latin typeface="BIZ UDPGothic" pitchFamily="34" charset="0"/>
+                <a:ea typeface="BIZ UDPGothic" pitchFamily="34" charset="-122"/>
+                <a:cs typeface="BIZ UDPGothic" pitchFamily="34" charset="-120"/>
               </a:rPr>
               <a:t>プラスの影響：マンション価格が下がり日本人が買いやすくなる</a:t>
             </a:r>
-            <a:endParaRPr lang="en-US" sz="2800" dirty="0"/>
+            <a:endParaRPr lang="en-US" sz="2200" dirty="0"/>
           </a:p>
         </p:txBody>
       </p:sp>
@@ -7501,11 +7501,11 @@
             <a:avLst/>
           </a:prstGeom>
           <a:solidFill>
-            <a:srgbClr val="2E2E2E"/>
+            <a:srgbClr val="DDE0E6"/>
           </a:solidFill>
           <a:ln w="12700">
             <a:solidFill>
-              <a:srgbClr val="2E2E2E"/>
+              <a:srgbClr val="DDE0E6"/>
             </a:solidFill>
             <a:prstDash val="solid"/>
           </a:ln>
@@ -7538,11 +7538,11 @@
             <a:r>
               <a:rPr lang="en-US" sz="1100" dirty="0">
                 <a:solidFill>
-                  <a:srgbClr val="CCCCCC"/>
-                </a:solidFill>
-                <a:latin typeface="Arial" pitchFamily="34" charset="0"/>
-                <a:ea typeface="Arial" pitchFamily="34" charset="-122"/>
-                <a:cs typeface="Arial" pitchFamily="34" charset="-120"/>
+                  <a:srgbClr val="2B2F36"/>
+                </a:solidFill>
+                <a:latin typeface="Arial" pitchFamily="34" charset="0"/>
+                <a:ea typeface="BIZ UDPGothic" pitchFamily="34" charset="-122"/>
+                <a:cs typeface="BIZ UDPGothic" pitchFamily="34" charset="-120"/>
               </a:rPr>
               <a:t>外国の投資マネーが市場から退くことで、高騰していた価格が落ち着く効果が期待できる。</a:t>
             </a:r>
@@ -7567,11 +7567,11 @@
             </a:avLst>
           </a:prstGeom>
           <a:solidFill>
-            <a:srgbClr val="141414"/>
+            <a:srgbClr val="FFFFFF"/>
           </a:solidFill>
           <a:ln w="12700">
             <a:solidFill>
-              <a:srgbClr val="2E2E2E"/>
+              <a:srgbClr val="DDE0E6"/>
             </a:solidFill>
             <a:prstDash val="solid"/>
           </a:ln>
@@ -7594,11 +7594,11 @@
             </a:avLst>
           </a:prstGeom>
           <a:solidFill>
-            <a:srgbClr val="D62828"/>
+            <a:srgbClr val="C8161D"/>
           </a:solidFill>
           <a:ln w="12700">
             <a:solidFill>
-              <a:srgbClr val="D62828"/>
+              <a:srgbClr val="C8161D"/>
             </a:solidFill>
             <a:prstDash val="solid"/>
           </a:ln>
@@ -7631,11 +7631,11 @@
             <a:r>
               <a:rPr lang="en-US" sz="1100" b="1" dirty="0">
                 <a:solidFill>
-                  <a:srgbClr val="F5F5F0"/>
-                </a:solidFill>
-                <a:latin typeface="Arial" pitchFamily="34" charset="0"/>
-                <a:ea typeface="Arial" pitchFamily="34" charset="-122"/>
-                <a:cs typeface="Arial" pitchFamily="34" charset="-120"/>
+                  <a:srgbClr val="FFFFFF"/>
+                </a:solidFill>
+                <a:latin typeface="Arial" pitchFamily="34" charset="0"/>
+                <a:ea typeface="BIZ UDPGothic" pitchFamily="34" charset="-122"/>
+                <a:cs typeface="BIZ UDPGothic" pitchFamily="34" charset="-120"/>
               </a:rPr>
               <a:t>保守的な試算</a:t>
             </a:r>
@@ -7670,11 +7670,11 @@
             <a:r>
               <a:rPr lang="en-US" sz="1100" dirty="0">
                 <a:solidFill>
-                  <a:srgbClr val="CCCCCC"/>
-                </a:solidFill>
-                <a:latin typeface="Arial" pitchFamily="34" charset="0"/>
-                <a:ea typeface="Arial" pitchFamily="34" charset="-122"/>
-                <a:cs typeface="Arial" pitchFamily="34" charset="-120"/>
+                  <a:srgbClr val="2B2F36"/>
+                </a:solidFill>
+                <a:latin typeface="Arial" pitchFamily="34" charset="0"/>
+                <a:ea typeface="BIZ UDPGothic" pitchFamily="34" charset="-122"/>
+                <a:cs typeface="BIZ UDPGothic" pitchFamily="34" charset="-120"/>
               </a:rPr>
               <a:t>価格の上がり方が「少し遅くなる」程度。都心の高額マンションで年間の上昇率が1〜2%ポイント鈍化する。完全に止まるわけではないが、過熱を抑える効果はある</a:t>
             </a:r>
@@ -7699,11 +7699,11 @@
             </a:avLst>
           </a:prstGeom>
           <a:solidFill>
-            <a:srgbClr val="081808"/>
+            <a:srgbClr val="E9EFF8"/>
           </a:solidFill>
           <a:ln w="12700">
             <a:solidFill>
-              <a:srgbClr val="2E2E2E"/>
+              <a:srgbClr val="DDE0E6"/>
             </a:solidFill>
             <a:prstDash val="solid"/>
           </a:ln>
@@ -7726,11 +7726,11 @@
             </a:avLst>
           </a:prstGeom>
           <a:solidFill>
-            <a:srgbClr val="D62828"/>
+            <a:srgbClr val="C8161D"/>
           </a:solidFill>
           <a:ln w="12700">
             <a:solidFill>
-              <a:srgbClr val="D62828"/>
+              <a:srgbClr val="C8161D"/>
             </a:solidFill>
             <a:prstDash val="solid"/>
           </a:ln>
@@ -7763,11 +7763,11 @@
             <a:r>
               <a:rPr lang="en-US" sz="1100" b="1" dirty="0">
                 <a:solidFill>
-                  <a:srgbClr val="F5F5F0"/>
-                </a:solidFill>
-                <a:latin typeface="Arial" pitchFamily="34" charset="0"/>
-                <a:ea typeface="Arial" pitchFamily="34" charset="-122"/>
-                <a:cs typeface="Arial" pitchFamily="34" charset="-120"/>
+                  <a:srgbClr val="FFFFFF"/>
+                </a:solidFill>
+                <a:latin typeface="Arial" pitchFamily="34" charset="0"/>
+                <a:ea typeface="BIZ UDPGothic" pitchFamily="34" charset="-122"/>
+                <a:cs typeface="BIZ UDPGothic" pitchFamily="34" charset="-120"/>
               </a:rPr>
               <a:t>楽観的な試算</a:t>
             </a:r>
@@ -7802,11 +7802,11 @@
             <a:r>
               <a:rPr lang="en-US" sz="1100" dirty="0">
                 <a:solidFill>
-                  <a:srgbClr val="CCCCCC"/>
-                </a:solidFill>
-                <a:latin typeface="Arial" pitchFamily="34" charset="0"/>
-                <a:ea typeface="Arial" pitchFamily="34" charset="-122"/>
-                <a:cs typeface="Arial" pitchFamily="34" charset="-120"/>
+                  <a:srgbClr val="2B2F36"/>
+                </a:solidFill>
+                <a:latin typeface="Arial" pitchFamily="34" charset="0"/>
+                <a:ea typeface="BIZ UDPGothic" pitchFamily="34" charset="-122"/>
+                <a:cs typeface="BIZ UDPGothic" pitchFamily="34" charset="-120"/>
               </a:rPr>
               <a:t>投資マネーが大きく引いた場合、都心の高額マンションの価格が5〜10%程度下落する可能性がある。その影響が周辺の相場にも波及し、日本人にとって買いやすい水準に近づく</a:t>
             </a:r>
@@ -7831,11 +7831,11 @@
             </a:avLst>
           </a:prstGeom>
           <a:solidFill>
-            <a:srgbClr val="1A1A1A"/>
+            <a:srgbClr val="FFFFFF"/>
           </a:solidFill>
           <a:ln w="12700">
             <a:solidFill>
-              <a:srgbClr val="2E2E2E"/>
+              <a:srgbClr val="DDE0E6"/>
             </a:solidFill>
             <a:prstDash val="solid"/>
           </a:ln>
@@ -7868,11 +7868,11 @@
             <a:r>
               <a:rPr lang="en-US" sz="1000" dirty="0">
                 <a:solidFill>
-                  <a:srgbClr val="888888"/>
-                </a:solidFill>
-                <a:latin typeface="Arial" pitchFamily="34" charset="0"/>
-                <a:ea typeface="Arial" pitchFamily="34" charset="-122"/>
-                <a:cs typeface="Arial" pitchFamily="34" charset="-120"/>
+                  <a:srgbClr val="626875"/>
+                </a:solidFill>
+                <a:latin typeface="Arial" pitchFamily="34" charset="0"/>
+                <a:ea typeface="BIZ UDPGothic" pitchFamily="34" charset="-122"/>
+                <a:cs typeface="BIZ UDPGothic" pitchFamily="34" charset="-120"/>
               </a:rPr>
               <a:t>一般的な価格帯（1億円未満）のマンションへの影響は、もともと外国人購入割合が数%程度のため限定的</a:t>
             </a:r>
@@ -7894,7 +7894,7 @@
     <p:bg>
       <p:bgPr>
         <a:solidFill>
-          <a:srgbClr val="0A0A0A"/>
+          <a:srgbClr val="F5F6F8"/>
         </a:solidFill>
       </p:bgPr>
     </p:bg>
@@ -7939,11 +7939,11 @@
             <a:r>
               <a:rPr lang="en-US" sz="900" b="1" spc="400" kern="0" dirty="0">
                 <a:solidFill>
-                  <a:srgbClr val="D62828"/>
-                </a:solidFill>
-                <a:latin typeface="Arial" pitchFamily="34" charset="0"/>
-                <a:ea typeface="Arial" pitchFamily="34" charset="-122"/>
-                <a:cs typeface="Arial" pitchFamily="34" charset="-120"/>
+                  <a:srgbClr val="C8161D"/>
+                </a:solidFill>
+                <a:latin typeface="Arial" pitchFamily="34" charset="0"/>
+                <a:ea typeface="BIZ UDPGothic" pitchFamily="34" charset="-122"/>
+                <a:cs typeface="BIZ UDPGothic" pitchFamily="34" charset="-120"/>
               </a:rPr>
               <a:t>ECONOMIC IMPACT — BALANCE</a:t>
             </a:r>
@@ -7978,11 +7978,11 @@
             <a:r>
               <a:rPr lang="en-US" sz="2800" b="1" dirty="0">
                 <a:solidFill>
-                  <a:srgbClr val="F5F5F0"/>
-                </a:solidFill>
-                <a:latin typeface="Cambria" pitchFamily="34" charset="0"/>
-                <a:ea typeface="Cambria" pitchFamily="34" charset="-122"/>
-                <a:cs typeface="Cambria" pitchFamily="34" charset="-120"/>
+                  <a:srgbClr val="16181D"/>
+                </a:solidFill>
+                <a:latin typeface="BIZ UDPGothic" pitchFamily="34" charset="0"/>
+                <a:ea typeface="BIZ UDPGothic" pitchFamily="34" charset="-122"/>
+                <a:cs typeface="BIZ UDPGothic" pitchFamily="34" charset="-120"/>
               </a:rPr>
               <a:t>経済効果のバランス：正直な整理</a:t>
             </a:r>
@@ -8005,11 +8005,11 @@
             <a:avLst/>
           </a:prstGeom>
           <a:solidFill>
-            <a:srgbClr val="2E2E2E"/>
+            <a:srgbClr val="DDE0E6"/>
           </a:solidFill>
           <a:ln w="12700">
             <a:solidFill>
-              <a:srgbClr val="2E2E2E"/>
+              <a:srgbClr val="DDE0E6"/>
             </a:solidFill>
             <a:prstDash val="solid"/>
           </a:ln>
@@ -8042,11 +8042,11 @@
             <a:r>
               <a:rPr lang="en-US" sz="1100" dirty="0">
                 <a:solidFill>
-                  <a:srgbClr val="CCCCCC"/>
-                </a:solidFill>
-                <a:latin typeface="Arial" pitchFamily="34" charset="0"/>
-                <a:ea typeface="Arial" pitchFamily="34" charset="-122"/>
-                <a:cs typeface="Arial" pitchFamily="34" charset="-120"/>
+                  <a:srgbClr val="2B2F36"/>
+                </a:solidFill>
+                <a:latin typeface="Arial" pitchFamily="34" charset="0"/>
+                <a:ea typeface="BIZ UDPGothic" pitchFamily="34" charset="-122"/>
+                <a:cs typeface="BIZ UDPGothic" pitchFamily="34" charset="-120"/>
               </a:rPr>
               <a:t>マイナスとプラスの両方が存在する。どちらが大きいかは状況次第で、完全な答えは今の段階では出せない。</a:t>
             </a:r>
@@ -8071,11 +8071,11 @@
             </a:avLst>
           </a:prstGeom>
           <a:solidFill>
-            <a:srgbClr val="2E2E2E"/>
+            <a:srgbClr val="DDE0E6"/>
           </a:solidFill>
           <a:ln w="12700">
             <a:solidFill>
-              <a:srgbClr val="2E2E2E"/>
+              <a:srgbClr val="DDE0E6"/>
             </a:solidFill>
             <a:prstDash val="solid"/>
           </a:ln>
@@ -8098,11 +8098,11 @@
             </a:avLst>
           </a:prstGeom>
           <a:solidFill>
-            <a:srgbClr val="2E2E2E"/>
+            <a:srgbClr val="DDE0E6"/>
           </a:solidFill>
           <a:ln w="12700">
             <a:solidFill>
-              <a:srgbClr val="2E2E2E"/>
+              <a:srgbClr val="DDE0E6"/>
             </a:solidFill>
             <a:prstDash val="solid"/>
           </a:ln>
@@ -8135,11 +8135,11 @@
             <a:r>
               <a:rPr lang="en-US" sz="1100" b="1" dirty="0">
                 <a:solidFill>
-                  <a:srgbClr val="F5F5F0"/>
-                </a:solidFill>
-                <a:latin typeface="Cambria" pitchFamily="34" charset="0"/>
-                <a:ea typeface="Cambria" pitchFamily="34" charset="-122"/>
-                <a:cs typeface="Cambria" pitchFamily="34" charset="-120"/>
+                  <a:srgbClr val="16181D"/>
+                </a:solidFill>
+                <a:latin typeface="BIZ UDPGothic" pitchFamily="34" charset="0"/>
+                <a:ea typeface="BIZ UDPGothic" pitchFamily="34" charset="-122"/>
+                <a:cs typeface="BIZ UDPGothic" pitchFamily="34" charset="-120"/>
               </a:rPr>
               <a:t>保守的なシナリオ</a:t>
             </a:r>
@@ -8164,11 +8164,11 @@
             </a:avLst>
           </a:prstGeom>
           <a:solidFill>
-            <a:srgbClr val="2E2E2E"/>
+            <a:srgbClr val="DDE0E6"/>
           </a:solidFill>
           <a:ln w="12700">
             <a:solidFill>
-              <a:srgbClr val="2E2E2E"/>
+              <a:srgbClr val="DDE0E6"/>
             </a:solidFill>
             <a:prstDash val="solid"/>
           </a:ln>
@@ -8201,11 +8201,11 @@
             <a:r>
               <a:rPr lang="en-US" sz="1100" b="1" dirty="0">
                 <a:solidFill>
-                  <a:srgbClr val="F5F5F0"/>
-                </a:solidFill>
-                <a:latin typeface="Cambria" pitchFamily="34" charset="0"/>
-                <a:ea typeface="Cambria" pitchFamily="34" charset="-122"/>
-                <a:cs typeface="Cambria" pitchFamily="34" charset="-120"/>
+                  <a:srgbClr val="16181D"/>
+                </a:solidFill>
+                <a:latin typeface="BIZ UDPGothic" pitchFamily="34" charset="0"/>
+                <a:ea typeface="BIZ UDPGothic" pitchFamily="34" charset="-122"/>
+                <a:cs typeface="BIZ UDPGothic" pitchFamily="34" charset="-120"/>
               </a:rPr>
               <a:t>楽観的なシナリオ</a:t>
             </a:r>
@@ -8230,11 +8230,11 @@
             </a:avLst>
           </a:prstGeom>
           <a:solidFill>
-            <a:srgbClr val="1A1A1A"/>
+            <a:srgbClr val="FFFFFF"/>
           </a:solidFill>
           <a:ln w="12700">
             <a:solidFill>
-              <a:srgbClr val="2E2E2E"/>
+              <a:srgbClr val="DDE0E6"/>
             </a:solidFill>
             <a:prstDash val="solid"/>
           </a:ln>
@@ -8267,11 +8267,11 @@
             <a:r>
               <a:rPr lang="en-US" sz="1000" dirty="0">
                 <a:solidFill>
-                  <a:srgbClr val="F5F5F0"/>
-                </a:solidFill>
-                <a:latin typeface="Arial" pitchFamily="34" charset="0"/>
-                <a:ea typeface="Arial" pitchFamily="34" charset="-122"/>
-                <a:cs typeface="Arial" pitchFamily="34" charset="-120"/>
+                  <a:srgbClr val="16181D"/>
+                </a:solidFill>
+                <a:latin typeface="Arial" pitchFamily="34" charset="0"/>
+                <a:ea typeface="BIZ UDPGothic" pitchFamily="34" charset="-122"/>
+                <a:cs typeface="BIZ UDPGothic" pitchFamily="34" charset="-120"/>
               </a:rPr>
               <a:t>新しいマンションの供給</a:t>
             </a:r>
@@ -8296,11 +8296,11 @@
             </a:avLst>
           </a:prstGeom>
           <a:solidFill>
-            <a:srgbClr val="141414"/>
+            <a:srgbClr val="FFFFFF"/>
           </a:solidFill>
           <a:ln w="12700">
             <a:solidFill>
-              <a:srgbClr val="2E2E2E"/>
+              <a:srgbClr val="DDE0E6"/>
             </a:solidFill>
             <a:prstDash val="solid"/>
           </a:ln>
@@ -8333,11 +8333,11 @@
             <a:r>
               <a:rPr lang="en-US" sz="1000" dirty="0">
                 <a:solidFill>
-                  <a:srgbClr val="CCCCCC"/>
-                </a:solidFill>
-                <a:latin typeface="Arial" pitchFamily="34" charset="0"/>
-                <a:ea typeface="Arial" pitchFamily="34" charset="-122"/>
-                <a:cs typeface="Arial" pitchFamily="34" charset="-120"/>
+                  <a:srgbClr val="2B2F36"/>
+                </a:solidFill>
+                <a:latin typeface="Arial" pitchFamily="34" charset="0"/>
+                <a:ea typeface="BIZ UDPGothic" pitchFamily="34" charset="-122"/>
+                <a:cs typeface="BIZ UDPGothic" pitchFamily="34" charset="-120"/>
               </a:rPr>
               <a:t>都心高額帯で1〜2割減（全体では△1.5〜3%）</a:t>
             </a:r>
@@ -8362,11 +8362,11 @@
             </a:avLst>
           </a:prstGeom>
           <a:solidFill>
-            <a:srgbClr val="081808"/>
+            <a:srgbClr val="E9EFF8"/>
           </a:solidFill>
           <a:ln w="12700">
             <a:solidFill>
-              <a:srgbClr val="2E2E2E"/>
+              <a:srgbClr val="DDE0E6"/>
             </a:solidFill>
             <a:prstDash val="solid"/>
           </a:ln>
@@ -8399,11 +8399,11 @@
             <a:r>
               <a:rPr lang="en-US" sz="1000" dirty="0">
                 <a:solidFill>
-                  <a:srgbClr val="CCCCCC"/>
-                </a:solidFill>
-                <a:latin typeface="Arial" pitchFamily="34" charset="0"/>
-                <a:ea typeface="Arial" pitchFamily="34" charset="-122"/>
-                <a:cs typeface="Arial" pitchFamily="34" charset="-120"/>
+                  <a:srgbClr val="2B2F36"/>
+                </a:solidFill>
+                <a:latin typeface="Arial" pitchFamily="34" charset="0"/>
+                <a:ea typeface="BIZ UDPGothic" pitchFamily="34" charset="-122"/>
+                <a:cs typeface="BIZ UDPGothic" pitchFamily="34" charset="-120"/>
               </a:rPr>
               <a:t>ほぼ誤差の範囲</a:t>
             </a:r>
@@ -8428,11 +8428,11 @@
             </a:avLst>
           </a:prstGeom>
           <a:solidFill>
-            <a:srgbClr val="1A1A1A"/>
+            <a:srgbClr val="FFFFFF"/>
           </a:solidFill>
           <a:ln w="12700">
             <a:solidFill>
-              <a:srgbClr val="2E2E2E"/>
+              <a:srgbClr val="DDE0E6"/>
             </a:solidFill>
             <a:prstDash val="solid"/>
           </a:ln>
@@ -8465,11 +8465,11 @@
             <a:r>
               <a:rPr lang="en-US" sz="1000" dirty="0">
                 <a:solidFill>
-                  <a:srgbClr val="F5F5F0"/>
-                </a:solidFill>
-                <a:latin typeface="Arial" pitchFamily="34" charset="0"/>
-                <a:ea typeface="Arial" pitchFamily="34" charset="-122"/>
-                <a:cs typeface="Arial" pitchFamily="34" charset="-120"/>
+                  <a:srgbClr val="16181D"/>
+                </a:solidFill>
+                <a:latin typeface="Arial" pitchFamily="34" charset="0"/>
+                <a:ea typeface="BIZ UDPGothic" pitchFamily="34" charset="-122"/>
+                <a:cs typeface="BIZ UDPGothic" pitchFamily="34" charset="-120"/>
               </a:rPr>
               <a:t>マンション価格への影響</a:t>
             </a:r>
@@ -8494,11 +8494,11 @@
             </a:avLst>
           </a:prstGeom>
           <a:solidFill>
-            <a:srgbClr val="141414"/>
+            <a:srgbClr val="FFFFFF"/>
           </a:solidFill>
           <a:ln w="12700">
             <a:solidFill>
-              <a:srgbClr val="2E2E2E"/>
+              <a:srgbClr val="DDE0E6"/>
             </a:solidFill>
             <a:prstDash val="solid"/>
           </a:ln>
@@ -8531,11 +8531,11 @@
             <a:r>
               <a:rPr lang="en-US" sz="1000" dirty="0">
                 <a:solidFill>
-                  <a:srgbClr val="CCCCCC"/>
-                </a:solidFill>
-                <a:latin typeface="Arial" pitchFamily="34" charset="0"/>
-                <a:ea typeface="Arial" pitchFamily="34" charset="-122"/>
-                <a:cs typeface="Arial" pitchFamily="34" charset="-120"/>
+                  <a:srgbClr val="2B2F36"/>
+                </a:solidFill>
+                <a:latin typeface="Arial" pitchFamily="34" charset="0"/>
+                <a:ea typeface="BIZ UDPGothic" pitchFamily="34" charset="-122"/>
+                <a:cs typeface="BIZ UDPGothic" pitchFamily="34" charset="-120"/>
               </a:rPr>
               <a:t>都心高額帯の上昇が年1〜2%ポイント鈍化</a:t>
             </a:r>
@@ -8560,11 +8560,11 @@
             </a:avLst>
           </a:prstGeom>
           <a:solidFill>
-            <a:srgbClr val="081808"/>
+            <a:srgbClr val="E9EFF8"/>
           </a:solidFill>
           <a:ln w="12700">
             <a:solidFill>
-              <a:srgbClr val="2E2E2E"/>
+              <a:srgbClr val="DDE0E6"/>
             </a:solidFill>
             <a:prstDash val="solid"/>
           </a:ln>
@@ -8597,11 +8597,11 @@
             <a:r>
               <a:rPr lang="en-US" sz="1000" dirty="0">
                 <a:solidFill>
-                  <a:srgbClr val="CCCCCC"/>
-                </a:solidFill>
-                <a:latin typeface="Arial" pitchFamily="34" charset="0"/>
-                <a:ea typeface="Arial" pitchFamily="34" charset="-122"/>
-                <a:cs typeface="Arial" pitchFamily="34" charset="-120"/>
+                  <a:srgbClr val="2B2F36"/>
+                </a:solidFill>
+                <a:latin typeface="Arial" pitchFamily="34" charset="0"/>
+                <a:ea typeface="BIZ UDPGothic" pitchFamily="34" charset="-122"/>
+                <a:cs typeface="BIZ UDPGothic" pitchFamily="34" charset="-120"/>
               </a:rPr>
               <a:t>都心高額帯で5〜10%の価格下落</a:t>
             </a:r>
@@ -8626,11 +8626,11 @@
             </a:avLst>
           </a:prstGeom>
           <a:solidFill>
-            <a:srgbClr val="1A1A1A"/>
+            <a:srgbClr val="FFFFFF"/>
           </a:solidFill>
           <a:ln w="12700">
             <a:solidFill>
-              <a:srgbClr val="2E2E2E"/>
+              <a:srgbClr val="DDE0E6"/>
             </a:solidFill>
             <a:prstDash val="solid"/>
           </a:ln>
@@ -8663,11 +8663,11 @@
             <a:r>
               <a:rPr lang="en-US" sz="1000" dirty="0">
                 <a:solidFill>
-                  <a:srgbClr val="F5F5F0"/>
-                </a:solidFill>
-                <a:latin typeface="Arial" pitchFamily="34" charset="0"/>
-                <a:ea typeface="Arial" pitchFamily="34" charset="-122"/>
-                <a:cs typeface="Arial" pitchFamily="34" charset="-120"/>
+                  <a:srgbClr val="16181D"/>
+                </a:solidFill>
+                <a:latin typeface="Arial" pitchFamily="34" charset="0"/>
+                <a:ea typeface="BIZ UDPGothic" pitchFamily="34" charset="-122"/>
+                <a:cs typeface="BIZ UDPGothic" pitchFamily="34" charset="-120"/>
               </a:rPr>
               <a:t>日本人の買いやすさ</a:t>
             </a:r>
@@ -8692,11 +8692,11 @@
             </a:avLst>
           </a:prstGeom>
           <a:solidFill>
-            <a:srgbClr val="141414"/>
+            <a:srgbClr val="FFFFFF"/>
           </a:solidFill>
           <a:ln w="12700">
             <a:solidFill>
-              <a:srgbClr val="2E2E2E"/>
+              <a:srgbClr val="DDE0E6"/>
             </a:solidFill>
             <a:prstDash val="solid"/>
           </a:ln>
@@ -8729,11 +8729,11 @@
             <a:r>
               <a:rPr lang="en-US" sz="1000" dirty="0">
                 <a:solidFill>
-                  <a:srgbClr val="CCCCCC"/>
-                </a:solidFill>
-                <a:latin typeface="Arial" pitchFamily="34" charset="0"/>
-                <a:ea typeface="Arial" pitchFamily="34" charset="-122"/>
-                <a:cs typeface="Arial" pitchFamily="34" charset="-120"/>
+                  <a:srgbClr val="2B2F36"/>
+                </a:solidFill>
+                <a:latin typeface="Arial" pitchFamily="34" charset="0"/>
+                <a:ea typeface="BIZ UDPGothic" pitchFamily="34" charset="-122"/>
+                <a:cs typeface="BIZ UDPGothic" pitchFamily="34" charset="-120"/>
               </a:rPr>
               <a:t>高額帯で少し改善</a:t>
             </a:r>
@@ -8758,11 +8758,11 @@
             </a:avLst>
           </a:prstGeom>
           <a:solidFill>
-            <a:srgbClr val="081808"/>
+            <a:srgbClr val="E9EFF8"/>
           </a:solidFill>
           <a:ln w="12700">
             <a:solidFill>
-              <a:srgbClr val="2E2E2E"/>
+              <a:srgbClr val="DDE0E6"/>
             </a:solidFill>
             <a:prstDash val="solid"/>
           </a:ln>
@@ -8795,11 +8795,11 @@
             <a:r>
               <a:rPr lang="en-US" sz="1000" dirty="0">
                 <a:solidFill>
-                  <a:srgbClr val="CCCCCC"/>
-                </a:solidFill>
-                <a:latin typeface="Arial" pitchFamily="34" charset="0"/>
-                <a:ea typeface="Arial" pitchFamily="34" charset="-122"/>
-                <a:cs typeface="Arial" pitchFamily="34" charset="-120"/>
+                  <a:srgbClr val="2B2F36"/>
+                </a:solidFill>
+                <a:latin typeface="Arial" pitchFamily="34" charset="0"/>
+                <a:ea typeface="BIZ UDPGothic" pitchFamily="34" charset="-122"/>
+                <a:cs typeface="BIZ UDPGothic" pitchFamily="34" charset="-120"/>
               </a:rPr>
               <a:t>都心高額帯で明確に改善。一般層にも一部波及</a:t>
             </a:r>
@@ -8824,11 +8824,11 @@
             </a:avLst>
           </a:prstGeom>
           <a:solidFill>
-            <a:srgbClr val="1A1408"/>
+            <a:srgbClr val="FFF4DB"/>
           </a:solidFill>
           <a:ln w="12700">
             <a:solidFill>
-              <a:srgbClr val="2E2E2E"/>
+              <a:srgbClr val="DDE0E6"/>
             </a:solidFill>
             <a:prstDash val="solid"/>
           </a:ln>
@@ -8861,11 +8861,11 @@
             <a:r>
               <a:rPr lang="en-US" sz="900" dirty="0">
                 <a:solidFill>
-                  <a:srgbClr val="E0A000"/>
-                </a:solidFill>
-                <a:latin typeface="Arial" pitchFamily="34" charset="0"/>
-                <a:ea typeface="Arial" pitchFamily="34" charset="-122"/>
-                <a:cs typeface="Arial" pitchFamily="34" charset="-120"/>
+                  <a:srgbClr val="9A6200"/>
+                </a:solidFill>
+                <a:latin typeface="Arial" pitchFamily="34" charset="0"/>
+                <a:ea typeface="BIZ UDPGothic" pitchFamily="34" charset="-122"/>
+                <a:cs typeface="BIZ UDPGothic" pitchFamily="34" charset="-120"/>
               </a:rPr>
               <a:t>データの制限：外国人取得割合の公的統計は2025年に整備が始まったばかり。試算の精度には限界がある。</a:t>
             </a:r>
@@ -8887,7 +8887,7 @@
     <p:bg>
       <p:bgPr>
         <a:solidFill>
-          <a:srgbClr val="0A0A0A"/>
+          <a:srgbClr val="F5F6F8"/>
         </a:solidFill>
       </p:bgPr>
     </p:bg>
@@ -8932,11 +8932,11 @@
             <a:r>
               <a:rPr lang="en-US" sz="900" b="1" spc="400" kern="0" dirty="0">
                 <a:solidFill>
-                  <a:srgbClr val="D62828"/>
-                </a:solidFill>
-                <a:latin typeface="Arial" pitchFamily="34" charset="0"/>
-                <a:ea typeface="Arial" pitchFamily="34" charset="-122"/>
-                <a:cs typeface="Arial" pitchFamily="34" charset="-120"/>
+                  <a:srgbClr val="C8161D"/>
+                </a:solidFill>
+                <a:latin typeface="Arial" pitchFamily="34" charset="0"/>
+                <a:ea typeface="BIZ UDPGothic" pitchFamily="34" charset="-122"/>
+                <a:cs typeface="BIZ UDPGothic" pitchFamily="34" charset="-120"/>
               </a:rPr>
               <a:t>PROBLEM</a:t>
             </a:r>
@@ -8971,11 +8971,11 @@
             <a:r>
               <a:rPr lang="en-US" sz="2800" b="1" dirty="0">
                 <a:solidFill>
-                  <a:srgbClr val="F5F5F0"/>
-                </a:solidFill>
-                <a:latin typeface="Cambria" pitchFamily="34" charset="0"/>
-                <a:ea typeface="Cambria" pitchFamily="34" charset="-122"/>
-                <a:cs typeface="Cambria" pitchFamily="34" charset="-120"/>
+                  <a:srgbClr val="16181D"/>
+                </a:solidFill>
+                <a:latin typeface="BIZ UDPGothic" pitchFamily="34" charset="0"/>
+                <a:ea typeface="BIZ UDPGothic" pitchFamily="34" charset="-122"/>
+                <a:cs typeface="BIZ UDPGothic" pitchFamily="34" charset="-120"/>
               </a:rPr>
               <a:t>なぜ今、この問題なのか？</a:t>
             </a:r>
@@ -8998,11 +8998,11 @@
             <a:avLst/>
           </a:prstGeom>
           <a:solidFill>
-            <a:srgbClr val="2E2E2E"/>
+            <a:srgbClr val="DDE0E6"/>
           </a:solidFill>
           <a:ln w="12700">
             <a:solidFill>
-              <a:srgbClr val="2E2E2E"/>
+              <a:srgbClr val="DDE0E6"/>
             </a:solidFill>
             <a:prstDash val="solid"/>
           </a:ln>
@@ -9035,11 +9035,11 @@
             <a:r>
               <a:rPr lang="en-US" sz="1100" dirty="0">
                 <a:solidFill>
-                  <a:srgbClr val="CCCCCC"/>
-                </a:solidFill>
-                <a:latin typeface="Arial" pitchFamily="34" charset="0"/>
-                <a:ea typeface="Arial" pitchFamily="34" charset="-122"/>
-                <a:cs typeface="Arial" pitchFamily="34" charset="-120"/>
+                  <a:srgbClr val="2B2F36"/>
+                </a:solidFill>
+                <a:latin typeface="Arial" pitchFamily="34" charset="0"/>
+                <a:ea typeface="BIZ UDPGothic" pitchFamily="34" charset="-122"/>
+                <a:cs typeface="BIZ UDPGothic" pitchFamily="34" charset="-120"/>
               </a:rPr>
               <a:t>日本は世界でも珍しい「外国人でも土地を自由に買える国」。この仕組みが3つの大きな問題を起こしている。</a:t>
             </a:r>
@@ -9064,11 +9064,11 @@
             </a:avLst>
           </a:prstGeom>
           <a:solidFill>
-            <a:srgbClr val="1A1A1A"/>
+            <a:srgbClr val="FFFFFF"/>
           </a:solidFill>
           <a:ln w="12700">
             <a:solidFill>
-              <a:srgbClr val="2E2E2E"/>
+              <a:srgbClr val="DDE0E6"/>
             </a:solidFill>
             <a:prstDash val="solid"/>
           </a:ln>
@@ -9101,11 +9101,11 @@
             <a:r>
               <a:rPr lang="en-US" sz="2000" b="1" dirty="0">
                 <a:solidFill>
-                  <a:srgbClr val="D62828"/>
-                </a:solidFill>
-                <a:latin typeface="Cambria" pitchFamily="34" charset="0"/>
-                <a:ea typeface="Cambria" pitchFamily="34" charset="-122"/>
-                <a:cs typeface="Cambria" pitchFamily="34" charset="-120"/>
+                  <a:srgbClr val="C8161D"/>
+                </a:solidFill>
+                <a:latin typeface="BIZ UDPGothic" pitchFamily="34" charset="0"/>
+                <a:ea typeface="BIZ UDPGothic" pitchFamily="34" charset="-122"/>
+                <a:cs typeface="BIZ UDPGothic" pitchFamily="34" charset="-120"/>
               </a:rPr>
               <a:t>01</a:t>
             </a:r>
@@ -9128,11 +9128,11 @@
             <a:avLst/>
           </a:prstGeom>
           <a:solidFill>
-            <a:srgbClr val="2E2E2E"/>
+            <a:srgbClr val="DDE0E6"/>
           </a:solidFill>
           <a:ln w="12700">
             <a:solidFill>
-              <a:srgbClr val="2E2E2E"/>
+              <a:srgbClr val="DDE0E6"/>
             </a:solidFill>
             <a:prstDash val="solid"/>
           </a:ln>
@@ -9165,11 +9165,11 @@
             <a:r>
               <a:rPr lang="en-US" sz="1300" b="1" dirty="0">
                 <a:solidFill>
-                  <a:srgbClr val="F5F5F0"/>
-                </a:solidFill>
-                <a:latin typeface="Cambria" pitchFamily="34" charset="0"/>
-                <a:ea typeface="Cambria" pitchFamily="34" charset="-122"/>
-                <a:cs typeface="Cambria" pitchFamily="34" charset="-120"/>
+                  <a:srgbClr val="16181D"/>
+                </a:solidFill>
+                <a:latin typeface="BIZ UDPGothic" pitchFamily="34" charset="0"/>
+                <a:ea typeface="BIZ UDPGothic" pitchFamily="34" charset="-122"/>
+                <a:cs typeface="BIZ UDPGothic" pitchFamily="34" charset="-120"/>
               </a:rPr>
               <a:t>安全保障のリスク</a:t>
             </a:r>
@@ -9204,11 +9204,11 @@
             <a:r>
               <a:rPr lang="en-US" sz="1000" dirty="0">
                 <a:solidFill>
-                  <a:srgbClr val="CCCCCC"/>
-                </a:solidFill>
-                <a:latin typeface="Arial" pitchFamily="34" charset="0"/>
-                <a:ea typeface="Arial" pitchFamily="34" charset="-122"/>
-                <a:cs typeface="Arial" pitchFamily="34" charset="-120"/>
+                  <a:srgbClr val="2B2F36"/>
+                </a:solidFill>
+                <a:latin typeface="Arial" pitchFamily="34" charset="0"/>
+                <a:ea typeface="BIZ UDPGothic" pitchFamily="34" charset="-122"/>
+                <a:cs typeface="BIZ UDPGothic" pitchFamily="34" charset="-120"/>
               </a:rPr>
               <a:t>水源地や国境に近い島の土地が外国資本に買われている。実質的に外国が支配する土地が増えると、日本の主権そのものが脅かされる</a:t>
             </a:r>
@@ -9233,11 +9233,11 @@
             </a:avLst>
           </a:prstGeom>
           <a:solidFill>
-            <a:srgbClr val="1A1A1A"/>
+            <a:srgbClr val="FFFFFF"/>
           </a:solidFill>
           <a:ln w="12700">
             <a:solidFill>
-              <a:srgbClr val="2E2E2E"/>
+              <a:srgbClr val="DDE0E6"/>
             </a:solidFill>
             <a:prstDash val="solid"/>
           </a:ln>
@@ -9270,11 +9270,11 @@
             <a:r>
               <a:rPr lang="en-US" sz="2000" b="1" dirty="0">
                 <a:solidFill>
-                  <a:srgbClr val="D62828"/>
-                </a:solidFill>
-                <a:latin typeface="Cambria" pitchFamily="34" charset="0"/>
-                <a:ea typeface="Cambria" pitchFamily="34" charset="-122"/>
-                <a:cs typeface="Cambria" pitchFamily="34" charset="-120"/>
+                  <a:srgbClr val="C8161D"/>
+                </a:solidFill>
+                <a:latin typeface="BIZ UDPGothic" pitchFamily="34" charset="0"/>
+                <a:ea typeface="BIZ UDPGothic" pitchFamily="34" charset="-122"/>
+                <a:cs typeface="BIZ UDPGothic" pitchFamily="34" charset="-120"/>
               </a:rPr>
               <a:t>02</a:t>
             </a:r>
@@ -9297,11 +9297,11 @@
             <a:avLst/>
           </a:prstGeom>
           <a:solidFill>
-            <a:srgbClr val="2E2E2E"/>
+            <a:srgbClr val="DDE0E6"/>
           </a:solidFill>
           <a:ln w="12700">
             <a:solidFill>
-              <a:srgbClr val="2E2E2E"/>
+              <a:srgbClr val="DDE0E6"/>
             </a:solidFill>
             <a:prstDash val="solid"/>
           </a:ln>
@@ -9334,11 +9334,11 @@
             <a:r>
               <a:rPr lang="en-US" sz="1300" b="1" dirty="0">
                 <a:solidFill>
-                  <a:srgbClr val="F5F5F0"/>
-                </a:solidFill>
-                <a:latin typeface="Cambria" pitchFamily="34" charset="0"/>
-                <a:ea typeface="Cambria" pitchFamily="34" charset="-122"/>
-                <a:cs typeface="Cambria" pitchFamily="34" charset="-120"/>
+                  <a:srgbClr val="16181D"/>
+                </a:solidFill>
+                <a:latin typeface="BIZ UDPGothic" pitchFamily="34" charset="0"/>
+                <a:ea typeface="BIZ UDPGothic" pitchFamily="34" charset="-122"/>
+                <a:cs typeface="BIZ UDPGothic" pitchFamily="34" charset="-120"/>
               </a:rPr>
               <a:t>住宅価格が上がって日本人が買えない</a:t>
             </a:r>
@@ -9373,11 +9373,11 @@
             <a:r>
               <a:rPr lang="en-US" sz="1000" dirty="0">
                 <a:solidFill>
-                  <a:srgbClr val="CCCCCC"/>
-                </a:solidFill>
-                <a:latin typeface="Arial" pitchFamily="34" charset="0"/>
-                <a:ea typeface="Arial" pitchFamily="34" charset="-122"/>
-                <a:cs typeface="Arial" pitchFamily="34" charset="-120"/>
+                  <a:srgbClr val="2B2F36"/>
+                </a:solidFill>
+                <a:latin typeface="Arial" pitchFamily="34" charset="0"/>
+                <a:ea typeface="BIZ UDPGothic" pitchFamily="34" charset="-122"/>
+                <a:cs typeface="BIZ UDPGothic" pitchFamily="34" charset="-120"/>
               </a:rPr>
               <a:t>都心の高級マンションは購入者の2〜4割が外国人という調査もある。投資目的の外国マネーが価格を押し上げ、普通の日本人が家を買いにくくなっている</a:t>
             </a:r>
@@ -9402,11 +9402,11 @@
             </a:avLst>
           </a:prstGeom>
           <a:solidFill>
-            <a:srgbClr val="1A1A1A"/>
+            <a:srgbClr val="FFFFFF"/>
           </a:solidFill>
           <a:ln w="12700">
             <a:solidFill>
-              <a:srgbClr val="2E2E2E"/>
+              <a:srgbClr val="DDE0E6"/>
             </a:solidFill>
             <a:prstDash val="solid"/>
           </a:ln>
@@ -9439,11 +9439,11 @@
             <a:r>
               <a:rPr lang="en-US" sz="2000" b="1" dirty="0">
                 <a:solidFill>
-                  <a:srgbClr val="D62828"/>
-                </a:solidFill>
-                <a:latin typeface="Cambria" pitchFamily="34" charset="0"/>
-                <a:ea typeface="Cambria" pitchFamily="34" charset="-122"/>
-                <a:cs typeface="Cambria" pitchFamily="34" charset="-120"/>
+                  <a:srgbClr val="C8161D"/>
+                </a:solidFill>
+                <a:latin typeface="BIZ UDPGothic" pitchFamily="34" charset="0"/>
+                <a:ea typeface="BIZ UDPGothic" pitchFamily="34" charset="-122"/>
+                <a:cs typeface="BIZ UDPGothic" pitchFamily="34" charset="-120"/>
               </a:rPr>
               <a:t>03</a:t>
             </a:r>
@@ -9466,11 +9466,11 @@
             <a:avLst/>
           </a:prstGeom>
           <a:solidFill>
-            <a:srgbClr val="2E2E2E"/>
+            <a:srgbClr val="DDE0E6"/>
           </a:solidFill>
           <a:ln w="12700">
             <a:solidFill>
-              <a:srgbClr val="2E2E2E"/>
+              <a:srgbClr val="DDE0E6"/>
             </a:solidFill>
             <a:prstDash val="solid"/>
           </a:ln>
@@ -9503,11 +9503,11 @@
             <a:r>
               <a:rPr lang="en-US" sz="1300" b="1" dirty="0">
                 <a:solidFill>
-                  <a:srgbClr val="F5F5F0"/>
-                </a:solidFill>
-                <a:latin typeface="Cambria" pitchFamily="34" charset="0"/>
-                <a:ea typeface="Cambria" pitchFamily="34" charset="-122"/>
-                <a:cs typeface="Cambria" pitchFamily="34" charset="-120"/>
+                  <a:srgbClr val="16181D"/>
+                </a:solidFill>
+                <a:latin typeface="BIZ UDPGothic" pitchFamily="34" charset="0"/>
+                <a:ea typeface="BIZ UDPGothic" pitchFamily="34" charset="-122"/>
+                <a:cs typeface="BIZ UDPGothic" pitchFamily="34" charset="-120"/>
               </a:rPr>
               <a:t>今の法律では守れない</a:t>
             </a:r>
@@ -9542,11 +9542,11 @@
             <a:r>
               <a:rPr lang="en-US" sz="1000" dirty="0">
                 <a:solidFill>
-                  <a:srgbClr val="CCCCCC"/>
-                </a:solidFill>
-                <a:latin typeface="Arial" pitchFamily="34" charset="0"/>
-                <a:ea typeface="Arial" pitchFamily="34" charset="-122"/>
-                <a:cs typeface="Arial" pitchFamily="34" charset="-120"/>
+                  <a:srgbClr val="2B2F36"/>
+                </a:solidFill>
+                <a:latin typeface="Arial" pitchFamily="34" charset="0"/>
+                <a:ea typeface="BIZ UDPGothic" pitchFamily="34" charset="-122"/>
+                <a:cs typeface="BIZ UDPGothic" pitchFamily="34" charset="-120"/>
               </a:rPr>
               <a:t>2022年に「重要土地等規制法」ができたが、調査はできても購入そのものを止める力がない。ザルのような状態が続いている</a:t>
             </a:r>
@@ -9568,7 +9568,7 @@
     <p:bg>
       <p:bgPr>
         <a:solidFill>
-          <a:srgbClr val="0A0A0A"/>
+          <a:srgbClr val="F5F6F8"/>
         </a:solidFill>
       </p:bgPr>
     </p:bg>
@@ -9613,11 +9613,11 @@
             <a:r>
               <a:rPr lang="en-US" sz="900" b="1" spc="400" kern="0" dirty="0">
                 <a:solidFill>
-                  <a:srgbClr val="D62828"/>
-                </a:solidFill>
-                <a:latin typeface="Arial" pitchFamily="34" charset="0"/>
-                <a:ea typeface="Arial" pitchFamily="34" charset="-122"/>
-                <a:cs typeface="Arial" pitchFamily="34" charset="-120"/>
+                  <a:srgbClr val="C8161D"/>
+                </a:solidFill>
+                <a:latin typeface="Arial" pitchFamily="34" charset="0"/>
+                <a:ea typeface="BIZ UDPGothic" pitchFamily="34" charset="-122"/>
+                <a:cs typeface="BIZ UDPGothic" pitchFamily="34" charset="-120"/>
               </a:rPr>
               <a:t>OUTCOME</a:t>
             </a:r>
@@ -9652,11 +9652,11 @@
             <a:r>
               <a:rPr lang="en-US" sz="2800" b="1" dirty="0">
                 <a:solidFill>
-                  <a:srgbClr val="F5F5F0"/>
-                </a:solidFill>
-                <a:latin typeface="Cambria" pitchFamily="34" charset="0"/>
-                <a:ea typeface="Cambria" pitchFamily="34" charset="-122"/>
-                <a:cs typeface="Cambria" pitchFamily="34" charset="-120"/>
+                  <a:srgbClr val="16181D"/>
+                </a:solidFill>
+                <a:latin typeface="BIZ UDPGothic" pitchFamily="34" charset="0"/>
+                <a:ea typeface="BIZ UDPGothic" pitchFamily="34" charset="-122"/>
+                <a:cs typeface="BIZ UDPGothic" pitchFamily="34" charset="-120"/>
               </a:rPr>
               <a:t>この提言で何が変わるか：3つの効果</a:t>
             </a:r>
@@ -9679,11 +9679,11 @@
             <a:avLst/>
           </a:prstGeom>
           <a:solidFill>
-            <a:srgbClr val="2E2E2E"/>
+            <a:srgbClr val="DDE0E6"/>
           </a:solidFill>
           <a:ln w="12700">
             <a:solidFill>
-              <a:srgbClr val="2E2E2E"/>
+              <a:srgbClr val="DDE0E6"/>
             </a:solidFill>
             <a:prstDash val="solid"/>
           </a:ln>
@@ -9706,11 +9706,11 @@
             </a:avLst>
           </a:prstGeom>
           <a:solidFill>
-            <a:srgbClr val="1A1A1A"/>
+            <a:srgbClr val="FFFFFF"/>
           </a:solidFill>
           <a:ln w="12700">
             <a:solidFill>
-              <a:srgbClr val="2E2E2E"/>
+              <a:srgbClr val="DDE0E6"/>
             </a:solidFill>
             <a:prstDash val="solid"/>
           </a:ln>
@@ -9733,11 +9733,11 @@
             </a:avLst>
           </a:prstGeom>
           <a:solidFill>
-            <a:srgbClr val="D62828"/>
+            <a:srgbClr val="C8161D"/>
           </a:solidFill>
           <a:ln w="12700">
             <a:solidFill>
-              <a:srgbClr val="D62828"/>
+              <a:srgbClr val="C8161D"/>
             </a:solidFill>
             <a:prstDash val="solid"/>
           </a:ln>
@@ -9770,11 +9770,11 @@
             <a:r>
               <a:rPr lang="en-US" sz="1800" b="1" dirty="0">
                 <a:solidFill>
-                  <a:srgbClr val="F5F5F0"/>
-                </a:solidFill>
-                <a:latin typeface="Arial" pitchFamily="34" charset="0"/>
-                <a:ea typeface="Arial" pitchFamily="34" charset="-122"/>
-                <a:cs typeface="Arial" pitchFamily="34" charset="-120"/>
+                  <a:srgbClr val="FFFFFF"/>
+                </a:solidFill>
+                <a:latin typeface="Arial" pitchFamily="34" charset="0"/>
+                <a:ea typeface="BIZ UDPGothic" pitchFamily="34" charset="-122"/>
+                <a:cs typeface="BIZ UDPGothic" pitchFamily="34" charset="-120"/>
               </a:rPr>
               <a:t>①</a:t>
             </a:r>
@@ -9809,11 +9809,11 @@
             <a:r>
               <a:rPr lang="en-US" sz="1400" b="1" dirty="0">
                 <a:solidFill>
-                  <a:srgbClr val="D62828"/>
-                </a:solidFill>
-                <a:latin typeface="Cambria" pitchFamily="34" charset="0"/>
-                <a:ea typeface="Cambria" pitchFamily="34" charset="-122"/>
-                <a:cs typeface="Cambria" pitchFamily="34" charset="-120"/>
+                  <a:srgbClr val="C8161D"/>
+                </a:solidFill>
+                <a:latin typeface="BIZ UDPGothic" pitchFamily="34" charset="0"/>
+                <a:ea typeface="BIZ UDPGothic" pitchFamily="34" charset="-122"/>
+                <a:cs typeface="BIZ UDPGothic" pitchFamily="34" charset="-120"/>
               </a:rPr>
               <a:t>国土の安全を守る</a:t>
             </a:r>
@@ -9848,11 +9848,11 @@
             <a:r>
               <a:rPr lang="en-US" sz="1000" dirty="0">
                 <a:solidFill>
-                  <a:srgbClr val="CCCCCC"/>
-                </a:solidFill>
-                <a:latin typeface="Arial" pitchFamily="34" charset="0"/>
-                <a:ea typeface="Arial" pitchFamily="34" charset="-122"/>
-                <a:cs typeface="Arial" pitchFamily="34" charset="-120"/>
+                  <a:srgbClr val="2B2F36"/>
+                </a:solidFill>
+                <a:latin typeface="Arial" pitchFamily="34" charset="0"/>
+                <a:ea typeface="BIZ UDPGothic" pitchFamily="34" charset="-122"/>
+                <a:cs typeface="BIZ UDPGothic" pitchFamily="34" charset="-120"/>
               </a:rPr>
               <a:t>水源地・国境離島・防衛施設周辺など、国家の安全に関わる土地を外国資本から守る。「日本の土地は日本が管理する」という当たり前の原則を制度として確立する。</a:t>
             </a:r>
@@ -9877,11 +9877,11 @@
             </a:avLst>
           </a:prstGeom>
           <a:solidFill>
-            <a:srgbClr val="1A1A1A"/>
+            <a:srgbClr val="FFFFFF"/>
           </a:solidFill>
           <a:ln w="12700">
             <a:solidFill>
-              <a:srgbClr val="2E2E2E"/>
+              <a:srgbClr val="DDE0E6"/>
             </a:solidFill>
             <a:prstDash val="solid"/>
           </a:ln>
@@ -9904,11 +9904,11 @@
             </a:avLst>
           </a:prstGeom>
           <a:solidFill>
-            <a:srgbClr val="D62828"/>
+            <a:srgbClr val="C8161D"/>
           </a:solidFill>
           <a:ln w="12700">
             <a:solidFill>
-              <a:srgbClr val="D62828"/>
+              <a:srgbClr val="C8161D"/>
             </a:solidFill>
             <a:prstDash val="solid"/>
           </a:ln>
@@ -9941,11 +9941,11 @@
             <a:r>
               <a:rPr lang="en-US" sz="1800" b="1" dirty="0">
                 <a:solidFill>
-                  <a:srgbClr val="F5F5F0"/>
-                </a:solidFill>
-                <a:latin typeface="Arial" pitchFamily="34" charset="0"/>
-                <a:ea typeface="Arial" pitchFamily="34" charset="-122"/>
-                <a:cs typeface="Arial" pitchFamily="34" charset="-120"/>
+                  <a:srgbClr val="FFFFFF"/>
+                </a:solidFill>
+                <a:latin typeface="Arial" pitchFamily="34" charset="0"/>
+                <a:ea typeface="BIZ UDPGothic" pitchFamily="34" charset="-122"/>
+                <a:cs typeface="BIZ UDPGothic" pitchFamily="34" charset="-120"/>
               </a:rPr>
               <a:t>②</a:t>
             </a:r>
@@ -9980,11 +9980,11 @@
             <a:r>
               <a:rPr lang="en-US" sz="1400" b="1" dirty="0">
                 <a:solidFill>
-                  <a:srgbClr val="4090D0"/>
-                </a:solidFill>
-                <a:latin typeface="Cambria" pitchFamily="34" charset="0"/>
-                <a:ea typeface="Cambria" pitchFamily="34" charset="-122"/>
-                <a:cs typeface="Cambria" pitchFamily="34" charset="-120"/>
+                  <a:srgbClr val="1D4F91"/>
+                </a:solidFill>
+                <a:latin typeface="BIZ UDPGothic" pitchFamily="34" charset="0"/>
+                <a:ea typeface="BIZ UDPGothic" pitchFamily="34" charset="-122"/>
+                <a:cs typeface="BIZ UDPGothic" pitchFamily="34" charset="-120"/>
               </a:rPr>
               <a:t>住宅市場を日本人のものに戻す</a:t>
             </a:r>
@@ -10019,11 +10019,11 @@
             <a:r>
               <a:rPr lang="en-US" sz="1000" dirty="0">
                 <a:solidFill>
-                  <a:srgbClr val="CCCCCC"/>
-                </a:solidFill>
-                <a:latin typeface="Arial" pitchFamily="34" charset="0"/>
-                <a:ea typeface="Arial" pitchFamily="34" charset="-122"/>
-                <a:cs typeface="Arial" pitchFamily="34" charset="-120"/>
+                  <a:srgbClr val="2B2F36"/>
+                </a:solidFill>
+                <a:latin typeface="Arial" pitchFamily="34" charset="0"/>
+                <a:ea typeface="BIZ UDPGothic" pitchFamily="34" charset="-122"/>
+                <a:cs typeface="BIZ UDPGothic" pitchFamily="34" charset="-120"/>
               </a:rPr>
               <a:t>投資目的の外国マネーによる価格押し上げを抑制し、日本人が普通に家を買える市場環境を取り戻す。高額帯から始まり、中長期的には一般価格帯にも波及効果が期待できる。</a:t>
             </a:r>
@@ -10048,11 +10048,11 @@
             </a:avLst>
           </a:prstGeom>
           <a:solidFill>
-            <a:srgbClr val="1A1A1A"/>
+            <a:srgbClr val="FFFFFF"/>
           </a:solidFill>
           <a:ln w="12700">
             <a:solidFill>
-              <a:srgbClr val="2E2E2E"/>
+              <a:srgbClr val="DDE0E6"/>
             </a:solidFill>
             <a:prstDash val="solid"/>
           </a:ln>
@@ -10075,11 +10075,11 @@
             </a:avLst>
           </a:prstGeom>
           <a:solidFill>
-            <a:srgbClr val="D62828"/>
+            <a:srgbClr val="C8161D"/>
           </a:solidFill>
           <a:ln w="12700">
             <a:solidFill>
-              <a:srgbClr val="D62828"/>
+              <a:srgbClr val="C8161D"/>
             </a:solidFill>
             <a:prstDash val="solid"/>
           </a:ln>
@@ -10112,11 +10112,11 @@
             <a:r>
               <a:rPr lang="en-US" sz="1800" b="1" dirty="0">
                 <a:solidFill>
-                  <a:srgbClr val="F5F5F0"/>
-                </a:solidFill>
-                <a:latin typeface="Arial" pitchFamily="34" charset="0"/>
-                <a:ea typeface="Arial" pitchFamily="34" charset="-122"/>
-                <a:cs typeface="Arial" pitchFamily="34" charset="-120"/>
+                  <a:srgbClr val="FFFFFF"/>
+                </a:solidFill>
+                <a:latin typeface="Arial" pitchFamily="34" charset="0"/>
+                <a:ea typeface="BIZ UDPGothic" pitchFamily="34" charset="-122"/>
+                <a:cs typeface="BIZ UDPGothic" pitchFamily="34" charset="-120"/>
               </a:rPr>
               <a:t>③</a:t>
             </a:r>
@@ -10151,11 +10151,11 @@
             <a:r>
               <a:rPr lang="en-US" sz="1400" b="1" dirty="0">
                 <a:solidFill>
-                  <a:srgbClr val="4CAF50"/>
-                </a:solidFill>
-                <a:latin typeface="Cambria" pitchFamily="34" charset="0"/>
-                <a:ea typeface="Cambria" pitchFamily="34" charset="-122"/>
-                <a:cs typeface="Cambria" pitchFamily="34" charset="-120"/>
+                  <a:srgbClr val="1D4F91"/>
+                </a:solidFill>
+                <a:latin typeface="BIZ UDPGothic" pitchFamily="34" charset="0"/>
+                <a:ea typeface="BIZ UDPGothic" pitchFamily="34" charset="-122"/>
+                <a:cs typeface="BIZ UDPGothic" pitchFamily="34" charset="-120"/>
               </a:rPr>
               <a:t>外国企業との関係は賃貸で続けられる</a:t>
             </a:r>
@@ -10190,11 +10190,11 @@
             <a:r>
               <a:rPr lang="en-US" sz="1000" dirty="0">
                 <a:solidFill>
-                  <a:srgbClr val="CCCCCC"/>
-                </a:solidFill>
-                <a:latin typeface="Arial" pitchFamily="34" charset="0"/>
-                <a:ea typeface="Arial" pitchFamily="34" charset="-122"/>
-                <a:cs typeface="Arial" pitchFamily="34" charset="-120"/>
+                  <a:srgbClr val="2B2F36"/>
+                </a:solidFill>
+                <a:latin typeface="Arial" pitchFamily="34" charset="0"/>
+                <a:ea typeface="BIZ UDPGothic" pitchFamily="34" charset="-122"/>
+                <a:cs typeface="BIZ UDPGothic" pitchFamily="34" charset="-120"/>
               </a:rPr>
               <a:t>外国企業を完全に締め出すのではなく、「買う」から「借りる」への転換を促す。土地の所有権を日本が持ちながら、経済関係は維持・強化できる。誘致条件は日本側がコントロールできる。</a:t>
             </a:r>
@@ -10216,7 +10216,7 @@
     <p:bg>
       <p:bgPr>
         <a:solidFill>
-          <a:srgbClr val="0A0A0A"/>
+          <a:srgbClr val="F5F6F8"/>
         </a:solidFill>
       </p:bgPr>
     </p:bg>
@@ -10261,11 +10261,11 @@
             <a:r>
               <a:rPr lang="en-US" sz="900" b="1" spc="400" kern="0" dirty="0">
                 <a:solidFill>
-                  <a:srgbClr val="D62828"/>
-                </a:solidFill>
-                <a:latin typeface="Arial" pitchFamily="34" charset="0"/>
-                <a:ea typeface="Arial" pitchFamily="34" charset="-122"/>
-                <a:cs typeface="Arial" pitchFamily="34" charset="-120"/>
+                  <a:srgbClr val="C8161D"/>
+                </a:solidFill>
+                <a:latin typeface="Arial" pitchFamily="34" charset="0"/>
+                <a:ea typeface="BIZ UDPGothic" pitchFamily="34" charset="-122"/>
+                <a:cs typeface="BIZ UDPGothic" pitchFamily="34" charset="-120"/>
               </a:rPr>
               <a:t>REMAINING ISSUES</a:t>
             </a:r>
@@ -10300,11 +10300,11 @@
             <a:r>
               <a:rPr lang="en-US" sz="2800" b="1" dirty="0">
                 <a:solidFill>
-                  <a:srgbClr val="F5F5F0"/>
-                </a:solidFill>
-                <a:latin typeface="Cambria" pitchFamily="34" charset="0"/>
-                <a:ea typeface="Cambria" pitchFamily="34" charset="-122"/>
-                <a:cs typeface="Cambria" pitchFamily="34" charset="-120"/>
+                  <a:srgbClr val="16181D"/>
+                </a:solidFill>
+                <a:latin typeface="BIZ UDPGothic" pitchFamily="34" charset="0"/>
+                <a:ea typeface="BIZ UDPGothic" pitchFamily="34" charset="-122"/>
+                <a:cs typeface="BIZ UDPGothic" pitchFamily="34" charset="-120"/>
               </a:rPr>
               <a:t>これから詰めるべき課題</a:t>
             </a:r>
@@ -10327,11 +10327,11 @@
             <a:avLst/>
           </a:prstGeom>
           <a:solidFill>
-            <a:srgbClr val="2E2E2E"/>
+            <a:srgbClr val="DDE0E6"/>
           </a:solidFill>
           <a:ln w="12700">
             <a:solidFill>
-              <a:srgbClr val="2E2E2E"/>
+              <a:srgbClr val="DDE0E6"/>
             </a:solidFill>
             <a:prstDash val="solid"/>
           </a:ln>
@@ -10354,11 +10354,11 @@
             </a:avLst>
           </a:prstGeom>
           <a:solidFill>
-            <a:srgbClr val="1A1A1A"/>
+            <a:srgbClr val="FFFFFF"/>
           </a:solidFill>
           <a:ln w="12700">
             <a:solidFill>
-              <a:srgbClr val="2E2E2E"/>
+              <a:srgbClr val="DDE0E6"/>
             </a:solidFill>
             <a:prstDash val="solid"/>
           </a:ln>
@@ -10391,11 +10391,11 @@
             <a:r>
               <a:rPr lang="en-US" sz="1000" dirty="0">
                 <a:solidFill>
-                  <a:srgbClr val="CCCCCC"/>
-                </a:solidFill>
-                <a:latin typeface="Arial" pitchFamily="34" charset="0"/>
-                <a:ea typeface="Arial" pitchFamily="34" charset="-122"/>
-                <a:cs typeface="Arial" pitchFamily="34" charset="-120"/>
+                  <a:srgbClr val="2B2F36"/>
+                </a:solidFill>
+                <a:latin typeface="Arial" pitchFamily="34" charset="0"/>
+                <a:ea typeface="BIZ UDPGothic" pitchFamily="34" charset="-122"/>
+                <a:cs typeface="BIZ UDPGothic" pitchFamily="34" charset="-120"/>
               </a:rPr>
               <a:t>外国資本「15%」の計算方法（議決権ベースか出資比率か。間接的に持っている分の扱い）</a:t>
             </a:r>
@@ -10420,11 +10420,11 @@
             </a:avLst>
           </a:prstGeom>
           <a:solidFill>
-            <a:srgbClr val="1A1A1A"/>
+            <a:srgbClr val="FFFFFF"/>
           </a:solidFill>
           <a:ln w="12700">
             <a:solidFill>
-              <a:srgbClr val="2E2E2E"/>
+              <a:srgbClr val="DDE0E6"/>
             </a:solidFill>
             <a:prstDash val="solid"/>
           </a:ln>
@@ -10457,11 +10457,11 @@
             <a:r>
               <a:rPr lang="en-US" sz="1000" dirty="0">
                 <a:solidFill>
-                  <a:srgbClr val="CCCCCC"/>
-                </a:solidFill>
-                <a:latin typeface="Arial" pitchFamily="34" charset="0"/>
-                <a:ea typeface="Arial" pitchFamily="34" charset="-122"/>
-                <a:cs typeface="Arial" pitchFamily="34" charset="-120"/>
+                  <a:srgbClr val="2B2F36"/>
+                </a:solidFill>
+                <a:latin typeface="Arial" pitchFamily="34" charset="0"/>
+                <a:ea typeface="BIZ UDPGothic" pitchFamily="34" charset="-122"/>
+                <a:cs typeface="BIZ UDPGothic" pitchFamily="34" charset="-120"/>
               </a:rPr>
               <a:t>永住権取得のハードルと土地取得のセットを悪用されないか（永住権の審査強化との連動）</a:t>
             </a:r>
@@ -10486,11 +10486,11 @@
             </a:avLst>
           </a:prstGeom>
           <a:solidFill>
-            <a:srgbClr val="1A1A1A"/>
+            <a:srgbClr val="FFFFFF"/>
           </a:solidFill>
           <a:ln w="12700">
             <a:solidFill>
-              <a:srgbClr val="2E2E2E"/>
+              <a:srgbClr val="DDE0E6"/>
             </a:solidFill>
             <a:prstDash val="solid"/>
           </a:ln>
@@ -10523,11 +10523,11 @@
             <a:r>
               <a:rPr lang="en-US" sz="1000" dirty="0">
                 <a:solidFill>
-                  <a:srgbClr val="CCCCCC"/>
-                </a:solidFill>
-                <a:latin typeface="Arial" pitchFamily="34" charset="0"/>
-                <a:ea typeface="Arial" pitchFamily="34" charset="-122"/>
-                <a:cs typeface="Arial" pitchFamily="34" charset="-120"/>
+                  <a:srgbClr val="2B2F36"/>
+                </a:solidFill>
+                <a:latin typeface="Arial" pitchFamily="34" charset="0"/>
+                <a:ea typeface="BIZ UDPGothic" pitchFamily="34" charset="-122"/>
+                <a:cs typeface="BIZ UDPGothic" pitchFamily="34" charset="-120"/>
               </a:rPr>
               <a:t>重要エリアの「国が指定した区画」の指定プロセス・基準を明確にする</a:t>
             </a:r>
@@ -10552,11 +10552,11 @@
             </a:avLst>
           </a:prstGeom>
           <a:solidFill>
-            <a:srgbClr val="1A1A1A"/>
+            <a:srgbClr val="FFFFFF"/>
           </a:solidFill>
           <a:ln w="12700">
             <a:solidFill>
-              <a:srgbClr val="2E2E2E"/>
+              <a:srgbClr val="DDE0E6"/>
             </a:solidFill>
             <a:prstDash val="solid"/>
           </a:ln>
@@ -10589,11 +10589,11 @@
             <a:r>
               <a:rPr lang="en-US" sz="1000" dirty="0">
                 <a:solidFill>
-                  <a:srgbClr val="CCCCCC"/>
-                </a:solidFill>
-                <a:latin typeface="Arial" pitchFamily="34" charset="0"/>
-                <a:ea typeface="Arial" pitchFamily="34" charset="-122"/>
-                <a:cs typeface="Arial" pitchFamily="34" charset="-120"/>
+                  <a:srgbClr val="2B2F36"/>
+                </a:solidFill>
+                <a:latin typeface="Arial" pitchFamily="34" charset="0"/>
+                <a:ea typeface="BIZ UDPGothic" pitchFamily="34" charset="-122"/>
+                <a:cs typeface="BIZ UDPGothic" pitchFamily="34" charset="-120"/>
               </a:rPr>
               <a:t>年4回の調査を担う体制・人員・予算の設計</a:t>
             </a:r>
@@ -10618,11 +10618,11 @@
             </a:avLst>
           </a:prstGeom>
           <a:solidFill>
-            <a:srgbClr val="1A1A1A"/>
+            <a:srgbClr val="FFFFFF"/>
           </a:solidFill>
           <a:ln w="12700">
             <a:solidFill>
-              <a:srgbClr val="2E2E2E"/>
+              <a:srgbClr val="DDE0E6"/>
             </a:solidFill>
             <a:prstDash val="solid"/>
           </a:ln>
@@ -10655,11 +10655,11 @@
             <a:r>
               <a:rPr lang="en-US" sz="1000" dirty="0">
                 <a:solidFill>
-                  <a:srgbClr val="CCCCCC"/>
-                </a:solidFill>
-                <a:latin typeface="Arial" pitchFamily="34" charset="0"/>
-                <a:ea typeface="Arial" pitchFamily="34" charset="-122"/>
-                <a:cs typeface="Arial" pitchFamily="34" charset="-120"/>
+                  <a:srgbClr val="2B2F36"/>
+                </a:solidFill>
+                <a:latin typeface="Arial" pitchFamily="34" charset="0"/>
+                <a:ea typeface="BIZ UDPGothic" pitchFamily="34" charset="-122"/>
+                <a:cs typeface="BIZ UDPGothic" pitchFamily="34" charset="-120"/>
               </a:rPr>
               <a:t>居住実績（3年で400日）の確認方法（住民票・電気・水道使用記録等の組み合わせ）</a:t>
             </a:r>
@@ -10684,11 +10684,11 @@
             </a:avLst>
           </a:prstGeom>
           <a:solidFill>
-            <a:srgbClr val="1A1A1A"/>
+            <a:srgbClr val="FFFFFF"/>
           </a:solidFill>
           <a:ln w="12700">
             <a:solidFill>
-              <a:srgbClr val="2E2E2E"/>
+              <a:srgbClr val="DDE0E6"/>
             </a:solidFill>
             <a:prstDash val="solid"/>
           </a:ln>
@@ -10721,11 +10721,11 @@
             <a:r>
               <a:rPr lang="en-US" sz="1000" dirty="0">
                 <a:solidFill>
-                  <a:srgbClr val="CCCCCC"/>
-                </a:solidFill>
-                <a:latin typeface="Arial" pitchFamily="34" charset="0"/>
-                <a:ea typeface="Arial" pitchFamily="34" charset="-122"/>
-                <a:cs typeface="Arial" pitchFamily="34" charset="-120"/>
+                  <a:srgbClr val="2B2F36"/>
+                </a:solidFill>
+                <a:latin typeface="Arial" pitchFamily="34" charset="0"/>
+                <a:ea typeface="BIZ UDPGothic" pitchFamily="34" charset="-122"/>
+                <a:cs typeface="BIZ UDPGothic" pitchFamily="34" charset="-120"/>
               </a:rPr>
               <a:t>海外赴任などの「正当な理由」の判定基準を明文化する</a:t>
             </a:r>
@@ -10750,11 +10750,11 @@
             </a:avLst>
           </a:prstGeom>
           <a:solidFill>
-            <a:srgbClr val="1A1A1A"/>
+            <a:srgbClr val="FFFFFF"/>
           </a:solidFill>
           <a:ln w="12700">
             <a:solidFill>
-              <a:srgbClr val="2E2E2E"/>
+              <a:srgbClr val="DDE0E6"/>
             </a:solidFill>
             <a:prstDash val="solid"/>
           </a:ln>
@@ -10787,11 +10787,11 @@
             <a:r>
               <a:rPr lang="en-US" sz="1000" dirty="0">
                 <a:solidFill>
-                  <a:srgbClr val="CCCCCC"/>
-                </a:solidFill>
-                <a:latin typeface="Arial" pitchFamily="34" charset="0"/>
-                <a:ea typeface="Arial" pitchFamily="34" charset="-122"/>
-                <a:cs typeface="Arial" pitchFamily="34" charset="-120"/>
+                  <a:srgbClr val="2B2F36"/>
+                </a:solidFill>
+                <a:latin typeface="Arial" pitchFamily="34" charset="0"/>
+                <a:ea typeface="BIZ UDPGothic" pitchFamily="34" charset="-122"/>
+                <a:cs typeface="BIZ UDPGothic" pitchFamily="34" charset="-120"/>
               </a:rPr>
               <a:t>今すでに持っている外国人所有者からの反発・国際的な摩擦への対応</a:t>
             </a:r>
@@ -10816,11 +10816,11 @@
             </a:avLst>
           </a:prstGeom>
           <a:solidFill>
-            <a:srgbClr val="1A1A1A"/>
+            <a:srgbClr val="FFFFFF"/>
           </a:solidFill>
           <a:ln w="12700">
             <a:solidFill>
-              <a:srgbClr val="2E2E2E"/>
+              <a:srgbClr val="DDE0E6"/>
             </a:solidFill>
             <a:prstDash val="solid"/>
           </a:ln>
@@ -10853,11 +10853,11 @@
             <a:r>
               <a:rPr lang="en-US" sz="1000" dirty="0">
                 <a:solidFill>
-                  <a:srgbClr val="CCCCCC"/>
-                </a:solidFill>
-                <a:latin typeface="Arial" pitchFamily="34" charset="0"/>
-                <a:ea typeface="Arial" pitchFamily="34" charset="-122"/>
-                <a:cs typeface="Arial" pitchFamily="34" charset="-120"/>
+                  <a:srgbClr val="2B2F36"/>
+                </a:solidFill>
+                <a:latin typeface="Arial" pitchFamily="34" charset="0"/>
+                <a:ea typeface="BIZ UDPGothic" pitchFamily="34" charset="-122"/>
+                <a:cs typeface="BIZ UDPGothic" pitchFamily="34" charset="-120"/>
               </a:rPr>
               <a:t>重要土地等規制法など今ある法律との整合性・統合の必要性</a:t>
             </a:r>
@@ -10882,11 +10882,11 @@
             </a:avLst>
           </a:prstGeom>
           <a:solidFill>
-            <a:srgbClr val="1A1A1A"/>
+            <a:srgbClr val="FFFFFF"/>
           </a:solidFill>
           <a:ln w="12700">
             <a:solidFill>
-              <a:srgbClr val="2E2E2E"/>
+              <a:srgbClr val="DDE0E6"/>
             </a:solidFill>
             <a:prstDash val="solid"/>
           </a:ln>
@@ -10919,11 +10919,11 @@
             <a:r>
               <a:rPr lang="en-US" sz="1000" dirty="0">
                 <a:solidFill>
-                  <a:srgbClr val="CCCCCC"/>
-                </a:solidFill>
-                <a:latin typeface="Arial" pitchFamily="34" charset="0"/>
-                <a:ea typeface="Arial" pitchFamily="34" charset="-122"/>
-                <a:cs typeface="Arial" pitchFamily="34" charset="-120"/>
+                  <a:srgbClr val="2B2F36"/>
+                </a:solidFill>
+                <a:latin typeface="Arial" pitchFamily="34" charset="0"/>
+                <a:ea typeface="BIZ UDPGothic" pitchFamily="34" charset="-122"/>
+                <a:cs typeface="BIZ UDPGothic" pitchFamily="34" charset="-120"/>
               </a:rPr>
               <a:t>外資への土地賃貸条件がWTO・FTA等の国際ルールと矛盾しないかの確認</a:t>
             </a:r>
@@ -10945,7 +10945,7 @@
     <p:bg>
       <p:bgPr>
         <a:solidFill>
-          <a:srgbClr val="0A0A0A"/>
+          <a:srgbClr val="F5F6F8"/>
         </a:solidFill>
       </p:bgPr>
     </p:bg>
@@ -10978,11 +10978,11 @@
             <a:avLst/>
           </a:prstGeom>
           <a:solidFill>
-            <a:srgbClr val="D62828"/>
+            <a:srgbClr val="C8161D"/>
           </a:solidFill>
           <a:ln w="12700">
             <a:solidFill>
-              <a:srgbClr val="D62828"/>
+              <a:srgbClr val="C8161D"/>
             </a:solidFill>
             <a:prstDash val="solid"/>
           </a:ln>
@@ -11015,11 +11015,11 @@
             <a:r>
               <a:rPr lang="en-US" sz="1000" b="1" spc="300" kern="0" dirty="0">
                 <a:solidFill>
-                  <a:srgbClr val="D62828"/>
-                </a:solidFill>
-                <a:latin typeface="Arial" pitchFamily="34" charset="0"/>
-                <a:ea typeface="Arial" pitchFamily="34" charset="-122"/>
-                <a:cs typeface="Arial" pitchFamily="34" charset="-120"/>
+                  <a:srgbClr val="C8161D"/>
+                </a:solidFill>
+                <a:latin typeface="Arial" pitchFamily="34" charset="0"/>
+                <a:ea typeface="BIZ UDPGothic" pitchFamily="34" charset="-122"/>
+                <a:cs typeface="BIZ UDPGothic" pitchFamily="34" charset="-120"/>
               </a:rPr>
               <a:t>REBOOT JAPAN ── 提言010　まとめ</a:t>
             </a:r>
@@ -11054,11 +11054,11 @@
             <a:r>
               <a:rPr lang="en-US" sz="3000" b="1" dirty="0">
                 <a:solidFill>
-                  <a:srgbClr val="F5F5F0"/>
-                </a:solidFill>
-                <a:latin typeface="Cambria" pitchFamily="34" charset="0"/>
-                <a:ea typeface="Cambria" pitchFamily="34" charset="-122"/>
-                <a:cs typeface="Cambria" pitchFamily="34" charset="-120"/>
+                  <a:srgbClr val="16181D"/>
+                </a:solidFill>
+                <a:latin typeface="BIZ UDPGothic" pitchFamily="34" charset="0"/>
+                <a:ea typeface="BIZ UDPGothic" pitchFamily="34" charset="-122"/>
+                <a:cs typeface="BIZ UDPGothic" pitchFamily="34" charset="-120"/>
               </a:rPr>
               <a:t>国土は誰のものか。</a:t>
             </a:r>
@@ -11071,11 +11071,11 @@
             <a:r>
               <a:rPr lang="en-US" sz="3000" b="1" dirty="0">
                 <a:solidFill>
-                  <a:srgbClr val="F5F5F0"/>
-                </a:solidFill>
-                <a:latin typeface="Cambria" pitchFamily="34" charset="0"/>
-                <a:ea typeface="Cambria" pitchFamily="34" charset="-122"/>
-                <a:cs typeface="Cambria" pitchFamily="34" charset="-120"/>
+                  <a:srgbClr val="16181D"/>
+                </a:solidFill>
+                <a:latin typeface="BIZ UDPGothic" pitchFamily="34" charset="0"/>
+                <a:ea typeface="BIZ UDPGothic" pitchFamily="34" charset="-122"/>
+                <a:cs typeface="BIZ UDPGothic" pitchFamily="34" charset="-120"/>
               </a:rPr>
               <a:t>所有権の原則を</a:t>
             </a:r>
@@ -11088,11 +11088,11 @@
             <a:r>
               <a:rPr lang="en-US" sz="3000" b="1" dirty="0">
                 <a:solidFill>
-                  <a:srgbClr val="F5F5F0"/>
-                </a:solidFill>
-                <a:latin typeface="Cambria" pitchFamily="34" charset="0"/>
-                <a:ea typeface="Cambria" pitchFamily="34" charset="-122"/>
-                <a:cs typeface="Cambria" pitchFamily="34" charset="-120"/>
+                  <a:srgbClr val="16181D"/>
+                </a:solidFill>
+                <a:latin typeface="BIZ UDPGothic" pitchFamily="34" charset="0"/>
+                <a:ea typeface="BIZ UDPGothic" pitchFamily="34" charset="-122"/>
+                <a:cs typeface="BIZ UDPGothic" pitchFamily="34" charset="-120"/>
               </a:rPr>
               <a:t>取り戻す。</a:t>
             </a:r>
@@ -11115,11 +11115,11 @@
             <a:avLst/>
           </a:prstGeom>
           <a:solidFill>
-            <a:srgbClr val="2E2E2E"/>
+            <a:srgbClr val="DDE0E6"/>
           </a:solidFill>
           <a:ln w="12700">
             <a:solidFill>
-              <a:srgbClr val="2E2E2E"/>
+              <a:srgbClr val="DDE0E6"/>
             </a:solidFill>
             <a:prstDash val="solid"/>
           </a:ln>
@@ -11155,11 +11155,11 @@
             <a:r>
               <a:rPr lang="en-US" sz="1100" dirty="0">
                 <a:solidFill>
-                  <a:srgbClr val="CCCCCC"/>
-                </a:solidFill>
-                <a:latin typeface="Arial" pitchFamily="34" charset="0"/>
-                <a:ea typeface="Arial" pitchFamily="34" charset="-122"/>
-                <a:cs typeface="Arial" pitchFamily="34" charset="-120"/>
+                  <a:srgbClr val="2B2F36"/>
+                </a:solidFill>
+                <a:latin typeface="Arial" pitchFamily="34" charset="0"/>
+                <a:ea typeface="BIZ UDPGothic" pitchFamily="34" charset="-122"/>
+                <a:cs typeface="BIZ UDPGothic" pitchFamily="34" charset="-120"/>
               </a:rPr>
               <a:t>① 土地は日本国籍・永住者・外国資本15%以下の日本法人のみ取得可</a:t>
             </a:r>
@@ -11175,11 +11175,11 @@
             <a:r>
               <a:rPr lang="en-US" sz="1100" dirty="0">
                 <a:solidFill>
-                  <a:srgbClr val="CCCCCC"/>
-                </a:solidFill>
-                <a:latin typeface="Arial" pitchFamily="34" charset="0"/>
-                <a:ea typeface="Arial" pitchFamily="34" charset="-122"/>
-                <a:cs typeface="Arial" pitchFamily="34" charset="-120"/>
+                  <a:srgbClr val="2B2F36"/>
+                </a:solidFill>
+                <a:latin typeface="Arial" pitchFamily="34" charset="0"/>
+                <a:ea typeface="BIZ UDPGothic" pitchFamily="34" charset="-122"/>
+                <a:cs typeface="BIZ UDPGothic" pitchFamily="34" charset="-120"/>
               </a:rPr>
               <a:t>② 重要エリア（水源地・離島・防衛施設等）は購入も賃貸も全面禁止。国が年4回調査</a:t>
             </a:r>
@@ -11195,11 +11195,11 @@
             <a:r>
               <a:rPr lang="en-US" sz="1100" dirty="0">
                 <a:solidFill>
-                  <a:srgbClr val="CCCCCC"/>
-                </a:solidFill>
-                <a:latin typeface="Arial" pitchFamily="34" charset="0"/>
-                <a:ea typeface="Arial" pitchFamily="34" charset="-122"/>
-                <a:cs typeface="Arial" pitchFamily="34" charset="-120"/>
+                  <a:srgbClr val="2B2F36"/>
+                </a:solidFill>
+                <a:latin typeface="Arial" pitchFamily="34" charset="0"/>
+                <a:ea typeface="BIZ UDPGothic" pitchFamily="34" charset="-122"/>
+                <a:cs typeface="BIZ UDPGothic" pitchFamily="34" charset="-120"/>
               </a:rPr>
               <a:t>③ 今の外国人所有者は制度開始から5年以内に売却（既得権は保護しない）</a:t>
             </a:r>
@@ -11215,11 +11215,11 @@
             <a:r>
               <a:rPr lang="en-US" sz="1100" dirty="0">
                 <a:solidFill>
-                  <a:srgbClr val="CCCCCC"/>
-                </a:solidFill>
-                <a:latin typeface="Arial" pitchFamily="34" charset="0"/>
-                <a:ea typeface="Arial" pitchFamily="34" charset="-122"/>
-                <a:cs typeface="Arial" pitchFamily="34" charset="-120"/>
+                  <a:srgbClr val="2B2F36"/>
+                </a:solidFill>
+                <a:latin typeface="Arial" pitchFamily="34" charset="0"/>
+                <a:ea typeface="BIZ UDPGothic" pitchFamily="34" charset="-122"/>
+                <a:cs typeface="BIZ UDPGothic" pitchFamily="34" charset="-120"/>
               </a:rPr>
               <a:t>④ マンションは「住む目的なら誰でも買える」。購入後3年で400日以上の居住実績が条件</a:t>
             </a:r>
@@ -11232,11 +11232,11 @@
             <a:r>
               <a:rPr lang="en-US" sz="1100" dirty="0">
                 <a:solidFill>
-                  <a:srgbClr val="CCCCCC"/>
-                </a:solidFill>
-                <a:latin typeface="Arial" pitchFamily="34" charset="0"/>
-                <a:ea typeface="Arial" pitchFamily="34" charset="-122"/>
-                <a:cs typeface="Arial" pitchFamily="34" charset="-120"/>
+                  <a:srgbClr val="2B2F36"/>
+                </a:solidFill>
+                <a:latin typeface="Arial" pitchFamily="34" charset="0"/>
+                <a:ea typeface="BIZ UDPGothic" pitchFamily="34" charset="-122"/>
+                <a:cs typeface="BIZ UDPGothic" pitchFamily="34" charset="-120"/>
               </a:rPr>
               <a:t>⑤ 外国企業は「借りる（賃貸）」形での利用は引き続き可能。誘致の武器として活用する</a:t>
             </a:r>
@@ -11258,7 +11258,7 @@
     <p:bg>
       <p:bgPr>
         <a:solidFill>
-          <a:srgbClr val="0A0A0A"/>
+          <a:srgbClr val="F5F6F8"/>
         </a:solidFill>
       </p:bgPr>
     </p:bg>
@@ -11303,11 +11303,11 @@
             <a:r>
               <a:rPr lang="en-US" sz="900" b="1" spc="400" kern="0" dirty="0">
                 <a:solidFill>
-                  <a:srgbClr val="D62828"/>
-                </a:solidFill>
-                <a:latin typeface="Arial" pitchFamily="34" charset="0"/>
-                <a:ea typeface="Arial" pitchFamily="34" charset="-122"/>
-                <a:cs typeface="Arial" pitchFamily="34" charset="-120"/>
+                  <a:srgbClr val="C8161D"/>
+                </a:solidFill>
+                <a:latin typeface="Arial" pitchFamily="34" charset="0"/>
+                <a:ea typeface="BIZ UDPGothic" pitchFamily="34" charset="-122"/>
+                <a:cs typeface="BIZ UDPGothic" pitchFamily="34" charset="-120"/>
               </a:rPr>
               <a:t>PROBLEM 01</a:t>
             </a:r>
@@ -11342,11 +11342,11 @@
             <a:r>
               <a:rPr lang="en-US" sz="2800" b="1" dirty="0">
                 <a:solidFill>
-                  <a:srgbClr val="F5F5F0"/>
-                </a:solidFill>
-                <a:latin typeface="Cambria" pitchFamily="34" charset="0"/>
-                <a:ea typeface="Cambria" pitchFamily="34" charset="-122"/>
-                <a:cs typeface="Cambria" pitchFamily="34" charset="-120"/>
+                  <a:srgbClr val="16181D"/>
+                </a:solidFill>
+                <a:latin typeface="BIZ UDPGothic" pitchFamily="34" charset="0"/>
+                <a:ea typeface="BIZ UDPGothic" pitchFamily="34" charset="-122"/>
+                <a:cs typeface="BIZ UDPGothic" pitchFamily="34" charset="-120"/>
               </a:rPr>
               <a:t>水源地・国境の島が外国資本に買われている</a:t>
             </a:r>
@@ -11369,11 +11369,11 @@
             <a:avLst/>
           </a:prstGeom>
           <a:solidFill>
-            <a:srgbClr val="2E2E2E"/>
+            <a:srgbClr val="DDE0E6"/>
           </a:solidFill>
           <a:ln w="12700">
             <a:solidFill>
-              <a:srgbClr val="2E2E2E"/>
+              <a:srgbClr val="DDE0E6"/>
             </a:solidFill>
             <a:prstDash val="solid"/>
           </a:ln>
@@ -11406,11 +11406,11 @@
             <a:r>
               <a:rPr lang="en-US" sz="1100" dirty="0">
                 <a:solidFill>
-                  <a:srgbClr val="CCCCCC"/>
-                </a:solidFill>
-                <a:latin typeface="Arial" pitchFamily="34" charset="0"/>
-                <a:ea typeface="Arial" pitchFamily="34" charset="-122"/>
-                <a:cs typeface="Arial" pitchFamily="34" charset="-120"/>
+                  <a:srgbClr val="2B2F36"/>
+                </a:solidFill>
+                <a:latin typeface="Arial" pitchFamily="34" charset="0"/>
+                <a:ea typeface="BIZ UDPGothic" pitchFamily="34" charset="-122"/>
+                <a:cs typeface="BIZ UDPGothic" pitchFamily="34" charset="-120"/>
               </a:rPr>
               <a:t>お金を出せば誰でも土地を買える日本の制度が、安全保障上の弱点になっている。</a:t>
             </a:r>
@@ -11435,11 +11435,11 @@
             </a:avLst>
           </a:prstGeom>
           <a:solidFill>
-            <a:srgbClr val="1A1A1A"/>
+            <a:srgbClr val="FFFFFF"/>
           </a:solidFill>
           <a:ln w="12700">
             <a:solidFill>
-              <a:srgbClr val="2E2E2E"/>
+              <a:srgbClr val="DDE0E6"/>
             </a:solidFill>
             <a:prstDash val="solid"/>
           </a:ln>
@@ -11496,11 +11496,11 @@
             <a:avLst/>
           </a:prstGeom>
           <a:solidFill>
-            <a:srgbClr val="2E2E2E"/>
+            <a:srgbClr val="DDE0E6"/>
           </a:solidFill>
           <a:ln w="12700">
             <a:solidFill>
-              <a:srgbClr val="2E2E2E"/>
+              <a:srgbClr val="DDE0E6"/>
             </a:solidFill>
             <a:prstDash val="solid"/>
           </a:ln>
@@ -11533,11 +11533,11 @@
             <a:r>
               <a:rPr lang="en-US" sz="1300" b="1" dirty="0">
                 <a:solidFill>
-                  <a:srgbClr val="F5F5F0"/>
-                </a:solidFill>
-                <a:latin typeface="Cambria" pitchFamily="34" charset="0"/>
-                <a:ea typeface="Cambria" pitchFamily="34" charset="-122"/>
-                <a:cs typeface="Cambria" pitchFamily="34" charset="-120"/>
+                  <a:srgbClr val="16181D"/>
+                </a:solidFill>
+                <a:latin typeface="BIZ UDPGothic" pitchFamily="34" charset="0"/>
+                <a:ea typeface="BIZ UDPGothic" pitchFamily="34" charset="-122"/>
+                <a:cs typeface="BIZ UDPGothic" pitchFamily="34" charset="-120"/>
               </a:rPr>
               <a:t>水源地の危機</a:t>
             </a:r>
@@ -11572,11 +11572,11 @@
             <a:r>
               <a:rPr lang="en-US" sz="1000" dirty="0">
                 <a:solidFill>
-                  <a:srgbClr val="CCCCCC"/>
-                </a:solidFill>
-                <a:latin typeface="Arial" pitchFamily="34" charset="0"/>
-                <a:ea typeface="Arial" pitchFamily="34" charset="-122"/>
-                <a:cs typeface="Arial" pitchFamily="34" charset="-120"/>
+                  <a:srgbClr val="2B2F36"/>
+                </a:solidFill>
+                <a:latin typeface="Arial" pitchFamily="34" charset="0"/>
+                <a:ea typeface="BIZ UDPGothic" pitchFamily="34" charset="-122"/>
+                <a:cs typeface="BIZ UDPGothic" pitchFamily="34" charset="-120"/>
               </a:rPr>
               <a:t>川や湖の水が来る源になる山の土地（水源地）を外国人が購入するケースが増えている。水源地を持つ者が水を管理できる。ダムや浄水場の近くも同じリスクがある</a:t>
             </a:r>
@@ -11601,11 +11601,11 @@
             </a:avLst>
           </a:prstGeom>
           <a:solidFill>
-            <a:srgbClr val="1A1A1A"/>
+            <a:srgbClr val="FFFFFF"/>
           </a:solidFill>
           <a:ln w="12700">
             <a:solidFill>
-              <a:srgbClr val="2E2E2E"/>
+              <a:srgbClr val="DDE0E6"/>
             </a:solidFill>
             <a:prstDash val="solid"/>
           </a:ln>
@@ -11662,11 +11662,11 @@
             <a:avLst/>
           </a:prstGeom>
           <a:solidFill>
-            <a:srgbClr val="2E2E2E"/>
+            <a:srgbClr val="DDE0E6"/>
           </a:solidFill>
           <a:ln w="12700">
             <a:solidFill>
-              <a:srgbClr val="2E2E2E"/>
+              <a:srgbClr val="DDE0E6"/>
             </a:solidFill>
             <a:prstDash val="solid"/>
           </a:ln>
@@ -11699,11 +11699,11 @@
             <a:r>
               <a:rPr lang="en-US" sz="1300" b="1" dirty="0">
                 <a:solidFill>
-                  <a:srgbClr val="F5F5F0"/>
-                </a:solidFill>
-                <a:latin typeface="Cambria" pitchFamily="34" charset="0"/>
-                <a:ea typeface="Cambria" pitchFamily="34" charset="-122"/>
-                <a:cs typeface="Cambria" pitchFamily="34" charset="-120"/>
+                  <a:srgbClr val="16181D"/>
+                </a:solidFill>
+                <a:latin typeface="BIZ UDPGothic" pitchFamily="34" charset="0"/>
+                <a:ea typeface="BIZ UDPGothic" pitchFamily="34" charset="-122"/>
+                <a:cs typeface="BIZ UDPGothic" pitchFamily="34" charset="-120"/>
               </a:rPr>
               <a:t>国境の島の危機</a:t>
             </a:r>
@@ -11738,11 +11738,11 @@
             <a:r>
               <a:rPr lang="en-US" sz="1000" dirty="0">
                 <a:solidFill>
-                  <a:srgbClr val="CCCCCC"/>
-                </a:solidFill>
-                <a:latin typeface="Arial" pitchFamily="34" charset="0"/>
-                <a:ea typeface="Arial" pitchFamily="34" charset="-122"/>
-                <a:cs typeface="Arial" pitchFamily="34" charset="-120"/>
+                  <a:srgbClr val="2B2F36"/>
+                </a:solidFill>
+                <a:latin typeface="Arial" pitchFamily="34" charset="0"/>
+                <a:ea typeface="BIZ UDPGothic" pitchFamily="34" charset="-122"/>
+                <a:cs typeface="BIZ UDPGothic" pitchFamily="34" charset="-120"/>
               </a:rPr>
               <a:t>日本の端にある小さな島（国境離島）が買われると、外国が実質的にそこを「支配」できてしまう。島の実質的な支配が積み重なれば、地図上の国境線が変わるリスクにもなる</a:t>
             </a:r>
@@ -11767,11 +11767,11 @@
             </a:avLst>
           </a:prstGeom>
           <a:solidFill>
-            <a:srgbClr val="1A1A1A"/>
+            <a:srgbClr val="FFFFFF"/>
           </a:solidFill>
           <a:ln w="12700">
             <a:solidFill>
-              <a:srgbClr val="2E2E2E"/>
+              <a:srgbClr val="DDE0E6"/>
             </a:solidFill>
             <a:prstDash val="solid"/>
           </a:ln>
@@ -11828,11 +11828,11 @@
             <a:avLst/>
           </a:prstGeom>
           <a:solidFill>
-            <a:srgbClr val="2E2E2E"/>
+            <a:srgbClr val="DDE0E6"/>
           </a:solidFill>
           <a:ln w="12700">
             <a:solidFill>
-              <a:srgbClr val="2E2E2E"/>
+              <a:srgbClr val="DDE0E6"/>
             </a:solidFill>
             <a:prstDash val="solid"/>
           </a:ln>
@@ -11865,11 +11865,11 @@
             <a:r>
               <a:rPr lang="en-US" sz="1300" b="1" dirty="0">
                 <a:solidFill>
-                  <a:srgbClr val="F5F5F0"/>
-                </a:solidFill>
-                <a:latin typeface="Cambria" pitchFamily="34" charset="0"/>
-                <a:ea typeface="Cambria" pitchFamily="34" charset="-122"/>
-                <a:cs typeface="Cambria" pitchFamily="34" charset="-120"/>
+                  <a:srgbClr val="16181D"/>
+                </a:solidFill>
+                <a:latin typeface="BIZ UDPGothic" pitchFamily="34" charset="0"/>
+                <a:ea typeface="BIZ UDPGothic" pitchFamily="34" charset="-122"/>
+                <a:cs typeface="BIZ UDPGothic" pitchFamily="34" charset="-120"/>
               </a:rPr>
               <a:t>今の法律の限界</a:t>
             </a:r>
@@ -11904,11 +11904,11 @@
             <a:r>
               <a:rPr lang="en-US" sz="1000" dirty="0">
                 <a:solidFill>
-                  <a:srgbClr val="CCCCCC"/>
-                </a:solidFill>
-                <a:latin typeface="Arial" pitchFamily="34" charset="0"/>
-                <a:ea typeface="Arial" pitchFamily="34" charset="-122"/>
-                <a:cs typeface="Arial" pitchFamily="34" charset="-120"/>
+                  <a:srgbClr val="2B2F36"/>
+                </a:solidFill>
+                <a:latin typeface="Arial" pitchFamily="34" charset="0"/>
+                <a:ea typeface="BIZ UDPGothic" pitchFamily="34" charset="-122"/>
+                <a:cs typeface="BIZ UDPGothic" pitchFamily="34" charset="-120"/>
               </a:rPr>
               <a:t>2022年にできた法律で「調査はできる」ようになったが、「買うこと自体を止める」ことはできない。外国人が買った後に調べることしかできない状態</a:t>
             </a:r>
@@ -11930,7 +11930,7 @@
     <p:bg>
       <p:bgPr>
         <a:solidFill>
-          <a:srgbClr val="0A0A0A"/>
+          <a:srgbClr val="F5F6F8"/>
         </a:solidFill>
       </p:bgPr>
     </p:bg>
@@ -11975,11 +11975,11 @@
             <a:r>
               <a:rPr lang="en-US" sz="900" b="1" spc="400" kern="0" dirty="0">
                 <a:solidFill>
-                  <a:srgbClr val="D62828"/>
-                </a:solidFill>
-                <a:latin typeface="Arial" pitchFamily="34" charset="0"/>
-                <a:ea typeface="Arial" pitchFamily="34" charset="-122"/>
-                <a:cs typeface="Arial" pitchFamily="34" charset="-120"/>
+                  <a:srgbClr val="C8161D"/>
+                </a:solidFill>
+                <a:latin typeface="Arial" pitchFamily="34" charset="0"/>
+                <a:ea typeface="BIZ UDPGothic" pitchFamily="34" charset="-122"/>
+                <a:cs typeface="BIZ UDPGothic" pitchFamily="34" charset="-120"/>
               </a:rPr>
               <a:t>PROBLEM 02</a:t>
             </a:r>
@@ -12014,11 +12014,11 @@
             <a:r>
               <a:rPr lang="en-US" sz="2800" b="1" dirty="0">
                 <a:solidFill>
-                  <a:srgbClr val="F5F5F0"/>
-                </a:solidFill>
-                <a:latin typeface="Cambria" pitchFamily="34" charset="0"/>
-                <a:ea typeface="Cambria" pitchFamily="34" charset="-122"/>
-                <a:cs typeface="Cambria" pitchFamily="34" charset="-120"/>
+                  <a:srgbClr val="16181D"/>
+                </a:solidFill>
+                <a:latin typeface="BIZ UDPGothic" pitchFamily="34" charset="0"/>
+                <a:ea typeface="BIZ UDPGothic" pitchFamily="34" charset="-122"/>
+                <a:cs typeface="BIZ UDPGothic" pitchFamily="34" charset="-120"/>
               </a:rPr>
               <a:t>外国マネーが住宅価格を押し上げている</a:t>
             </a:r>
@@ -12041,11 +12041,11 @@
             <a:avLst/>
           </a:prstGeom>
           <a:solidFill>
-            <a:srgbClr val="2E2E2E"/>
+            <a:srgbClr val="DDE0E6"/>
           </a:solidFill>
           <a:ln w="12700">
             <a:solidFill>
-              <a:srgbClr val="2E2E2E"/>
+              <a:srgbClr val="DDE0E6"/>
             </a:solidFill>
             <a:prstDash val="solid"/>
           </a:ln>
@@ -12078,11 +12078,11 @@
             <a:r>
               <a:rPr lang="en-US" sz="1100" dirty="0">
                 <a:solidFill>
-                  <a:srgbClr val="CCCCCC"/>
-                </a:solidFill>
-                <a:latin typeface="Arial" pitchFamily="34" charset="0"/>
-                <a:ea typeface="Arial" pitchFamily="34" charset="-122"/>
-                <a:cs typeface="Arial" pitchFamily="34" charset="-120"/>
+                  <a:srgbClr val="2B2F36"/>
+                </a:solidFill>
+                <a:latin typeface="Arial" pitchFamily="34" charset="0"/>
+                <a:ea typeface="BIZ UDPGothic" pitchFamily="34" charset="-122"/>
+                <a:cs typeface="BIZ UDPGothic" pitchFamily="34" charset="-120"/>
               </a:rPr>
               <a:t>投資目的の外国マネーが都心の高級マンション市場に流れ込み、日本人が家を買えなくなっている。</a:t>
             </a:r>
@@ -12107,11 +12107,11 @@
             </a:avLst>
           </a:prstGeom>
           <a:solidFill>
-            <a:srgbClr val="1A0808"/>
+            <a:srgbClr val="FCEBEB"/>
           </a:solidFill>
           <a:ln w="12700">
             <a:solidFill>
-              <a:srgbClr val="2E2E2E"/>
+              <a:srgbClr val="DDE0E6"/>
             </a:solidFill>
             <a:prstDash val="solid"/>
           </a:ln>
@@ -12144,11 +12144,11 @@
             <a:r>
               <a:rPr lang="en-US" sz="2200" b="1" dirty="0">
                 <a:solidFill>
-                  <a:srgbClr val="D62828"/>
-                </a:solidFill>
-                <a:latin typeface="Cambria" pitchFamily="34" charset="0"/>
-                <a:ea typeface="Cambria" pitchFamily="34" charset="-122"/>
-                <a:cs typeface="Cambria" pitchFamily="34" charset="-120"/>
+                  <a:srgbClr val="C8161D"/>
+                </a:solidFill>
+                <a:latin typeface="BIZ UDPGothic" pitchFamily="34" charset="0"/>
+                <a:ea typeface="BIZ UDPGothic" pitchFamily="34" charset="-122"/>
+                <a:cs typeface="BIZ UDPGothic" pitchFamily="34" charset="-120"/>
               </a:rPr>
               <a:t>2〜4割</a:t>
             </a:r>
@@ -12171,11 +12171,11 @@
             <a:avLst/>
           </a:prstGeom>
           <a:solidFill>
-            <a:srgbClr val="2E2E2E"/>
+            <a:srgbClr val="DDE0E6"/>
           </a:solidFill>
           <a:ln w="12700">
             <a:solidFill>
-              <a:srgbClr val="2E2E2E"/>
+              <a:srgbClr val="DDE0E6"/>
             </a:solidFill>
             <a:prstDash val="solid"/>
           </a:ln>
@@ -12208,11 +12208,11 @@
             <a:r>
               <a:rPr lang="en-US" sz="1200" b="1" dirty="0">
                 <a:solidFill>
-                  <a:srgbClr val="F5F5F0"/>
-                </a:solidFill>
-                <a:latin typeface="Cambria" pitchFamily="34" charset="0"/>
-                <a:ea typeface="Cambria" pitchFamily="34" charset="-122"/>
-                <a:cs typeface="Cambria" pitchFamily="34" charset="-120"/>
+                  <a:srgbClr val="16181D"/>
+                </a:solidFill>
+                <a:latin typeface="BIZ UDPGothic" pitchFamily="34" charset="0"/>
+                <a:ea typeface="BIZ UDPGothic" pitchFamily="34" charset="-122"/>
+                <a:cs typeface="BIZ UDPGothic" pitchFamily="34" charset="-120"/>
               </a:rPr>
               <a:t>都心3区の億ションの購入者に占める外国人の割合</a:t>
             </a:r>
@@ -12247,11 +12247,11 @@
             <a:r>
               <a:rPr lang="en-US" sz="1000" dirty="0">
                 <a:solidFill>
-                  <a:srgbClr val="CCCCCC"/>
-                </a:solidFill>
-                <a:latin typeface="Arial" pitchFamily="34" charset="0"/>
-                <a:ea typeface="Arial" pitchFamily="34" charset="-122"/>
-                <a:cs typeface="Arial" pitchFamily="34" charset="-120"/>
+                  <a:srgbClr val="2B2F36"/>
+                </a:solidFill>
+                <a:latin typeface="Arial" pitchFamily="34" charset="0"/>
+                <a:ea typeface="BIZ UDPGothic" pitchFamily="34" charset="-122"/>
+                <a:cs typeface="BIZ UDPGothic" pitchFamily="34" charset="-120"/>
               </a:rPr>
               <a:t>三菱UFJ信託銀行の業界調査（2024年度）。千代田・港・渋谷の3区が対象</a:t>
             </a:r>
@@ -12276,11 +12276,11 @@
             </a:avLst>
           </a:prstGeom>
           <a:solidFill>
-            <a:srgbClr val="1A0808"/>
+            <a:srgbClr val="FCEBEB"/>
           </a:solidFill>
           <a:ln w="12700">
             <a:solidFill>
-              <a:srgbClr val="2E2E2E"/>
+              <a:srgbClr val="DDE0E6"/>
             </a:solidFill>
             <a:prstDash val="solid"/>
           </a:ln>
@@ -12313,11 +12313,11 @@
             <a:r>
               <a:rPr lang="en-US" sz="2200" b="1" dirty="0">
                 <a:solidFill>
-                  <a:srgbClr val="D62828"/>
-                </a:solidFill>
-                <a:latin typeface="Cambria" pitchFamily="34" charset="0"/>
-                <a:ea typeface="Cambria" pitchFamily="34" charset="-122"/>
-                <a:cs typeface="Cambria" pitchFamily="34" charset="-120"/>
+                  <a:srgbClr val="C8161D"/>
+                </a:solidFill>
+                <a:latin typeface="BIZ UDPGothic" pitchFamily="34" charset="0"/>
+                <a:ea typeface="BIZ UDPGothic" pitchFamily="34" charset="-122"/>
+                <a:cs typeface="BIZ UDPGothic" pitchFamily="34" charset="-120"/>
               </a:rPr>
               <a:t>7.5%</a:t>
             </a:r>
@@ -12340,11 +12340,11 @@
             <a:avLst/>
           </a:prstGeom>
           <a:solidFill>
-            <a:srgbClr val="2E2E2E"/>
+            <a:srgbClr val="DDE0E6"/>
           </a:solidFill>
           <a:ln w="12700">
             <a:solidFill>
-              <a:srgbClr val="2E2E2E"/>
+              <a:srgbClr val="DDE0E6"/>
             </a:solidFill>
             <a:prstDash val="solid"/>
           </a:ln>
@@ -12377,11 +12377,11 @@
             <a:r>
               <a:rPr lang="en-US" sz="1200" b="1" dirty="0">
                 <a:solidFill>
-                  <a:srgbClr val="F5F5F0"/>
-                </a:solidFill>
-                <a:latin typeface="Cambria" pitchFamily="34" charset="0"/>
-                <a:ea typeface="Cambria" pitchFamily="34" charset="-122"/>
-                <a:cs typeface="Cambria" pitchFamily="34" charset="-120"/>
+                  <a:srgbClr val="16181D"/>
+                </a:solidFill>
+                <a:latin typeface="BIZ UDPGothic" pitchFamily="34" charset="0"/>
+                <a:ea typeface="BIZ UDPGothic" pitchFamily="34" charset="-122"/>
+                <a:cs typeface="BIZ UDPGothic" pitchFamily="34" charset="-120"/>
               </a:rPr>
               <a:t>都心6区の新築マンション取得に占める国外居住者の割合</a:t>
             </a:r>
@@ -12416,11 +12416,11 @@
             <a:r>
               <a:rPr lang="en-US" sz="1000" dirty="0">
                 <a:solidFill>
-                  <a:srgbClr val="CCCCCC"/>
-                </a:solidFill>
-                <a:latin typeface="Arial" pitchFamily="34" charset="0"/>
-                <a:ea typeface="Arial" pitchFamily="34" charset="-122"/>
-                <a:cs typeface="Arial" pitchFamily="34" charset="-120"/>
+                  <a:srgbClr val="2B2F36"/>
+                </a:solidFill>
+                <a:latin typeface="Arial" pitchFamily="34" charset="0"/>
+                <a:ea typeface="BIZ UDPGothic" pitchFamily="34" charset="-122"/>
+                <a:cs typeface="BIZ UDPGothic" pitchFamily="34" charset="-120"/>
               </a:rPr>
               <a:t>国土交通省の登記調査（2025年1〜6月）。国全体では3.5%だが都心ほど高い</a:t>
             </a:r>
@@ -12445,11 +12445,11 @@
             </a:avLst>
           </a:prstGeom>
           <a:solidFill>
-            <a:srgbClr val="1A0808"/>
+            <a:srgbClr val="FCEBEB"/>
           </a:solidFill>
           <a:ln w="12700">
             <a:solidFill>
-              <a:srgbClr val="2E2E2E"/>
+              <a:srgbClr val="DDE0E6"/>
             </a:solidFill>
             <a:prstDash val="solid"/>
           </a:ln>
@@ -12482,11 +12482,11 @@
             <a:r>
               <a:rPr lang="en-US" sz="2200" b="1" dirty="0">
                 <a:solidFill>
-                  <a:srgbClr val="D62828"/>
-                </a:solidFill>
-                <a:latin typeface="Cambria" pitchFamily="34" charset="0"/>
-                <a:ea typeface="Cambria" pitchFamily="34" charset="-122"/>
-                <a:cs typeface="Cambria" pitchFamily="34" charset="-120"/>
+                  <a:srgbClr val="C8161D"/>
+                </a:solidFill>
+                <a:latin typeface="BIZ UDPGothic" pitchFamily="34" charset="0"/>
+                <a:ea typeface="BIZ UDPGothic" pitchFamily="34" charset="-122"/>
+                <a:cs typeface="BIZ UDPGothic" pitchFamily="34" charset="-120"/>
               </a:rPr>
               <a:t>約2.3億円</a:t>
             </a:r>
@@ -12509,11 +12509,11 @@
             <a:avLst/>
           </a:prstGeom>
           <a:solidFill>
-            <a:srgbClr val="2E2E2E"/>
+            <a:srgbClr val="DDE0E6"/>
           </a:solidFill>
           <a:ln w="12700">
             <a:solidFill>
-              <a:srgbClr val="2E2E2E"/>
+              <a:srgbClr val="DDE0E6"/>
             </a:solidFill>
             <a:prstDash val="solid"/>
           </a:ln>
@@ -12546,11 +12546,11 @@
             <a:r>
               <a:rPr lang="en-US" sz="1200" b="1" dirty="0">
                 <a:solidFill>
-                  <a:srgbClr val="F5F5F0"/>
-                </a:solidFill>
-                <a:latin typeface="Cambria" pitchFamily="34" charset="0"/>
-                <a:ea typeface="Cambria" pitchFamily="34" charset="-122"/>
-                <a:cs typeface="Cambria" pitchFamily="34" charset="-120"/>
+                  <a:srgbClr val="16181D"/>
+                </a:solidFill>
+                <a:latin typeface="BIZ UDPGothic" pitchFamily="34" charset="0"/>
+                <a:ea typeface="BIZ UDPGothic" pitchFamily="34" charset="-122"/>
+                <a:cs typeface="BIZ UDPGothic" pitchFamily="34" charset="-120"/>
               </a:rPr>
               <a:t>都心3区の新築マンションの平均価格</a:t>
             </a:r>
@@ -12585,11 +12585,11 @@
             <a:r>
               <a:rPr lang="en-US" sz="1000" dirty="0">
                 <a:solidFill>
-                  <a:srgbClr val="CCCCCC"/>
-                </a:solidFill>
-                <a:latin typeface="Arial" pitchFamily="34" charset="0"/>
-                <a:ea typeface="Arial" pitchFamily="34" charset="-122"/>
-                <a:cs typeface="Arial" pitchFamily="34" charset="-120"/>
+                  <a:srgbClr val="2B2F36"/>
+                </a:solidFill>
+                <a:latin typeface="Arial" pitchFamily="34" charset="0"/>
+                <a:ea typeface="BIZ UDPGothic" pitchFamily="34" charset="-122"/>
+                <a:cs typeface="BIZ UDPGothic" pitchFamily="34" charset="-120"/>
               </a:rPr>
               <a:t>普通の共働き夫婦でも手が届かない水準。低金利＋外国マネーの両方が価格を押し上げている</a:t>
             </a:r>
@@ -12611,7 +12611,7 @@
     <p:bg>
       <p:bgPr>
         <a:solidFill>
-          <a:srgbClr val="0A0A0A"/>
+          <a:srgbClr val="F5F6F8"/>
         </a:solidFill>
       </p:bgPr>
     </p:bg>
@@ -12656,11 +12656,11 @@
             <a:r>
               <a:rPr lang="en-US" sz="900" b="1" spc="400" kern="0" dirty="0">
                 <a:solidFill>
-                  <a:srgbClr val="D62828"/>
-                </a:solidFill>
-                <a:latin typeface="Arial" pitchFamily="34" charset="0"/>
-                <a:ea typeface="Arial" pitchFamily="34" charset="-122"/>
-                <a:cs typeface="Arial" pitchFamily="34" charset="-120"/>
+                  <a:srgbClr val="C8161D"/>
+                </a:solidFill>
+                <a:latin typeface="Arial" pitchFamily="34" charset="0"/>
+                <a:ea typeface="BIZ UDPGothic" pitchFamily="34" charset="-122"/>
+                <a:cs typeface="BIZ UDPGothic" pitchFamily="34" charset="-120"/>
               </a:rPr>
               <a:t>OVERVIEW</a:t>
             </a:r>
@@ -12695,11 +12695,11 @@
             <a:r>
               <a:rPr lang="en-US" sz="2800" b="1" dirty="0">
                 <a:solidFill>
-                  <a:srgbClr val="F5F5F0"/>
-                </a:solidFill>
-                <a:latin typeface="Cambria" pitchFamily="34" charset="0"/>
-                <a:ea typeface="Cambria" pitchFamily="34" charset="-122"/>
-                <a:cs typeface="Cambria" pitchFamily="34" charset="-120"/>
+                  <a:srgbClr val="16181D"/>
+                </a:solidFill>
+                <a:latin typeface="BIZ UDPGothic" pitchFamily="34" charset="0"/>
+                <a:ea typeface="BIZ UDPGothic" pitchFamily="34" charset="-122"/>
+                <a:cs typeface="BIZ UDPGothic" pitchFamily="34" charset="-120"/>
               </a:rPr>
               <a:t>この提言のルール：全体像</a:t>
             </a:r>
@@ -12722,11 +12722,11 @@
             <a:avLst/>
           </a:prstGeom>
           <a:solidFill>
-            <a:srgbClr val="2E2E2E"/>
+            <a:srgbClr val="DDE0E6"/>
           </a:solidFill>
           <a:ln w="12700">
             <a:solidFill>
-              <a:srgbClr val="2E2E2E"/>
+              <a:srgbClr val="DDE0E6"/>
             </a:solidFill>
             <a:prstDash val="solid"/>
           </a:ln>
@@ -12759,11 +12759,11 @@
             <a:r>
               <a:rPr lang="en-US" sz="1100" dirty="0">
                 <a:solidFill>
-                  <a:srgbClr val="CCCCCC"/>
-                </a:solidFill>
-                <a:latin typeface="Arial" pitchFamily="34" charset="0"/>
-                <a:ea typeface="Arial" pitchFamily="34" charset="-122"/>
-                <a:cs typeface="Arial" pitchFamily="34" charset="-120"/>
+                  <a:srgbClr val="2B2F36"/>
+                </a:solidFill>
+                <a:latin typeface="Arial" pitchFamily="34" charset="0"/>
+                <a:ea typeface="BIZ UDPGothic" pitchFamily="34" charset="-122"/>
+                <a:cs typeface="BIZ UDPGothic" pitchFamily="34" charset="-120"/>
               </a:rPr>
               <a:t>土地とマンションで、それぞれ別の考え方でルールを作る。両方合わせて「外国マネーから国土を守る二重の防波堤」にする。</a:t>
             </a:r>
@@ -12788,11 +12788,11 @@
             </a:avLst>
           </a:prstGeom>
           <a:solidFill>
-            <a:srgbClr val="141414"/>
+            <a:srgbClr val="FFFFFF"/>
           </a:solidFill>
           <a:ln w="12700">
             <a:solidFill>
-              <a:srgbClr val="2E2E2E"/>
+              <a:srgbClr val="DDE0E6"/>
             </a:solidFill>
             <a:prstDash val="solid"/>
           </a:ln>
@@ -12825,11 +12825,11 @@
             <a:r>
               <a:rPr lang="en-US" sz="1400" b="1" dirty="0">
                 <a:solidFill>
-                  <a:srgbClr val="F5F5F0"/>
-                </a:solidFill>
-                <a:latin typeface="Cambria" pitchFamily="34" charset="0"/>
-                <a:ea typeface="Cambria" pitchFamily="34" charset="-122"/>
-                <a:cs typeface="Cambria" pitchFamily="34" charset="-120"/>
+                  <a:srgbClr val="16181D"/>
+                </a:solidFill>
+                <a:latin typeface="BIZ UDPGothic" pitchFamily="34" charset="0"/>
+                <a:ea typeface="BIZ UDPGothic" pitchFamily="34" charset="-122"/>
+                <a:cs typeface="BIZ UDPGothic" pitchFamily="34" charset="-120"/>
               </a:rPr>
               <a:t>土地（一戸建て等）</a:t>
             </a:r>
@@ -12852,11 +12852,11 @@
             <a:avLst/>
           </a:prstGeom>
           <a:solidFill>
-            <a:srgbClr val="2E2E2E"/>
+            <a:srgbClr val="DDE0E6"/>
           </a:solidFill>
           <a:ln w="12700">
             <a:solidFill>
-              <a:srgbClr val="2E2E2E"/>
+              <a:srgbClr val="DDE0E6"/>
             </a:solidFill>
             <a:prstDash val="solid"/>
           </a:ln>
@@ -12893,11 +12893,11 @@
             <a:r>
               <a:rPr lang="en-US" sz="1100" dirty="0">
                 <a:solidFill>
-                  <a:srgbClr val="CCCCCC"/>
-                </a:solidFill>
-                <a:latin typeface="Arial" pitchFamily="34" charset="0"/>
-                <a:ea typeface="Arial" pitchFamily="34" charset="-122"/>
-                <a:cs typeface="Arial" pitchFamily="34" charset="-120"/>
+                  <a:srgbClr val="2B2F36"/>
+                </a:solidFill>
+                <a:latin typeface="Arial" pitchFamily="34" charset="0"/>
+                <a:ea typeface="BIZ UDPGothic" pitchFamily="34" charset="-122"/>
+                <a:cs typeface="BIZ UDPGothic" pitchFamily="34" charset="-120"/>
               </a:rPr>
               <a:t>国籍・資本の割合でルールを決める</a:t>
             </a:r>
@@ -12914,11 +12914,11 @@
             <a:r>
               <a:rPr lang="en-US" sz="1100" dirty="0">
                 <a:solidFill>
-                  <a:srgbClr val="CCCCCC"/>
-                </a:solidFill>
-                <a:latin typeface="Arial" pitchFamily="34" charset="0"/>
-                <a:ea typeface="Arial" pitchFamily="34" charset="-122"/>
-                <a:cs typeface="Arial" pitchFamily="34" charset="-120"/>
+                  <a:srgbClr val="2B2F36"/>
+                </a:solidFill>
+                <a:latin typeface="Arial" pitchFamily="34" charset="0"/>
+                <a:ea typeface="BIZ UDPGothic" pitchFamily="34" charset="-122"/>
+                <a:cs typeface="BIZ UDPGothic" pitchFamily="34" charset="-120"/>
               </a:rPr>
               <a:t>日本国籍・永住者・外国資本15%以下の日本法人だけが買える</a:t>
             </a:r>
@@ -12935,11 +12935,11 @@
             <a:r>
               <a:rPr lang="en-US" sz="1100" dirty="0">
                 <a:solidFill>
-                  <a:srgbClr val="CCCCCC"/>
-                </a:solidFill>
-                <a:latin typeface="Arial" pitchFamily="34" charset="0"/>
-                <a:ea typeface="Arial" pitchFamily="34" charset="-122"/>
-                <a:cs typeface="Arial" pitchFamily="34" charset="-120"/>
+                  <a:srgbClr val="2B2F36"/>
+                </a:solidFill>
+                <a:latin typeface="Arial" pitchFamily="34" charset="0"/>
+                <a:ea typeface="BIZ UDPGothic" pitchFamily="34" charset="-122"/>
+                <a:cs typeface="BIZ UDPGothic" pitchFamily="34" charset="-120"/>
               </a:rPr>
               <a:t>重要エリア（水源地・離島等）は購入も賃貸も全面禁止</a:t>
             </a:r>
@@ -12956,11 +12956,11 @@
             <a:r>
               <a:rPr lang="en-US" sz="1100" dirty="0">
                 <a:solidFill>
-                  <a:srgbClr val="CCCCCC"/>
-                </a:solidFill>
-                <a:latin typeface="Arial" pitchFamily="34" charset="0"/>
-                <a:ea typeface="Arial" pitchFamily="34" charset="-122"/>
-                <a:cs typeface="Arial" pitchFamily="34" charset="-120"/>
+                  <a:srgbClr val="2B2F36"/>
+                </a:solidFill>
+                <a:latin typeface="Arial" pitchFamily="34" charset="0"/>
+                <a:ea typeface="BIZ UDPGothic" pitchFamily="34" charset="-122"/>
+                <a:cs typeface="BIZ UDPGothic" pitchFamily="34" charset="-120"/>
               </a:rPr>
               <a:t>今の外国人所有者は5年以内に売ること</a:t>
             </a:r>
@@ -12985,11 +12985,11 @@
             </a:avLst>
           </a:prstGeom>
           <a:solidFill>
-            <a:srgbClr val="141420"/>
+            <a:srgbClr val="E9EFF8"/>
           </a:solidFill>
           <a:ln w="12700">
             <a:solidFill>
-              <a:srgbClr val="2E2E2E"/>
+              <a:srgbClr val="DDE0E6"/>
             </a:solidFill>
             <a:prstDash val="solid"/>
           </a:ln>
@@ -13022,11 +13022,11 @@
             <a:r>
               <a:rPr lang="en-US" sz="1400" b="1" dirty="0">
                 <a:solidFill>
-                  <a:srgbClr val="4090D0"/>
-                </a:solidFill>
-                <a:latin typeface="Cambria" pitchFamily="34" charset="0"/>
-                <a:ea typeface="Cambria" pitchFamily="34" charset="-122"/>
-                <a:cs typeface="Cambria" pitchFamily="34" charset="-120"/>
+                  <a:srgbClr val="1D4F91"/>
+                </a:solidFill>
+                <a:latin typeface="BIZ UDPGothic" pitchFamily="34" charset="0"/>
+                <a:ea typeface="BIZ UDPGothic" pitchFamily="34" charset="-122"/>
+                <a:cs typeface="BIZ UDPGothic" pitchFamily="34" charset="-120"/>
               </a:rPr>
               <a:t>マンション（区分所有）</a:t>
             </a:r>
@@ -13049,11 +13049,11 @@
             <a:avLst/>
           </a:prstGeom>
           <a:solidFill>
-            <a:srgbClr val="2E2E2E"/>
+            <a:srgbClr val="DDE0E6"/>
           </a:solidFill>
           <a:ln w="12700">
             <a:solidFill>
-              <a:srgbClr val="2E2E2E"/>
+              <a:srgbClr val="DDE0E6"/>
             </a:solidFill>
             <a:prstDash val="solid"/>
           </a:ln>
@@ -13090,11 +13090,11 @@
             <a:r>
               <a:rPr lang="en-US" sz="1100" dirty="0">
                 <a:solidFill>
-                  <a:srgbClr val="CCCCCC"/>
-                </a:solidFill>
-                <a:latin typeface="Arial" pitchFamily="34" charset="0"/>
-                <a:ea typeface="Arial" pitchFamily="34" charset="-122"/>
-                <a:cs typeface="Arial" pitchFamily="34" charset="-120"/>
+                  <a:srgbClr val="2B2F36"/>
+                </a:solidFill>
+                <a:latin typeface="Arial" pitchFamily="34" charset="0"/>
+                <a:ea typeface="BIZ UDPGothic" pitchFamily="34" charset="-122"/>
+                <a:cs typeface="BIZ UDPGothic" pitchFamily="34" charset="-120"/>
               </a:rPr>
               <a:t>「住む目的で買うか」でルールを決める</a:t>
             </a:r>
@@ -13111,11 +13111,11 @@
             <a:r>
               <a:rPr lang="en-US" sz="1100" dirty="0">
                 <a:solidFill>
-                  <a:srgbClr val="CCCCCC"/>
-                </a:solidFill>
-                <a:latin typeface="Arial" pitchFamily="34" charset="0"/>
-                <a:ea typeface="Arial" pitchFamily="34" charset="-122"/>
-                <a:cs typeface="Arial" pitchFamily="34" charset="-120"/>
+                  <a:srgbClr val="2B2F36"/>
+                </a:solidFill>
+                <a:latin typeface="Arial" pitchFamily="34" charset="0"/>
+                <a:ea typeface="BIZ UDPGothic" pitchFamily="34" charset="-122"/>
+                <a:cs typeface="BIZ UDPGothic" pitchFamily="34" charset="-120"/>
               </a:rPr>
               <a:t>居住目的なら国籍を問わず誰でも買える</a:t>
             </a:r>
@@ -13132,11 +13132,11 @@
             <a:r>
               <a:rPr lang="en-US" sz="1100" dirty="0">
                 <a:solidFill>
-                  <a:srgbClr val="CCCCCC"/>
-                </a:solidFill>
-                <a:latin typeface="Arial" pitchFamily="34" charset="0"/>
-                <a:ea typeface="Arial" pitchFamily="34" charset="-122"/>
-                <a:cs typeface="Arial" pitchFamily="34" charset="-120"/>
+                  <a:srgbClr val="2B2F36"/>
+                </a:solidFill>
+                <a:latin typeface="Arial" pitchFamily="34" charset="0"/>
+                <a:ea typeface="BIZ UDPGothic" pitchFamily="34" charset="-122"/>
+                <a:cs typeface="BIZ UDPGothic" pitchFamily="34" charset="-120"/>
               </a:rPr>
               <a:t>投資目的（買って他人に貸す）は外国人は不可</a:t>
             </a:r>
@@ -13153,11 +13153,11 @@
             <a:r>
               <a:rPr lang="en-US" sz="1100" dirty="0">
                 <a:solidFill>
-                  <a:srgbClr val="CCCCCC"/>
-                </a:solidFill>
-                <a:latin typeface="Arial" pitchFamily="34" charset="0"/>
-                <a:ea typeface="Arial" pitchFamily="34" charset="-122"/>
-                <a:cs typeface="Arial" pitchFamily="34" charset="-120"/>
+                  <a:srgbClr val="2B2F36"/>
+                </a:solidFill>
+                <a:latin typeface="Arial" pitchFamily="34" charset="0"/>
+                <a:ea typeface="BIZ UDPGothic" pitchFamily="34" charset="-122"/>
+                <a:cs typeface="BIZ UDPGothic" pitchFamily="34" charset="-120"/>
               </a:rPr>
               <a:t>購入後3年間で400日以上住み続けなければならない</a:t>
             </a:r>
@@ -13179,7 +13179,7 @@
     <p:bg>
       <p:bgPr>
         <a:solidFill>
-          <a:srgbClr val="0A0A0A"/>
+          <a:srgbClr val="F5F6F8"/>
         </a:solidFill>
       </p:bgPr>
     </p:bg>
@@ -13224,11 +13224,11 @@
             <a:r>
               <a:rPr lang="en-US" sz="900" b="1" spc="400" kern="0" dirty="0">
                 <a:solidFill>
-                  <a:srgbClr val="D62828"/>
-                </a:solidFill>
-                <a:latin typeface="Arial" pitchFamily="34" charset="0"/>
-                <a:ea typeface="Arial" pitchFamily="34" charset="-122"/>
-                <a:cs typeface="Arial" pitchFamily="34" charset="-120"/>
+                  <a:srgbClr val="C8161D"/>
+                </a:solidFill>
+                <a:latin typeface="Arial" pitchFamily="34" charset="0"/>
+                <a:ea typeface="BIZ UDPGothic" pitchFamily="34" charset="-122"/>
+                <a:cs typeface="BIZ UDPGothic" pitchFamily="34" charset="-120"/>
               </a:rPr>
               <a:t>RULE 01</a:t>
             </a:r>
@@ -13263,11 +13263,11 @@
             <a:r>
               <a:rPr lang="en-US" sz="2800" b="1" dirty="0">
                 <a:solidFill>
-                  <a:srgbClr val="F5F5F0"/>
-                </a:solidFill>
-                <a:latin typeface="Cambria" pitchFamily="34" charset="0"/>
-                <a:ea typeface="Cambria" pitchFamily="34" charset="-122"/>
-                <a:cs typeface="Cambria" pitchFamily="34" charset="-120"/>
+                  <a:srgbClr val="16181D"/>
+                </a:solidFill>
+                <a:latin typeface="BIZ UDPGothic" pitchFamily="34" charset="0"/>
+                <a:ea typeface="BIZ UDPGothic" pitchFamily="34" charset="-122"/>
+                <a:cs typeface="BIZ UDPGothic" pitchFamily="34" charset="-120"/>
               </a:rPr>
               <a:t>土地を買えるのは誰？（一般エリア）</a:t>
             </a:r>
@@ -13290,11 +13290,11 @@
             <a:avLst/>
           </a:prstGeom>
           <a:solidFill>
-            <a:srgbClr val="2E2E2E"/>
+            <a:srgbClr val="DDE0E6"/>
           </a:solidFill>
           <a:ln w="12700">
             <a:solidFill>
-              <a:srgbClr val="2E2E2E"/>
+              <a:srgbClr val="DDE0E6"/>
             </a:solidFill>
             <a:prstDash val="solid"/>
           </a:ln>
@@ -13327,11 +13327,11 @@
             <a:r>
               <a:rPr lang="en-US" sz="1100" dirty="0">
                 <a:solidFill>
-                  <a:srgbClr val="CCCCCC"/>
-                </a:solidFill>
-                <a:latin typeface="Arial" pitchFamily="34" charset="0"/>
-                <a:ea typeface="Arial" pitchFamily="34" charset="-122"/>
-                <a:cs typeface="Arial" pitchFamily="34" charset="-120"/>
+                  <a:srgbClr val="2B2F36"/>
+                </a:solidFill>
+                <a:latin typeface="Arial" pitchFamily="34" charset="0"/>
+                <a:ea typeface="BIZ UDPGothic" pitchFamily="34" charset="-122"/>
+                <a:cs typeface="BIZ UDPGothic" pitchFamily="34" charset="-120"/>
               </a:rPr>
               <a:t>日本の土地は、日本とのつながりが証明できる人・法人だけが買える。それ以外は「借りる」ことしかできない。</a:t>
             </a:r>
@@ -13356,11 +13356,11 @@
             </a:avLst>
           </a:prstGeom>
           <a:solidFill>
-            <a:srgbClr val="081808"/>
+            <a:srgbClr val="E9EFF8"/>
           </a:solidFill>
           <a:ln w="12700">
             <a:solidFill>
-              <a:srgbClr val="2E2E2E"/>
+              <a:srgbClr val="DDE0E6"/>
             </a:solidFill>
             <a:prstDash val="solid"/>
           </a:ln>
@@ -13393,11 +13393,11 @@
             <a:r>
               <a:rPr lang="en-US" sz="1200" dirty="0">
                 <a:solidFill>
-                  <a:srgbClr val="4CAF50"/>
-                </a:solidFill>
-                <a:latin typeface="Arial" pitchFamily="34" charset="0"/>
-                <a:ea typeface="Arial" pitchFamily="34" charset="-122"/>
-                <a:cs typeface="Arial" pitchFamily="34" charset="-120"/>
+                  <a:srgbClr val="1D4F91"/>
+                </a:solidFill>
+                <a:latin typeface="Arial" pitchFamily="34" charset="0"/>
+                <a:ea typeface="BIZ UDPGothic" pitchFamily="34" charset="-122"/>
+                <a:cs typeface="BIZ UDPGothic" pitchFamily="34" charset="-120"/>
               </a:rPr>
               <a:t>✅</a:t>
             </a:r>
@@ -13432,11 +13432,11 @@
             <a:r>
               <a:rPr lang="en-US" sz="1200" dirty="0">
                 <a:solidFill>
-                  <a:srgbClr val="CCCCCC"/>
-                </a:solidFill>
-                <a:latin typeface="Arial" pitchFamily="34" charset="0"/>
-                <a:ea typeface="Arial" pitchFamily="34" charset="-122"/>
-                <a:cs typeface="Arial" pitchFamily="34" charset="-120"/>
+                  <a:srgbClr val="2B2F36"/>
+                </a:solidFill>
+                <a:latin typeface="Arial" pitchFamily="34" charset="0"/>
+                <a:ea typeface="BIZ UDPGothic" pitchFamily="34" charset="-122"/>
+                <a:cs typeface="BIZ UDPGothic" pitchFamily="34" charset="-120"/>
               </a:rPr>
               <a:t>日本国籍を持つ人（帰化した人を含む）</a:t>
             </a:r>
@@ -13461,11 +13461,11 @@
             </a:avLst>
           </a:prstGeom>
           <a:solidFill>
-            <a:srgbClr val="081808"/>
+            <a:srgbClr val="E9EFF8"/>
           </a:solidFill>
           <a:ln w="12700">
             <a:solidFill>
-              <a:srgbClr val="2E2E2E"/>
+              <a:srgbClr val="DDE0E6"/>
             </a:solidFill>
             <a:prstDash val="solid"/>
           </a:ln>
@@ -13498,11 +13498,11 @@
             <a:r>
               <a:rPr lang="en-US" sz="1200" dirty="0">
                 <a:solidFill>
-                  <a:srgbClr val="4CAF50"/>
-                </a:solidFill>
-                <a:latin typeface="Arial" pitchFamily="34" charset="0"/>
-                <a:ea typeface="Arial" pitchFamily="34" charset="-122"/>
-                <a:cs typeface="Arial" pitchFamily="34" charset="-120"/>
+                  <a:srgbClr val="1D4F91"/>
+                </a:solidFill>
+                <a:latin typeface="Arial" pitchFamily="34" charset="0"/>
+                <a:ea typeface="BIZ UDPGothic" pitchFamily="34" charset="-122"/>
+                <a:cs typeface="BIZ UDPGothic" pitchFamily="34" charset="-120"/>
               </a:rPr>
               <a:t>✅</a:t>
             </a:r>
@@ -13537,11 +13537,11 @@
             <a:r>
               <a:rPr lang="en-US" sz="1200" dirty="0">
                 <a:solidFill>
-                  <a:srgbClr val="CCCCCC"/>
-                </a:solidFill>
-                <a:latin typeface="Arial" pitchFamily="34" charset="0"/>
-                <a:ea typeface="Arial" pitchFamily="34" charset="-122"/>
-                <a:cs typeface="Arial" pitchFamily="34" charset="-120"/>
+                  <a:srgbClr val="2B2F36"/>
+                </a:solidFill>
+                <a:latin typeface="Arial" pitchFamily="34" charset="0"/>
+                <a:ea typeface="BIZ UDPGothic" pitchFamily="34" charset="-122"/>
+                <a:cs typeface="BIZ UDPGothic" pitchFamily="34" charset="-120"/>
               </a:rPr>
               <a:t>永住者（永住権を持つ人）</a:t>
             </a:r>
@@ -13566,11 +13566,11 @@
             </a:avLst>
           </a:prstGeom>
           <a:solidFill>
-            <a:srgbClr val="081808"/>
+            <a:srgbClr val="E9EFF8"/>
           </a:solidFill>
           <a:ln w="12700">
             <a:solidFill>
-              <a:srgbClr val="2E2E2E"/>
+              <a:srgbClr val="DDE0E6"/>
             </a:solidFill>
             <a:prstDash val="solid"/>
           </a:ln>
@@ -13603,11 +13603,11 @@
             <a:r>
               <a:rPr lang="en-US" sz="1200" dirty="0">
                 <a:solidFill>
-                  <a:srgbClr val="4CAF50"/>
-                </a:solidFill>
-                <a:latin typeface="Arial" pitchFamily="34" charset="0"/>
-                <a:ea typeface="Arial" pitchFamily="34" charset="-122"/>
-                <a:cs typeface="Arial" pitchFamily="34" charset="-120"/>
+                  <a:srgbClr val="1D4F91"/>
+                </a:solidFill>
+                <a:latin typeface="Arial" pitchFamily="34" charset="0"/>
+                <a:ea typeface="BIZ UDPGothic" pitchFamily="34" charset="-122"/>
+                <a:cs typeface="BIZ UDPGothic" pitchFamily="34" charset="-120"/>
               </a:rPr>
               <a:t>✅</a:t>
             </a:r>
@@ -13642,11 +13642,11 @@
             <a:r>
               <a:rPr lang="en-US" sz="1200" dirty="0">
                 <a:solidFill>
-                  <a:srgbClr val="CCCCCC"/>
-                </a:solidFill>
-                <a:latin typeface="Arial" pitchFamily="34" charset="0"/>
-                <a:ea typeface="Arial" pitchFamily="34" charset="-122"/>
-                <a:cs typeface="Arial" pitchFamily="34" charset="-120"/>
+                  <a:srgbClr val="2B2F36"/>
+                </a:solidFill>
+                <a:latin typeface="Arial" pitchFamily="34" charset="0"/>
+                <a:ea typeface="BIZ UDPGothic" pitchFamily="34" charset="-122"/>
+                <a:cs typeface="BIZ UDPGothic" pitchFamily="34" charset="-120"/>
               </a:rPr>
               <a:t>外国資本が15%以下の日本法人</a:t>
             </a:r>
@@ -13671,11 +13671,11 @@
             </a:avLst>
           </a:prstGeom>
           <a:solidFill>
-            <a:srgbClr val="1A0808"/>
+            <a:srgbClr val="FCEBEB"/>
           </a:solidFill>
           <a:ln w="12700">
             <a:solidFill>
-              <a:srgbClr val="2E2E2E"/>
+              <a:srgbClr val="DDE0E6"/>
             </a:solidFill>
             <a:prstDash val="solid"/>
           </a:ln>
@@ -13708,11 +13708,11 @@
             <a:r>
               <a:rPr lang="en-US" sz="1200" dirty="0">
                 <a:solidFill>
-                  <a:srgbClr val="D62828"/>
-                </a:solidFill>
-                <a:latin typeface="Arial" pitchFamily="34" charset="0"/>
-                <a:ea typeface="Arial" pitchFamily="34" charset="-122"/>
-                <a:cs typeface="Arial" pitchFamily="34" charset="-120"/>
+                  <a:srgbClr val="C8161D"/>
+                </a:solidFill>
+                <a:latin typeface="Arial" pitchFamily="34" charset="0"/>
+                <a:ea typeface="BIZ UDPGothic" pitchFamily="34" charset="-122"/>
+                <a:cs typeface="BIZ UDPGothic" pitchFamily="34" charset="-120"/>
               </a:rPr>
               <a:t>❌</a:t>
             </a:r>
@@ -13747,11 +13747,11 @@
             <a:r>
               <a:rPr lang="en-US" sz="1200" dirty="0">
                 <a:solidFill>
-                  <a:srgbClr val="CCCCCC"/>
-                </a:solidFill>
-                <a:latin typeface="Arial" pitchFamily="34" charset="0"/>
-                <a:ea typeface="Arial" pitchFamily="34" charset="-122"/>
-                <a:cs typeface="Arial" pitchFamily="34" charset="-120"/>
+                  <a:srgbClr val="2B2F36"/>
+                </a:solidFill>
+                <a:latin typeface="Arial" pitchFamily="34" charset="0"/>
+                <a:ea typeface="BIZ UDPGothic" pitchFamily="34" charset="-122"/>
+                <a:cs typeface="BIZ UDPGothic" pitchFamily="34" charset="-120"/>
               </a:rPr>
               <a:t>就労・留学・観光などの在留資格を持つ外国人</a:t>
             </a:r>
@@ -13776,11 +13776,11 @@
             </a:avLst>
           </a:prstGeom>
           <a:solidFill>
-            <a:srgbClr val="1A0808"/>
+            <a:srgbClr val="FCEBEB"/>
           </a:solidFill>
           <a:ln w="12700">
             <a:solidFill>
-              <a:srgbClr val="2E2E2E"/>
+              <a:srgbClr val="DDE0E6"/>
             </a:solidFill>
             <a:prstDash val="solid"/>
           </a:ln>
@@ -13813,11 +13813,11 @@
             <a:r>
               <a:rPr lang="en-US" sz="1200" dirty="0">
                 <a:solidFill>
-                  <a:srgbClr val="D62828"/>
-                </a:solidFill>
-                <a:latin typeface="Arial" pitchFamily="34" charset="0"/>
-                <a:ea typeface="Arial" pitchFamily="34" charset="-122"/>
-                <a:cs typeface="Arial" pitchFamily="34" charset="-120"/>
+                  <a:srgbClr val="C8161D"/>
+                </a:solidFill>
+                <a:latin typeface="Arial" pitchFamily="34" charset="0"/>
+                <a:ea typeface="BIZ UDPGothic" pitchFamily="34" charset="-122"/>
+                <a:cs typeface="BIZ UDPGothic" pitchFamily="34" charset="-120"/>
               </a:rPr>
               <a:t>❌</a:t>
             </a:r>
@@ -13852,11 +13852,11 @@
             <a:r>
               <a:rPr lang="en-US" sz="1200" dirty="0">
                 <a:solidFill>
-                  <a:srgbClr val="CCCCCC"/>
-                </a:solidFill>
-                <a:latin typeface="Arial" pitchFamily="34" charset="0"/>
-                <a:ea typeface="Arial" pitchFamily="34" charset="-122"/>
-                <a:cs typeface="Arial" pitchFamily="34" charset="-120"/>
+                  <a:srgbClr val="2B2F36"/>
+                </a:solidFill>
+                <a:latin typeface="Arial" pitchFamily="34" charset="0"/>
+                <a:ea typeface="BIZ UDPGothic" pitchFamily="34" charset="-122"/>
+                <a:cs typeface="BIZ UDPGothic" pitchFamily="34" charset="-120"/>
               </a:rPr>
               <a:t>外国法人</a:t>
             </a:r>
@@ -13881,11 +13881,11 @@
             </a:avLst>
           </a:prstGeom>
           <a:solidFill>
-            <a:srgbClr val="1A0808"/>
+            <a:srgbClr val="FCEBEB"/>
           </a:solidFill>
           <a:ln w="12700">
             <a:solidFill>
-              <a:srgbClr val="2E2E2E"/>
+              <a:srgbClr val="DDE0E6"/>
             </a:solidFill>
             <a:prstDash val="solid"/>
           </a:ln>
@@ -13918,11 +13918,11 @@
             <a:r>
               <a:rPr lang="en-US" sz="1200" dirty="0">
                 <a:solidFill>
-                  <a:srgbClr val="D62828"/>
-                </a:solidFill>
-                <a:latin typeface="Arial" pitchFamily="34" charset="0"/>
-                <a:ea typeface="Arial" pitchFamily="34" charset="-122"/>
-                <a:cs typeface="Arial" pitchFamily="34" charset="-120"/>
+                  <a:srgbClr val="C8161D"/>
+                </a:solidFill>
+                <a:latin typeface="Arial" pitchFamily="34" charset="0"/>
+                <a:ea typeface="BIZ UDPGothic" pitchFamily="34" charset="-122"/>
+                <a:cs typeface="BIZ UDPGothic" pitchFamily="34" charset="-120"/>
               </a:rPr>
               <a:t>❌</a:t>
             </a:r>
@@ -13957,11 +13957,11 @@
             <a:r>
               <a:rPr lang="en-US" sz="1200" dirty="0">
                 <a:solidFill>
-                  <a:srgbClr val="CCCCCC"/>
-                </a:solidFill>
-                <a:latin typeface="Arial" pitchFamily="34" charset="0"/>
-                <a:ea typeface="Arial" pitchFamily="34" charset="-122"/>
-                <a:cs typeface="Arial" pitchFamily="34" charset="-120"/>
+                  <a:srgbClr val="2B2F36"/>
+                </a:solidFill>
+                <a:latin typeface="Arial" pitchFamily="34" charset="0"/>
+                <a:ea typeface="BIZ UDPGothic" pitchFamily="34" charset="-122"/>
+                <a:cs typeface="BIZ UDPGothic" pitchFamily="34" charset="-120"/>
               </a:rPr>
               <a:t>外国資本が15%を超える日本法人</a:t>
             </a:r>
@@ -13983,7 +13983,7 @@
     <p:bg>
       <p:bgPr>
         <a:solidFill>
-          <a:srgbClr val="0A0A0A"/>
+          <a:srgbClr val="F5F6F8"/>
         </a:solidFill>
       </p:bgPr>
     </p:bg>
@@ -14028,11 +14028,11 @@
             <a:r>
               <a:rPr lang="en-US" sz="900" b="1" spc="400" kern="0" dirty="0">
                 <a:solidFill>
-                  <a:srgbClr val="D62828"/>
-                </a:solidFill>
-                <a:latin typeface="Arial" pitchFamily="34" charset="0"/>
-                <a:ea typeface="Arial" pitchFamily="34" charset="-122"/>
-                <a:cs typeface="Arial" pitchFamily="34" charset="-120"/>
+                  <a:srgbClr val="C8161D"/>
+                </a:solidFill>
+                <a:latin typeface="Arial" pitchFamily="34" charset="0"/>
+                <a:ea typeface="BIZ UDPGothic" pitchFamily="34" charset="-122"/>
+                <a:cs typeface="BIZ UDPGothic" pitchFamily="34" charset="-120"/>
               </a:rPr>
               <a:t>RULE 01 — DETAIL</a:t>
             </a:r>
@@ -14067,11 +14067,11 @@
             <a:r>
               <a:rPr lang="en-US" sz="2800" b="1" dirty="0">
                 <a:solidFill>
-                  <a:srgbClr val="F5F5F0"/>
-                </a:solidFill>
-                <a:latin typeface="Cambria" pitchFamily="34" charset="0"/>
-                <a:ea typeface="Cambria" pitchFamily="34" charset="-122"/>
-                <a:cs typeface="Cambria" pitchFamily="34" charset="-120"/>
+                  <a:srgbClr val="16181D"/>
+                </a:solidFill>
+                <a:latin typeface="BIZ UDPGothic" pitchFamily="34" charset="0"/>
+                <a:ea typeface="BIZ UDPGothic" pitchFamily="34" charset="-122"/>
+                <a:cs typeface="BIZ UDPGothic" pitchFamily="34" charset="-120"/>
               </a:rPr>
               <a:t>永住者ってどんな人？</a:t>
             </a:r>
@@ -14094,11 +14094,11 @@
             <a:avLst/>
           </a:prstGeom>
           <a:solidFill>
-            <a:srgbClr val="2E2E2E"/>
+            <a:srgbClr val="DDE0E6"/>
           </a:solidFill>
           <a:ln w="12700">
             <a:solidFill>
-              <a:srgbClr val="2E2E2E"/>
+              <a:srgbClr val="DDE0E6"/>
             </a:solidFill>
             <a:prstDash val="solid"/>
           </a:ln>
@@ -14131,11 +14131,11 @@
             <a:r>
               <a:rPr lang="en-US" sz="1100" dirty="0">
                 <a:solidFill>
-                  <a:srgbClr val="CCCCCC"/>
-                </a:solidFill>
-                <a:latin typeface="Arial" pitchFamily="34" charset="0"/>
-                <a:ea typeface="Arial" pitchFamily="34" charset="-122"/>
-                <a:cs typeface="Arial" pitchFamily="34" charset="-120"/>
+                  <a:srgbClr val="2B2F36"/>
+                </a:solidFill>
+                <a:latin typeface="Arial" pitchFamily="34" charset="0"/>
+                <a:ea typeface="BIZ UDPGothic" pitchFamily="34" charset="-122"/>
+                <a:cs typeface="BIZ UDPGothic" pitchFamily="34" charset="-120"/>
               </a:rPr>
               <a:t>「外国籍のまま日本に住み続けている人」のこと。日本国籍（帰化）とは別の制度。</a:t>
             </a:r>
@@ -14160,11 +14160,11 @@
             </a:avLst>
           </a:prstGeom>
           <a:solidFill>
-            <a:srgbClr val="1A1A1A"/>
+            <a:srgbClr val="FFFFFF"/>
           </a:solidFill>
           <a:ln w="12700">
             <a:solidFill>
-              <a:srgbClr val="2E2E2E"/>
+              <a:srgbClr val="DDE0E6"/>
             </a:solidFill>
             <a:prstDash val="solid"/>
           </a:ln>
@@ -14197,11 +14197,11 @@
             <a:r>
               <a:rPr lang="en-US" sz="1300" b="1" dirty="0">
                 <a:solidFill>
-                  <a:srgbClr val="D62828"/>
-                </a:solidFill>
-                <a:latin typeface="Cambria" pitchFamily="34" charset="0"/>
-                <a:ea typeface="Cambria" pitchFamily="34" charset="-122"/>
-                <a:cs typeface="Cambria" pitchFamily="34" charset="-120"/>
+                  <a:srgbClr val="C8161D"/>
+                </a:solidFill>
+                <a:latin typeface="BIZ UDPGothic" pitchFamily="34" charset="0"/>
+                <a:ea typeface="BIZ UDPGothic" pitchFamily="34" charset="-122"/>
+                <a:cs typeface="BIZ UDPGothic" pitchFamily="34" charset="-120"/>
               </a:rPr>
               <a:t>永住者とは</a:t>
             </a:r>
@@ -14236,11 +14236,11 @@
             <a:r>
               <a:rPr lang="en-US" sz="1100" dirty="0">
                 <a:solidFill>
-                  <a:srgbClr val="CCCCCC"/>
-                </a:solidFill>
-                <a:latin typeface="Arial" pitchFamily="34" charset="0"/>
-                <a:ea typeface="Arial" pitchFamily="34" charset="-122"/>
-                <a:cs typeface="Arial" pitchFamily="34" charset="-120"/>
+                  <a:srgbClr val="2B2F36"/>
+                </a:solidFill>
+                <a:latin typeface="Arial" pitchFamily="34" charset="0"/>
+                <a:ea typeface="BIZ UDPGothic" pitchFamily="34" charset="-122"/>
+                <a:cs typeface="BIZ UDPGothic" pitchFamily="34" charset="-120"/>
               </a:rPr>
               <a:t>日本国籍は取得せず（元の国籍のまま）、法務大臣の許可を得て、期限なく日本に住み続けられる資格を持つ人のこと。「永住権」とも呼ばれる</a:t>
             </a:r>
@@ -14265,11 +14265,11 @@
             </a:avLst>
           </a:prstGeom>
           <a:solidFill>
-            <a:srgbClr val="1A1A1A"/>
+            <a:srgbClr val="FFFFFF"/>
           </a:solidFill>
           <a:ln w="12700">
             <a:solidFill>
-              <a:srgbClr val="2E2E2E"/>
+              <a:srgbClr val="DDE0E6"/>
             </a:solidFill>
             <a:prstDash val="solid"/>
           </a:ln>
@@ -14302,11 +14302,11 @@
             <a:r>
               <a:rPr lang="en-US" sz="1300" b="1" dirty="0">
                 <a:solidFill>
-                  <a:srgbClr val="D62828"/>
-                </a:solidFill>
-                <a:latin typeface="Cambria" pitchFamily="34" charset="0"/>
-                <a:ea typeface="Cambria" pitchFamily="34" charset="-122"/>
-                <a:cs typeface="Cambria" pitchFamily="34" charset="-120"/>
+                  <a:srgbClr val="C8161D"/>
+                </a:solidFill>
+                <a:latin typeface="BIZ UDPGothic" pitchFamily="34" charset="0"/>
+                <a:ea typeface="BIZ UDPGothic" pitchFamily="34" charset="-122"/>
+                <a:cs typeface="BIZ UDPGothic" pitchFamily="34" charset="-120"/>
               </a:rPr>
               <a:t>取得のハードル（とても厳しい）</a:t>
             </a:r>
@@ -14341,11 +14341,11 @@
             <a:r>
               <a:rPr lang="en-US" sz="1100" dirty="0">
                 <a:solidFill>
-                  <a:srgbClr val="CCCCCC"/>
-                </a:solidFill>
-                <a:latin typeface="Arial" pitchFamily="34" charset="0"/>
-                <a:ea typeface="Arial" pitchFamily="34" charset="-122"/>
-                <a:cs typeface="Arial" pitchFamily="34" charset="-120"/>
+                  <a:srgbClr val="2B2F36"/>
+                </a:solidFill>
+                <a:latin typeface="Arial" pitchFamily="34" charset="0"/>
+                <a:ea typeface="BIZ UDPGothic" pitchFamily="34" charset="-122"/>
+                <a:cs typeface="BIZ UDPGothic" pitchFamily="34" charset="-120"/>
               </a:rPr>
               <a:t>原則として10年以上日本に住んでいること、素行が良いこと、税金・年金をしっかり払っていること、など国が厳しく審査する。誰でも取れるわけではない</a:t>
             </a:r>
@@ -14370,11 +14370,11 @@
             </a:avLst>
           </a:prstGeom>
           <a:solidFill>
-            <a:srgbClr val="1A1A1A"/>
+            <a:srgbClr val="FFFFFF"/>
           </a:solidFill>
           <a:ln w="12700">
             <a:solidFill>
-              <a:srgbClr val="2E2E2E"/>
+              <a:srgbClr val="DDE0E6"/>
             </a:solidFill>
             <a:prstDash val="solid"/>
           </a:ln>
@@ -14407,11 +14407,11 @@
             <a:r>
               <a:rPr lang="en-US" sz="1300" b="1" dirty="0">
                 <a:solidFill>
-                  <a:srgbClr val="D62828"/>
-                </a:solidFill>
-                <a:latin typeface="Cambria" pitchFamily="34" charset="0"/>
-                <a:ea typeface="Cambria" pitchFamily="34" charset="-122"/>
-                <a:cs typeface="Cambria" pitchFamily="34" charset="-120"/>
+                  <a:srgbClr val="C8161D"/>
+                </a:solidFill>
+                <a:latin typeface="BIZ UDPGothic" pitchFamily="34" charset="0"/>
+                <a:ea typeface="BIZ UDPGothic" pitchFamily="34" charset="-122"/>
+                <a:cs typeface="BIZ UDPGothic" pitchFamily="34" charset="-120"/>
               </a:rPr>
               <a:t>なぜ永住者は土地を買えるのか</a:t>
             </a:r>
@@ -14446,11 +14446,11 @@
             <a:r>
               <a:rPr lang="en-US" sz="1100" dirty="0">
                 <a:solidFill>
-                  <a:srgbClr val="CCCCCC"/>
-                </a:solidFill>
-                <a:latin typeface="Arial" pitchFamily="34" charset="0"/>
-                <a:ea typeface="Arial" pitchFamily="34" charset="-122"/>
-                <a:cs typeface="Arial" pitchFamily="34" charset="-120"/>
+                  <a:srgbClr val="2B2F36"/>
+                </a:solidFill>
+                <a:latin typeface="Arial" pitchFamily="34" charset="0"/>
+                <a:ea typeface="BIZ UDPGothic" pitchFamily="34" charset="-122"/>
+                <a:cs typeface="BIZ UDPGothic" pitchFamily="34" charset="-120"/>
               </a:rPr>
               <a:t>国が長期間かけて審査し「この人は日本社会の一員として認める」と判断した人だから。土地を買いたい外国人は、まず永住権を取得する必要があり、それ自体が高いハードルになる</a:t>
             </a:r>
@@ -14472,7 +14472,7 @@
     <p:bg>
       <p:bgPr>
         <a:solidFill>
-          <a:srgbClr val="0A0A0A"/>
+          <a:srgbClr val="F5F6F8"/>
         </a:solidFill>
       </p:bgPr>
     </p:bg>
@@ -14517,11 +14517,11 @@
             <a:r>
               <a:rPr lang="en-US" sz="900" b="1" spc="400" kern="0" dirty="0">
                 <a:solidFill>
-                  <a:srgbClr val="D62828"/>
-                </a:solidFill>
-                <a:latin typeface="Arial" pitchFamily="34" charset="0"/>
-                <a:ea typeface="Arial" pitchFamily="34" charset="-122"/>
-                <a:cs typeface="Arial" pitchFamily="34" charset="-120"/>
+                  <a:srgbClr val="C8161D"/>
+                </a:solidFill>
+                <a:latin typeface="Arial" pitchFamily="34" charset="0"/>
+                <a:ea typeface="BIZ UDPGothic" pitchFamily="34" charset="-122"/>
+                <a:cs typeface="BIZ UDPGothic" pitchFamily="34" charset="-120"/>
               </a:rPr>
               <a:t>RULE 01 — DETAIL</a:t>
             </a:r>
@@ -14556,11 +14556,11 @@
             <a:r>
               <a:rPr lang="en-US" sz="2800" b="1" dirty="0">
                 <a:solidFill>
-                  <a:srgbClr val="F5F5F0"/>
-                </a:solidFill>
-                <a:latin typeface="Cambria" pitchFamily="34" charset="0"/>
-                <a:ea typeface="Cambria" pitchFamily="34" charset="-122"/>
-                <a:cs typeface="Cambria" pitchFamily="34" charset="-120"/>
+                  <a:srgbClr val="16181D"/>
+                </a:solidFill>
+                <a:latin typeface="BIZ UDPGothic" pitchFamily="34" charset="0"/>
+                <a:ea typeface="BIZ UDPGothic" pitchFamily="34" charset="-122"/>
+                <a:cs typeface="BIZ UDPGothic" pitchFamily="34" charset="-120"/>
               </a:rPr>
               <a:t>外国資本15%ルールとは？</a:t>
             </a:r>
@@ -14583,11 +14583,11 @@
             <a:avLst/>
           </a:prstGeom>
           <a:solidFill>
-            <a:srgbClr val="2E2E2E"/>
+            <a:srgbClr val="DDE0E6"/>
           </a:solidFill>
           <a:ln w="12700">
             <a:solidFill>
-              <a:srgbClr val="2E2E2E"/>
+              <a:srgbClr val="DDE0E6"/>
             </a:solidFill>
             <a:prstDash val="solid"/>
           </a:ln>
@@ -14620,11 +14620,11 @@
             <a:r>
               <a:rPr lang="en-US" sz="1100" dirty="0">
                 <a:solidFill>
-                  <a:srgbClr val="CCCCCC"/>
-                </a:solidFill>
-                <a:latin typeface="Arial" pitchFamily="34" charset="0"/>
-                <a:ea typeface="Arial" pitchFamily="34" charset="-122"/>
-                <a:cs typeface="Arial" pitchFamily="34" charset="-120"/>
+                  <a:srgbClr val="2B2F36"/>
+                </a:solidFill>
+                <a:latin typeface="Arial" pitchFamily="34" charset="0"/>
+                <a:ea typeface="BIZ UDPGothic" pitchFamily="34" charset="-122"/>
+                <a:cs typeface="BIZ UDPGothic" pitchFamily="34" charset="-120"/>
               </a:rPr>
               <a:t>日本の会社（日本法人）でも、外国人・外国企業が大きな割合を持っていれば、実質的に「外国の会社」と同じリスクがある。</a:t>
             </a:r>
@@ -14649,11 +14649,11 @@
             </a:avLst>
           </a:prstGeom>
           <a:solidFill>
-            <a:srgbClr val="081808"/>
+            <a:srgbClr val="E9EFF8"/>
           </a:solidFill>
           <a:ln w="12700">
             <a:solidFill>
-              <a:srgbClr val="2E2E2E"/>
+              <a:srgbClr val="DDE0E6"/>
             </a:solidFill>
             <a:prstDash val="solid"/>
           </a:ln>
@@ -14686,11 +14686,11 @@
             <a:r>
               <a:rPr lang="en-US" sz="1300" dirty="0">
                 <a:solidFill>
-                  <a:srgbClr val="4CAF50"/>
-                </a:solidFill>
-                <a:latin typeface="Arial" pitchFamily="34" charset="0"/>
-                <a:ea typeface="Arial" pitchFamily="34" charset="-122"/>
-                <a:cs typeface="Arial" pitchFamily="34" charset="-120"/>
+                  <a:srgbClr val="1D4F91"/>
+                </a:solidFill>
+                <a:latin typeface="Arial" pitchFamily="34" charset="0"/>
+                <a:ea typeface="BIZ UDPGothic" pitchFamily="34" charset="-122"/>
+                <a:cs typeface="BIZ UDPGothic" pitchFamily="34" charset="-120"/>
               </a:rPr>
               <a:t>✅</a:t>
             </a:r>
@@ -14725,11 +14725,11 @@
             <a:r>
               <a:rPr lang="en-US" sz="1300" dirty="0">
                 <a:solidFill>
-                  <a:srgbClr val="CCCCCC"/>
-                </a:solidFill>
-                <a:latin typeface="Arial" pitchFamily="34" charset="0"/>
-                <a:ea typeface="Arial" pitchFamily="34" charset="-122"/>
-                <a:cs typeface="Arial" pitchFamily="34" charset="-120"/>
+                  <a:srgbClr val="2B2F36"/>
+                </a:solidFill>
+                <a:latin typeface="Arial" pitchFamily="34" charset="0"/>
+                <a:ea typeface="BIZ UDPGothic" pitchFamily="34" charset="-122"/>
+                <a:cs typeface="BIZ UDPGothic" pitchFamily="34" charset="-120"/>
               </a:rPr>
               <a:t>日本法人A：外国資本が10%だけ入っている → 土地を買える（15%以下なので問題なし）</a:t>
             </a:r>
@@ -14754,11 +14754,11 @@
             </a:avLst>
           </a:prstGeom>
           <a:solidFill>
-            <a:srgbClr val="1A0808"/>
+            <a:srgbClr val="FCEBEB"/>
           </a:solidFill>
           <a:ln w="12700">
             <a:solidFill>
-              <a:srgbClr val="2E2E2E"/>
+              <a:srgbClr val="DDE0E6"/>
             </a:solidFill>
             <a:prstDash val="solid"/>
           </a:ln>
@@ -14791,11 +14791,11 @@
             <a:r>
               <a:rPr lang="en-US" sz="1300" dirty="0">
                 <a:solidFill>
-                  <a:srgbClr val="D62828"/>
-                </a:solidFill>
-                <a:latin typeface="Arial" pitchFamily="34" charset="0"/>
-                <a:ea typeface="Arial" pitchFamily="34" charset="-122"/>
-                <a:cs typeface="Arial" pitchFamily="34" charset="-120"/>
+                  <a:srgbClr val="C8161D"/>
+                </a:solidFill>
+                <a:latin typeface="Arial" pitchFamily="34" charset="0"/>
+                <a:ea typeface="BIZ UDPGothic" pitchFamily="34" charset="-122"/>
+                <a:cs typeface="BIZ UDPGothic" pitchFamily="34" charset="-120"/>
               </a:rPr>
               <a:t>❌</a:t>
             </a:r>
@@ -14830,11 +14830,11 @@
             <a:r>
               <a:rPr lang="en-US" sz="1300" dirty="0">
                 <a:solidFill>
-                  <a:srgbClr val="CCCCCC"/>
-                </a:solidFill>
-                <a:latin typeface="Arial" pitchFamily="34" charset="0"/>
-                <a:ea typeface="Arial" pitchFamily="34" charset="-122"/>
-                <a:cs typeface="Arial" pitchFamily="34" charset="-120"/>
+                  <a:srgbClr val="2B2F36"/>
+                </a:solidFill>
+                <a:latin typeface="Arial" pitchFamily="34" charset="0"/>
+                <a:ea typeface="BIZ UDPGothic" pitchFamily="34" charset="-122"/>
+                <a:cs typeface="BIZ UDPGothic" pitchFamily="34" charset="-120"/>
               </a:rPr>
               <a:t>日本法人B：外国資本が40%入っている → 土地を買えない（15%超なので実質「外国の会社」とみなす）</a:t>
             </a:r>
@@ -14859,11 +14859,11 @@
             </a:avLst>
           </a:prstGeom>
           <a:solidFill>
-            <a:srgbClr val="1A1408"/>
+            <a:srgbClr val="FFF4DB"/>
           </a:solidFill>
           <a:ln w="12700">
             <a:solidFill>
-              <a:srgbClr val="2E2E2E"/>
+              <a:srgbClr val="DDE0E6"/>
             </a:solidFill>
             <a:prstDash val="solid"/>
           </a:ln>
@@ -14896,11 +14896,11 @@
             <a:r>
               <a:rPr lang="en-US" sz="1200" b="1" dirty="0">
                 <a:solidFill>
-                  <a:srgbClr val="E0A000"/>
-                </a:solidFill>
-                <a:latin typeface="Cambria" pitchFamily="34" charset="0"/>
-                <a:ea typeface="Cambria" pitchFamily="34" charset="-122"/>
-                <a:cs typeface="Cambria" pitchFamily="34" charset="-120"/>
+                  <a:srgbClr val="9A6200"/>
+                </a:solidFill>
+                <a:latin typeface="BIZ UDPGothic" pitchFamily="34" charset="0"/>
+                <a:ea typeface="BIZ UDPGothic" pitchFamily="34" charset="-122"/>
+                <a:cs typeface="BIZ UDPGothic" pitchFamily="34" charset="-120"/>
               </a:rPr>
               <a:t>なぜ15%？</a:t>
             </a:r>
@@ -14935,11 +14935,11 @@
             <a:r>
               <a:rPr lang="en-US" sz="1000" dirty="0">
                 <a:solidFill>
-                  <a:srgbClr val="CCCCCC"/>
-                </a:solidFill>
-                <a:latin typeface="Arial" pitchFamily="34" charset="0"/>
-                <a:ea typeface="Arial" pitchFamily="34" charset="-122"/>
-                <a:cs typeface="Arial" pitchFamily="34" charset="-120"/>
+                  <a:srgbClr val="2B2F36"/>
+                </a:solidFill>
+                <a:latin typeface="Arial" pitchFamily="34" charset="0"/>
+                <a:ea typeface="BIZ UDPGothic" pitchFamily="34" charset="-122"/>
+                <a:cs typeface="BIZ UDPGothic" pitchFamily="34" charset="-120"/>
               </a:rPr>
               <a:t>外国為替・外国貿易法（外為法）で「企業への対内直接投資を審査する基準」として使われているラインに合わせた数字。この水準を超えると、外国が経営に実質的な影響を与えられると判断される。</a:t>
             </a:r>
@@ -14964,11 +14964,11 @@
             </a:avLst>
           </a:prstGeom>
           <a:solidFill>
-            <a:srgbClr val="141414"/>
+            <a:srgbClr val="FFFFFF"/>
           </a:solidFill>
           <a:ln w="12700">
             <a:solidFill>
-              <a:srgbClr val="2E2E2E"/>
+              <a:srgbClr val="DDE0E6"/>
             </a:solidFill>
             <a:prstDash val="solid"/>
           </a:ln>
@@ -15001,11 +15001,11 @@
             <a:r>
               <a:rPr lang="en-US" sz="1200" b="1" dirty="0">
                 <a:solidFill>
-                  <a:srgbClr val="F5F5F0"/>
-                </a:solidFill>
-                <a:latin typeface="Cambria" pitchFamily="34" charset="0"/>
-                <a:ea typeface="Cambria" pitchFamily="34" charset="-122"/>
-                <a:cs typeface="Cambria" pitchFamily="34" charset="-120"/>
+                  <a:srgbClr val="16181D"/>
+                </a:solidFill>
+                <a:latin typeface="BIZ UDPGothic" pitchFamily="34" charset="0"/>
+                <a:ea typeface="BIZ UDPGothic" pitchFamily="34" charset="-122"/>
+                <a:cs typeface="BIZ UDPGothic" pitchFamily="34" charset="-120"/>
               </a:rPr>
               <a:t>抜け道を防ぐために</a:t>
             </a:r>
@@ -15040,11 +15040,11 @@
             <a:r>
               <a:rPr lang="en-US" sz="1000" dirty="0">
                 <a:solidFill>
-                  <a:srgbClr val="CCCCCC"/>
-                </a:solidFill>
-                <a:latin typeface="Arial" pitchFamily="34" charset="0"/>
-                <a:ea typeface="Arial" pitchFamily="34" charset="-122"/>
-                <a:cs typeface="Arial" pitchFamily="34" charset="-120"/>
+                  <a:srgbClr val="2B2F36"/>
+                </a:solidFill>
+                <a:latin typeface="Arial" pitchFamily="34" charset="0"/>
+                <a:ea typeface="BIZ UDPGothic" pitchFamily="34" charset="-122"/>
+                <a:cs typeface="BIZ UDPGothic" pitchFamily="34" charset="-120"/>
               </a:rPr>
               <a:t>外国人が直接買えないなら「日本の会社」を使って買えばいい——というズルをこのルールで防ぐ。日本の名前がついた法人でも、中身が外国資本なら同じ制限をかける。</a:t>
             </a:r>
@@ -15066,7 +15066,7 @@
     <p:bg>
       <p:bgPr>
         <a:solidFill>
-          <a:srgbClr val="0A0A0A"/>
+          <a:srgbClr val="F5F6F8"/>
         </a:solidFill>
       </p:bgPr>
     </p:bg>
@@ -15111,11 +15111,11 @@
             <a:r>
               <a:rPr lang="en-US" sz="900" b="1" spc="400" kern="0" dirty="0">
                 <a:solidFill>
-                  <a:srgbClr val="D62828"/>
-                </a:solidFill>
-                <a:latin typeface="Arial" pitchFamily="34" charset="0"/>
-                <a:ea typeface="Arial" pitchFamily="34" charset="-122"/>
-                <a:cs typeface="Arial" pitchFamily="34" charset="-120"/>
+                  <a:srgbClr val="C8161D"/>
+                </a:solidFill>
+                <a:latin typeface="Arial" pitchFamily="34" charset="0"/>
+                <a:ea typeface="BIZ UDPGothic" pitchFamily="34" charset="-122"/>
+                <a:cs typeface="BIZ UDPGothic" pitchFamily="34" charset="-120"/>
               </a:rPr>
               <a:t>RULE 01 — TRANSITION</a:t>
             </a:r>
@@ -15150,11 +15150,11 @@
             <a:r>
               <a:rPr lang="en-US" sz="2800" b="1" dirty="0">
                 <a:solidFill>
-                  <a:srgbClr val="F5F5F0"/>
-                </a:solidFill>
-                <a:latin typeface="Cambria" pitchFamily="34" charset="0"/>
-                <a:ea typeface="Cambria" pitchFamily="34" charset="-122"/>
-                <a:cs typeface="Cambria" pitchFamily="34" charset="-120"/>
+                  <a:srgbClr val="16181D"/>
+                </a:solidFill>
+                <a:latin typeface="BIZ UDPGothic" pitchFamily="34" charset="0"/>
+                <a:ea typeface="BIZ UDPGothic" pitchFamily="34" charset="-122"/>
+                <a:cs typeface="BIZ UDPGothic" pitchFamily="34" charset="-120"/>
               </a:rPr>
               <a:t>今すでに外国人が持っている土地はどうなる？</a:t>
             </a:r>
@@ -15177,11 +15177,11 @@
             <a:avLst/>
           </a:prstGeom>
           <a:solidFill>
-            <a:srgbClr val="2E2E2E"/>
+            <a:srgbClr val="DDE0E6"/>
           </a:solidFill>
           <a:ln w="12700">
             <a:solidFill>
-              <a:srgbClr val="2E2E2E"/>
+              <a:srgbClr val="DDE0E6"/>
             </a:solidFill>
             <a:prstDash val="solid"/>
           </a:ln>
@@ -15214,11 +15214,11 @@
             <a:r>
               <a:rPr lang="en-US" sz="1100" dirty="0">
                 <a:solidFill>
-                  <a:srgbClr val="CCCCCC"/>
-                </a:solidFill>
-                <a:latin typeface="Arial" pitchFamily="34" charset="0"/>
-                <a:ea typeface="Arial" pitchFamily="34" charset="-122"/>
-                <a:cs typeface="Arial" pitchFamily="34" charset="-120"/>
+                  <a:srgbClr val="2B2F36"/>
+                </a:solidFill>
+                <a:latin typeface="Arial" pitchFamily="34" charset="0"/>
+                <a:ea typeface="BIZ UDPGothic" pitchFamily="34" charset="-122"/>
+                <a:cs typeface="BIZ UDPGothic" pitchFamily="34" charset="-120"/>
               </a:rPr>
               <a:t>新しいルールができたら、今すでに土地を持っている外国人・外国資本も5年以内に売らなければならない。「前から持っていたから大丈夫」はない。</a:t>
             </a:r>
@@ -15243,11 +15243,11 @@
             </a:avLst>
           </a:prstGeom>
           <a:solidFill>
-            <a:srgbClr val="1A1A1A"/>
+            <a:srgbClr val="FFFFFF"/>
           </a:solidFill>
           <a:ln w="12700">
             <a:solidFill>
-              <a:srgbClr val="2E2E2E"/>
+              <a:srgbClr val="DDE0E6"/>
             </a:solidFill>
             <a:prstDash val="solid"/>
           </a:ln>
@@ -15270,11 +15270,11 @@
             </a:avLst>
           </a:prstGeom>
           <a:solidFill>
-            <a:srgbClr val="D62828"/>
+            <a:srgbClr val="C8161D"/>
           </a:solidFill>
           <a:ln w="12700">
             <a:solidFill>
-              <a:srgbClr val="D62828"/>
+              <a:srgbClr val="C8161D"/>
             </a:solidFill>
             <a:prstDash val="solid"/>
           </a:ln>
@@ -15307,11 +15307,11 @@
             <a:r>
               <a:rPr lang="en-US" sz="1100" b="1" dirty="0">
                 <a:solidFill>
-                  <a:srgbClr val="F5F5F0"/>
-                </a:solidFill>
-                <a:latin typeface="Arial" pitchFamily="34" charset="0"/>
-                <a:ea typeface="Arial" pitchFamily="34" charset="-122"/>
-                <a:cs typeface="Arial" pitchFamily="34" charset="-120"/>
+                  <a:srgbClr val="FFFFFF"/>
+                </a:solidFill>
+                <a:latin typeface="Arial" pitchFamily="34" charset="0"/>
+                <a:ea typeface="BIZ UDPGothic" pitchFamily="34" charset="-122"/>
+                <a:cs typeface="BIZ UDPGothic" pitchFamily="34" charset="-120"/>
               </a:rPr>
               <a:t>制度スタート（0年目）</a:t>
             </a:r>
@@ -15346,11 +15346,11 @@
             <a:r>
               <a:rPr lang="en-US" sz="1100" dirty="0">
                 <a:solidFill>
-                  <a:srgbClr val="CCCCCC"/>
-                </a:solidFill>
-                <a:latin typeface="Arial" pitchFamily="34" charset="0"/>
-                <a:ea typeface="Arial" pitchFamily="34" charset="-122"/>
-                <a:cs typeface="Arial" pitchFamily="34" charset="-120"/>
+                  <a:srgbClr val="2B2F36"/>
+                </a:solidFill>
+                <a:latin typeface="Arial" pitchFamily="34" charset="0"/>
+                <a:ea typeface="BIZ UDPGothic" pitchFamily="34" charset="-122"/>
+                <a:cs typeface="BIZ UDPGothic" pitchFamily="34" charset="-120"/>
               </a:rPr>
               <a:t>ルール開始と同時に5年のカウントが始まる。事前の告知期間はない</a:t>
             </a:r>
@@ -15385,11 +15385,11 @@
             <a:r>
               <a:rPr lang="en-US" sz="1200" dirty="0">
                 <a:solidFill>
-                  <a:srgbClr val="D62828"/>
-                </a:solidFill>
-                <a:latin typeface="Arial" pitchFamily="34" charset="0"/>
-                <a:ea typeface="Arial" pitchFamily="34" charset="-122"/>
-                <a:cs typeface="Arial" pitchFamily="34" charset="-120"/>
+                  <a:srgbClr val="C8161D"/>
+                </a:solidFill>
+                <a:latin typeface="Arial" pitchFamily="34" charset="0"/>
+                <a:ea typeface="BIZ UDPGothic" pitchFamily="34" charset="-122"/>
+                <a:cs typeface="BIZ UDPGothic" pitchFamily="34" charset="-120"/>
               </a:rPr>
               <a:t>↓</a:t>
             </a:r>
@@ -15414,11 +15414,11 @@
             </a:avLst>
           </a:prstGeom>
           <a:solidFill>
-            <a:srgbClr val="1A1A1A"/>
+            <a:srgbClr val="FFFFFF"/>
           </a:solidFill>
           <a:ln w="12700">
             <a:solidFill>
-              <a:srgbClr val="2E2E2E"/>
+              <a:srgbClr val="DDE0E6"/>
             </a:solidFill>
             <a:prstDash val="solid"/>
           </a:ln>
@@ -15441,11 +15441,11 @@
             </a:avLst>
           </a:prstGeom>
           <a:solidFill>
-            <a:srgbClr val="D62828"/>
+            <a:srgbClr val="C8161D"/>
           </a:solidFill>
           <a:ln w="12700">
             <a:solidFill>
-              <a:srgbClr val="D62828"/>
+              <a:srgbClr val="C8161D"/>
             </a:solidFill>
             <a:prstDash val="solid"/>
           </a:ln>
@@ -15478,11 +15478,11 @@
             <a:r>
               <a:rPr lang="en-US" sz="1100" b="1" dirty="0">
                 <a:solidFill>
-                  <a:srgbClr val="F5F5F0"/>
-                </a:solidFill>
-                <a:latin typeface="Arial" pitchFamily="34" charset="0"/>
-                <a:ea typeface="Arial" pitchFamily="34" charset="-122"/>
-                <a:cs typeface="Arial" pitchFamily="34" charset="-120"/>
+                  <a:srgbClr val="FFFFFF"/>
+                </a:solidFill>
+                <a:latin typeface="Arial" pitchFamily="34" charset="0"/>
+                <a:ea typeface="BIZ UDPGothic" pitchFamily="34" charset="-122"/>
+                <a:cs typeface="BIZ UDPGothic" pitchFamily="34" charset="-120"/>
               </a:rPr>
               <a:t>5年以内</a:t>
             </a:r>
@@ -15517,11 +15517,11 @@
             <a:r>
               <a:rPr lang="en-US" sz="1100" dirty="0">
                 <a:solidFill>
-                  <a:srgbClr val="CCCCCC"/>
-                </a:solidFill>
-                <a:latin typeface="Arial" pitchFamily="34" charset="0"/>
-                <a:ea typeface="Arial" pitchFamily="34" charset="-122"/>
-                <a:cs typeface="Arial" pitchFamily="34" charset="-120"/>
+                  <a:srgbClr val="2B2F36"/>
+                </a:solidFill>
+                <a:latin typeface="Arial" pitchFamily="34" charset="0"/>
+                <a:ea typeface="BIZ UDPGothic" pitchFamily="34" charset="-122"/>
+                <a:cs typeface="BIZ UDPGothic" pitchFamily="34" charset="-120"/>
               </a:rPr>
               <a:t>まず日本国内の民間企業・個人に売ることを優先する。</a:t>
             </a:r>
@@ -15534,11 +15534,11 @@
             <a:r>
               <a:rPr lang="en-US" sz="1100" dirty="0">
                 <a:solidFill>
-                  <a:srgbClr val="CCCCCC"/>
-                </a:solidFill>
-                <a:latin typeface="Arial" pitchFamily="34" charset="0"/>
-                <a:ea typeface="Arial" pitchFamily="34" charset="-122"/>
-                <a:cs typeface="Arial" pitchFamily="34" charset="-120"/>
+                  <a:srgbClr val="2B2F36"/>
+                </a:solidFill>
+                <a:latin typeface="Arial" pitchFamily="34" charset="0"/>
+                <a:ea typeface="BIZ UDPGothic" pitchFamily="34" charset="-122"/>
+                <a:cs typeface="BIZ UDPGothic" pitchFamily="34" charset="-120"/>
               </a:rPr>
               <a:t>「日本企業が土地を買って外国企業に貸す」というビジネスが自然に生まれる</a:t>
             </a:r>
@@ -15573,11 +15573,11 @@
             <a:r>
               <a:rPr lang="en-US" sz="1200" dirty="0">
                 <a:solidFill>
-                  <a:srgbClr val="D62828"/>
-                </a:solidFill>
-                <a:latin typeface="Arial" pitchFamily="34" charset="0"/>
-                <a:ea typeface="Arial" pitchFamily="34" charset="-122"/>
-                <a:cs typeface="Arial" pitchFamily="34" charset="-120"/>
+                  <a:srgbClr val="C8161D"/>
+                </a:solidFill>
+                <a:latin typeface="Arial" pitchFamily="34" charset="0"/>
+                <a:ea typeface="BIZ UDPGothic" pitchFamily="34" charset="-122"/>
+                <a:cs typeface="BIZ UDPGothic" pitchFamily="34" charset="-120"/>
               </a:rPr>
               <a:t>↓</a:t>
             </a:r>
@@ -15602,11 +15602,11 @@
             </a:avLst>
           </a:prstGeom>
           <a:solidFill>
-            <a:srgbClr val="1A1A1A"/>
+            <a:srgbClr val="FFFFFF"/>
           </a:solidFill>
           <a:ln w="12700">
             <a:solidFill>
-              <a:srgbClr val="2E2E2E"/>
+              <a:srgbClr val="DDE0E6"/>
             </a:solidFill>
             <a:prstDash val="solid"/>
           </a:ln>
@@ -15629,11 +15629,11 @@
             </a:avLst>
           </a:prstGeom>
           <a:solidFill>
-            <a:srgbClr val="D62828"/>
+            <a:srgbClr val="C8161D"/>
           </a:solidFill>
           <a:ln w="12700">
             <a:solidFill>
-              <a:srgbClr val="D62828"/>
+              <a:srgbClr val="C8161D"/>
             </a:solidFill>
             <a:prstDash val="solid"/>
           </a:ln>
@@ -15666,11 +15666,11 @@
             <a:r>
               <a:rPr lang="en-US" sz="1100" b="1" dirty="0">
                 <a:solidFill>
-                  <a:srgbClr val="F5F5F0"/>
-                </a:solidFill>
-                <a:latin typeface="Arial" pitchFamily="34" charset="0"/>
-                <a:ea typeface="Arial" pitchFamily="34" charset="-122"/>
-                <a:cs typeface="Arial" pitchFamily="34" charset="-120"/>
+                  <a:srgbClr val="FFFFFF"/>
+                </a:solidFill>
+                <a:latin typeface="Arial" pitchFamily="34" charset="0"/>
+                <a:ea typeface="BIZ UDPGothic" pitchFamily="34" charset="-122"/>
+                <a:cs typeface="BIZ UDPGothic" pitchFamily="34" charset="-120"/>
               </a:rPr>
               <a:t>売れなかった場合</a:t>
             </a:r>
@@ -15705,11 +15705,11 @@
             <a:r>
               <a:rPr lang="en-US" sz="1100" dirty="0">
                 <a:solidFill>
-                  <a:srgbClr val="CCCCCC"/>
-                </a:solidFill>
-                <a:latin typeface="Arial" pitchFamily="34" charset="0"/>
-                <a:ea typeface="Arial" pitchFamily="34" charset="-122"/>
-                <a:cs typeface="Arial" pitchFamily="34" charset="-120"/>
+                  <a:srgbClr val="2B2F36"/>
+                </a:solidFill>
+                <a:latin typeface="Arial" pitchFamily="34" charset="0"/>
+                <a:ea typeface="BIZ UDPGothic" pitchFamily="34" charset="-122"/>
+                <a:cs typeface="BIZ UDPGothic" pitchFamily="34" charset="-120"/>
               </a:rPr>
               <a:t>国が最終的に買い取る仕組みを用意する。</a:t>
             </a:r>
@@ -15722,11 +15722,11 @@
             <a:r>
               <a:rPr lang="en-US" sz="1100" dirty="0">
                 <a:solidFill>
-                  <a:srgbClr val="CCCCCC"/>
-                </a:solidFill>
-                <a:latin typeface="Arial" pitchFamily="34" charset="0"/>
-                <a:ea typeface="Arial" pitchFamily="34" charset="-122"/>
-                <a:cs typeface="Arial" pitchFamily="34" charset="-120"/>
+                  <a:srgbClr val="2B2F36"/>
+                </a:solidFill>
+                <a:latin typeface="Arial" pitchFamily="34" charset="0"/>
+                <a:ea typeface="BIZ UDPGothic" pitchFamily="34" charset="-122"/>
+                <a:cs typeface="BIZ UDPGothic" pitchFamily="34" charset="-120"/>
               </a:rPr>
               <a:t>「売れないから放置」は認めない</a:t>
             </a:r>
@@ -15751,11 +15751,11 @@
             </a:avLst>
           </a:prstGeom>
           <a:solidFill>
-            <a:srgbClr val="1A0808"/>
+            <a:srgbClr val="FCEBEB"/>
           </a:solidFill>
           <a:ln w="12700">
             <a:solidFill>
-              <a:srgbClr val="2E2E2E"/>
+              <a:srgbClr val="DDE0E6"/>
             </a:solidFill>
             <a:prstDash val="solid"/>
           </a:ln>
@@ -15788,11 +15788,11 @@
             <a:r>
               <a:rPr lang="en-US" sz="1000" dirty="0">
                 <a:solidFill>
-                  <a:srgbClr val="D62828"/>
-                </a:solidFill>
-                <a:latin typeface="Arial" pitchFamily="34" charset="0"/>
-                <a:ea typeface="Arial" pitchFamily="34" charset="-122"/>
-                <a:cs typeface="Arial" pitchFamily="34" charset="-120"/>
+                  <a:srgbClr val="C8161D"/>
+                </a:solidFill>
+                <a:latin typeface="Arial" pitchFamily="34" charset="0"/>
+                <a:ea typeface="BIZ UDPGothic" pitchFamily="34" charset="-122"/>
+                <a:cs typeface="BIZ UDPGothic" pitchFamily="34" charset="-120"/>
               </a:rPr>
               <a:t>既得権（前から持っていたから守られるべき権利）は一切保護しない。ここは日本の国土。</a:t>
             </a:r>
